--- a/skills/dsh-academic-ppt/references/templates/method.pptx
+++ b/skills/dsh-academic-ppt/references/templates/method.pptx
@@ -512,7 +512,7 @@
 内容职责：系统接口；核验与失败处理。
 建议讲述时间只是排练起点，按实际内容调整。
 参考文献（完整题名）
-T1 · Full article title: connecting decision models, experimental evidence and independent validation in crop cultivation · 期刊与卷页（替换） · 2026 · 待替换 · 书目占位，非真实文献</a:t>
+T1 · Full article title: connecting decision models, experimental evidence and independent validation in crop cultivation · 期刊与卷页（替换） · 2026 · 书目占位；图表均为合成示例 · 书目占位，非真实文献</a:t>
             </a:r>
             <a:endParaRPr lang="en-US" dirty="0"/>
           </a:p>
@@ -605,7 +605,7 @@
 内容职责：状态 s_t；动作 a_t；奖励 r_t；安全约束。
 建议讲述时间只是排练起点，按实际内容调整。
 参考文献（完整题名）
-T1 · Full article title: connecting decision models, experimental evidence and independent validation in crop cultivation · 期刊与卷页（替换） · 2026 · 待替换 · 书目占位，非真实文献</a:t>
+T1 · Full article title: connecting decision models, experimental evidence and independent validation in crop cultivation · 期刊与卷页（替换） · 2026 · 书目占位；图表均为合成示例 · 书目占位，非真实文献</a:t>
             </a:r>
             <a:endParaRPr lang="en-US" dirty="0"/>
           </a:p>
@@ -698,7 +698,7 @@
 内容职责：路由依据；工具覆盖范围。
 建议讲述时间只是排练起点，按实际内容调整。
 参考文献（完整题名）
-T1 · Full article title: connecting decision models, experimental evidence and independent validation in crop cultivation · 期刊与卷页（替换） · 2026 · 待替换 · 书目占位，非真实文献</a:t>
+T1 · Full article title: connecting decision models, experimental evidence and independent validation in crop cultivation · 期刊与卷页（替换） · 2026 · 书目占位；图表均为合成示例 · 书目占位，非真实文献</a:t>
             </a:r>
             <a:endParaRPr lang="en-US" dirty="0"/>
           </a:p>
@@ -791,7 +791,7 @@
 内容职责：输入与单位；校准与验证；模型失配。
 建议讲述时间只是排练起点，按实际内容调整。
 参考文献（完整题名）
-T1 · Full article title: connecting decision models, experimental evidence and independent validation in crop cultivation · 期刊与卷页（替换） · 2026 · 待替换 · 书目占位，非真实文献</a:t>
+T1 · Full article title: connecting decision models, experimental evidence and independent validation in crop cultivation · 期刊与卷页（替换） · 2026 · 书目占位；图表均为合成示例 · 书目占位，非真实文献</a:t>
             </a:r>
             <a:endParaRPr lang="en-US" dirty="0"/>
           </a:p>
@@ -884,7 +884,7 @@
 内容职责：关键运算；更新规则；假设与计算条件。
 建议讲述时间只是排练起点，按实际内容调整。
 参考文献（完整题名）
-T1 · Full article title: connecting decision models, experimental evidence and independent validation in crop cultivation · 期刊与卷页（替换） · 2026 · 待替换 · 书目占位，非真实文献</a:t>
+T1 · Full article title: connecting decision models, experimental evidence and independent validation in crop cultivation · 期刊与卷页（替换） · 2026 · 书目占位；图表均为合成示例 · 书目占位，非真实文献</a:t>
             </a:r>
             <a:endParaRPr lang="en-US" dirty="0"/>
           </a:p>
@@ -977,7 +977,7 @@
 内容职责：优化目标；约束集合；求解与评价；符号与单位；可识别性假设。
 建议讲述时间只是排练起点，按实际内容调整。
 参考文献（完整题名）
-T1 · Full article title: connecting decision models, experimental evidence and independent validation in crop cultivation · 期刊与卷页（替换） · 2026 · 待替换 · 书目占位，非真实文献</a:t>
+T1 · Full article title: connecting decision models, experimental evidence and independent validation in crop cultivation · 期刊与卷页（替换） · 2026 · 书目占位；图表均为合成示例 · 书目占位，非真实文献</a:t>
             </a:r>
             <a:endParaRPr lang="en-US" dirty="0"/>
           </a:p>
@@ -1421,14 +1421,14 @@
       </p:sp>
       <p:sp>
         <p:nvSpPr>
-          <p:cNvPr id="4" name="T07/kicker"/>
-          <p:cNvSpPr/>
-          <p:nvPr/>
-        </p:nvSpPr>
-        <p:spPr>
-          <a:xfrm>
-            <a:off x="457200" y="152400"/>
-            <a:ext cx="11277600" cy="190500"/>
+          <p:cNvPr id="4" name="T07/title"/>
+          <p:cNvSpPr/>
+          <p:nvPr/>
+        </p:nvSpPr>
+        <p:spPr>
+          <a:xfrm>
+            <a:off x="457200" y="209550"/>
+            <a:ext cx="11277600" cy="438150"/>
           </a:xfrm>
           <a:prstGeom prst="rect">
             <a:avLst/>
@@ -1442,54 +1442,12 @@
           <a:p>
             <a:pPr algn="l" indent="0" marL="0">
               <a:lnSpc>
-                <a:spcPts val="1320"/>
-              </a:lnSpc>
-              <a:buNone/>
-            </a:pPr>
-            <a:r>
-              <a:rPr lang="zh-CN" altLang="en-US" sz="1200" dirty="0">
-                <a:solidFill>
-                  <a:srgbClr val="515B68"/>
-                </a:solidFill>
-                <a:latin typeface="Noto Sans CJK SC" pitchFamily="34" charset="0"/>
-                <a:ea typeface="Noto Sans CJK SC" pitchFamily="34" charset="-122"/>
-                <a:cs typeface="Noto Sans CJK SC" pitchFamily="34" charset="-120"/>
-              </a:rPr>
-              <a:t>结构模板 / 占位说明与合成数据</a:t>
-            </a:r>
-            <a:endParaRPr lang="zh-CN" sz="1200" dirty="0"/>
-          </a:p>
-        </p:txBody>
-      </p:sp>
-      <p:sp>
-        <p:nvSpPr>
-          <p:cNvPr id="5" name="T07/title"/>
-          <p:cNvSpPr/>
-          <p:nvPr/>
-        </p:nvSpPr>
-        <p:spPr>
-          <a:xfrm>
-            <a:off x="457200" y="381000"/>
-            <a:ext cx="11277600" cy="400050"/>
-          </a:xfrm>
-          <a:prstGeom prst="rect">
-            <a:avLst/>
-          </a:prstGeom>
-          <a:noFill/>
-          <a:ln/>
-        </p:spPr>
-        <p:txBody>
-          <a:bodyPr wrap="none" lIns="0" tIns="0" rIns="0" bIns="0" rtlCol="0" anchor="t"/>
-          <a:lstStyle/>
-          <a:p>
-            <a:pPr algn="l" indent="0" marL="0">
-              <a:lnSpc>
-                <a:spcPts val="2856"/>
-              </a:lnSpc>
-              <a:buNone/>
-            </a:pPr>
-            <a:r>
-              <a:rPr lang="zh-CN" altLang="en-US" sz="2550" b="1" dirty="0">
+                <a:spcPts val="3360"/>
+              </a:lnSpc>
+              <a:buNone/>
+            </a:pPr>
+            <a:r>
+              <a:rPr lang="zh-CN" altLang="en-US" sz="3000" b="1" dirty="0">
                 <a:solidFill>
                   <a:srgbClr val="1C2430"/>
                 </a:solidFill>
@@ -1499,26 +1457,49 @@
               </a:rPr>
               <a:t>智能体执行与反馈</a:t>
             </a:r>
-            <a:endParaRPr lang="zh-CN" sz="2550" dirty="0"/>
-          </a:p>
-        </p:txBody>
-      </p:sp>
-      <p:sp>
-        <p:nvSpPr>
-          <p:cNvPr id="6" name="T07/header-rule"/>
-          <p:cNvSpPr/>
-          <p:nvPr/>
-        </p:nvSpPr>
-        <p:spPr>
-          <a:xfrm>
-            <a:off x="457200" y="876300"/>
+            <a:endParaRPr lang="zh-CN" sz="3000" dirty="0"/>
+          </a:p>
+        </p:txBody>
+      </p:sp>
+      <p:sp>
+        <p:nvSpPr>
+          <p:cNvPr id="5" name="T07/header-rule"/>
+          <p:cNvSpPr/>
+          <p:nvPr/>
+        </p:nvSpPr>
+        <p:spPr>
+          <a:xfrm>
+            <a:off x="457200" y="752475"/>
             <a:ext cx="11277600" cy="0"/>
           </a:xfrm>
           <a:prstGeom prst="line">
             <a:avLst/>
           </a:prstGeom>
           <a:noFill/>
-          <a:ln w="11430">
+          <a:ln w="10478">
+            <a:solidFill>
+              <a:srgbClr val="BEC8D4"/>
+            </a:solidFill>
+            <a:prstDash val="solid"/>
+          </a:ln>
+        </p:spPr>
+      </p:sp>
+      <p:sp>
+        <p:nvSpPr>
+          <p:cNvPr id="6" name="T07/header-accent"/>
+          <p:cNvSpPr/>
+          <p:nvPr/>
+        </p:nvSpPr>
+        <p:spPr>
+          <a:xfrm>
+            <a:off x="457200" y="752475"/>
+            <a:ext cx="704850" cy="0"/>
+          </a:xfrm>
+          <a:prstGeom prst="line">
+            <a:avLst/>
+          </a:prstGeom>
+          <a:noFill/>
+          <a:ln w="28575">
             <a:solidFill>
               <a:srgbClr val="173C70"/>
             </a:solidFill>
@@ -1534,8 +1515,8 @@
         </p:nvSpPr>
         <p:spPr>
           <a:xfrm>
-            <a:off x="457200" y="1333500"/>
-            <a:ext cx="7829550" cy="4191000"/>
+            <a:off x="457200" y="1147381"/>
+            <a:ext cx="7829550" cy="4352163"/>
           </a:xfrm>
           <a:prstGeom prst="rect">
             <a:avLst/>
@@ -1559,14 +1540,14 @@
         </p:nvSpPr>
         <p:spPr>
           <a:xfrm>
-            <a:off x="466725" y="1343025"/>
+            <a:off x="466725" y="1156907"/>
             <a:ext cx="7810500" cy="381000"/>
           </a:xfrm>
           <a:prstGeom prst="rect">
             <a:avLst/>
           </a:prstGeom>
           <a:solidFill>
-            <a:srgbClr val="EEF3F8"/>
+            <a:srgbClr val="EAF2FA"/>
           </a:solidFill>
           <a:ln w="12700">
             <a:solidFill>
@@ -1586,7 +1567,7 @@
         </p:nvSpPr>
         <p:spPr>
           <a:xfrm>
-            <a:off x="457200" y="1724025"/>
+            <a:off x="457200" y="1537906"/>
             <a:ext cx="7829550" cy="0"/>
           </a:xfrm>
           <a:prstGeom prst="line">
@@ -1609,8 +1590,8 @@
         </p:nvSpPr>
         <p:spPr>
           <a:xfrm>
-            <a:off x="581025" y="1390650"/>
-            <a:ext cx="7581900" cy="295275"/>
+            <a:off x="581025" y="1195007"/>
+            <a:ext cx="7581900" cy="304800"/>
           </a:xfrm>
           <a:prstGeom prst="rect">
             <a:avLst/>
@@ -1624,7 +1605,49 @@
           <a:p>
             <a:pPr algn="l" indent="0" marL="0">
               <a:lnSpc>
-                <a:spcPts val="2070"/>
+                <a:spcPts val="2242"/>
+              </a:lnSpc>
+              <a:buNone/>
+            </a:pPr>
+            <a:r>
+              <a:rPr lang="zh-CN" altLang="en-US" sz="1950" b="1" dirty="0">
+                <a:solidFill>
+                  <a:srgbClr val="235E96"/>
+                </a:solidFill>
+                <a:latin typeface="Noto Sans CJK SC" pitchFamily="34" charset="0"/>
+                <a:ea typeface="Noto Sans CJK SC" pitchFamily="34" charset="-122"/>
+                <a:cs typeface="Noto Sans CJK SC" pitchFamily="34" charset="-120"/>
+              </a:rPr>
+              <a:t>任务驱动的执行闭环</a:t>
+            </a:r>
+            <a:endParaRPr lang="zh-CN" sz="1950" dirty="0"/>
+          </a:p>
+        </p:txBody>
+      </p:sp>
+      <p:sp>
+        <p:nvSpPr>
+          <p:cNvPr id="11" name="T07/takeaway"/>
+          <p:cNvSpPr/>
+          <p:nvPr/>
+        </p:nvSpPr>
+        <p:spPr>
+          <a:xfrm>
+            <a:off x="457200" y="5657850"/>
+            <a:ext cx="7829550" cy="356045"/>
+          </a:xfrm>
+          <a:prstGeom prst="rect">
+            <a:avLst/>
+          </a:prstGeom>
+          <a:noFill/>
+          <a:ln/>
+        </p:spPr>
+        <p:txBody>
+          <a:bodyPr wrap="none" lIns="0" tIns="0" rIns="0" bIns="0" rtlCol="0" anchor="t"/>
+          <a:lstStyle/>
+          <a:p>
+            <a:pPr algn="l" indent="0" marL="0">
+              <a:lnSpc>
+                <a:spcPts val="2160"/>
               </a:lnSpc>
               <a:buNone/>
             </a:pPr>
@@ -1637,7 +1660,7 @@
                 <a:ea typeface="Noto Sans CJK SC" pitchFamily="34" charset="-122"/>
                 <a:cs typeface="Noto Sans CJK SC" pitchFamily="34" charset="-120"/>
               </a:rPr>
-              <a:t>任务驱动的执行闭环</a:t>
+              <a:t>解释必须由本页证据支持，并保留样本、对照与适用条件。</a:t>
             </a:r>
             <a:endParaRPr lang="zh-CN" sz="1800" dirty="0"/>
           </a:p>
@@ -1645,55 +1668,13 @@
       </p:sp>
       <p:sp>
         <p:nvSpPr>
-          <p:cNvPr id="11" name="T07/takeaway"/>
-          <p:cNvSpPr/>
-          <p:nvPr/>
-        </p:nvSpPr>
-        <p:spPr>
-          <a:xfrm>
-            <a:off x="457200" y="5676900"/>
-            <a:ext cx="7829550" cy="342900"/>
-          </a:xfrm>
-          <a:prstGeom prst="rect">
-            <a:avLst/>
-          </a:prstGeom>
-          <a:noFill/>
-          <a:ln/>
-        </p:spPr>
-        <p:txBody>
-          <a:bodyPr wrap="none" lIns="0" tIns="0" rIns="0" bIns="0" rtlCol="0" anchor="t"/>
-          <a:lstStyle/>
-          <a:p>
-            <a:pPr algn="l" indent="0" marL="0">
-              <a:lnSpc>
-                <a:spcPts val="2160"/>
-              </a:lnSpc>
-              <a:buNone/>
-            </a:pPr>
-            <a:r>
-              <a:rPr lang="zh-CN" altLang="en-US" sz="1800" b="1" dirty="0">
-                <a:solidFill>
-                  <a:srgbClr val="173C70"/>
-                </a:solidFill>
-                <a:latin typeface="Noto Sans CJK SC" pitchFamily="34" charset="0"/>
-                <a:ea typeface="Noto Sans CJK SC" pitchFamily="34" charset="-122"/>
-                <a:cs typeface="Noto Sans CJK SC" pitchFamily="34" charset="-120"/>
-              </a:rPr>
-              <a:t>解释必须由本页证据支持，并保留样本、对照与适用条件。</a:t>
-            </a:r>
-            <a:endParaRPr lang="zh-CN" sz="1800" dirty="0"/>
-          </a:p>
-        </p:txBody>
-      </p:sp>
-      <p:sp>
-        <p:nvSpPr>
           <p:cNvPr id="12" name="T07/edge:0"/>
           <p:cNvSpPr/>
           <p:nvPr/>
         </p:nvSpPr>
         <p:spPr>
           <a:xfrm>
-            <a:off x="2762250" y="2409825"/>
+            <a:off x="2762250" y="2265093"/>
             <a:ext cx="476250" cy="0"/>
           </a:xfrm>
           <a:prstGeom prst="line">
@@ -1717,7 +1698,7 @@
         </p:nvSpPr>
         <p:spPr>
           <a:xfrm>
-            <a:off x="5391150" y="2409825"/>
+            <a:off x="5391150" y="2265093"/>
             <a:ext cx="476250" cy="0"/>
           </a:xfrm>
           <a:prstGeom prst="line">
@@ -1741,8 +1722,8 @@
         </p:nvSpPr>
         <p:spPr>
           <a:xfrm>
-            <a:off x="6943725" y="2933700"/>
-            <a:ext cx="0" cy="1200150"/>
+            <a:off x="6943725" y="2809113"/>
+            <a:ext cx="0" cy="1246346"/>
           </a:xfrm>
           <a:prstGeom prst="line">
             <a:avLst/>
@@ -1765,7 +1746,7 @@
         </p:nvSpPr>
         <p:spPr>
           <a:xfrm flipH="1">
-            <a:off x="5391150" y="4657725"/>
+            <a:off x="5391150" y="4599480"/>
             <a:ext cx="476250" cy="0"/>
           </a:xfrm>
           <a:prstGeom prst="line">
@@ -1789,7 +1770,7 @@
         </p:nvSpPr>
         <p:spPr>
           <a:xfrm flipH="1">
-            <a:off x="2762250" y="4657725"/>
+            <a:off x="2762250" y="4599480"/>
             <a:ext cx="476250" cy="0"/>
           </a:xfrm>
           <a:prstGeom prst="line">
@@ -1813,7 +1794,7 @@
         </p:nvSpPr>
         <p:spPr>
           <a:xfrm flipH="1">
-            <a:off x="466725" y="4657725"/>
+            <a:off x="466725" y="4599480"/>
             <a:ext cx="142875" cy="0"/>
           </a:xfrm>
           <a:prstGeom prst="line">
@@ -1836,8 +1817,8 @@
         </p:nvSpPr>
         <p:spPr>
           <a:xfrm flipV="1">
-            <a:off x="466725" y="2409825"/>
-            <a:ext cx="0" cy="2247900"/>
+            <a:off x="466725" y="2265093"/>
+            <a:ext cx="0" cy="2334387"/>
           </a:xfrm>
           <a:prstGeom prst="line">
             <a:avLst/>
@@ -1859,7 +1840,7 @@
         </p:nvSpPr>
         <p:spPr>
           <a:xfrm>
-            <a:off x="466725" y="2409825"/>
+            <a:off x="466725" y="2265093"/>
             <a:ext cx="142875" cy="0"/>
           </a:xfrm>
           <a:prstGeom prst="line">
@@ -1883,14 +1864,14 @@
         </p:nvSpPr>
         <p:spPr>
           <a:xfrm>
-            <a:off x="609600" y="1885950"/>
-            <a:ext cx="2152650" cy="1047750"/>
+            <a:off x="609600" y="1721072"/>
+            <a:ext cx="2152650" cy="1088041"/>
           </a:xfrm>
           <a:prstGeom prst="rect">
             <a:avLst/>
           </a:prstGeom>
           <a:solidFill>
-            <a:srgbClr val="FFFFFF"/>
+            <a:srgbClr val="F0F3F6"/>
           </a:solidFill>
           <a:ln w="11430">
             <a:solidFill>
@@ -1908,7 +1889,7 @@
         </p:nvSpPr>
         <p:spPr>
           <a:xfrm>
-            <a:off x="609600" y="1885950"/>
+            <a:off x="609600" y="1721072"/>
             <a:ext cx="2152650" cy="0"/>
           </a:xfrm>
           <a:prstGeom prst="line">
@@ -1917,7 +1898,7 @@
           <a:noFill/>
           <a:ln w="19050">
             <a:solidFill>
-              <a:srgbClr val="173C70"/>
+              <a:srgbClr val="536A7A"/>
             </a:solidFill>
             <a:prstDash val="solid"/>
           </a:ln>
@@ -1931,7 +1912,7 @@
         </p:nvSpPr>
         <p:spPr>
           <a:xfrm>
-            <a:off x="723900" y="2276475"/>
+            <a:off x="723900" y="1816322"/>
             <a:ext cx="1924050" cy="266700"/>
           </a:xfrm>
           <a:prstGeom prst="rect">
@@ -1953,7 +1934,7 @@
             <a:r>
               <a:rPr lang="zh-CN" altLang="en-US" sz="1800" b="1" dirty="0">
                 <a:solidFill>
-                  <a:srgbClr val="173C70"/>
+                  <a:srgbClr val="536A7A"/>
                 </a:solidFill>
                 <a:latin typeface="Noto Sans CJK SC" pitchFamily="34" charset="0"/>
                 <a:ea typeface="Noto Sans CJK SC" pitchFamily="34" charset="-122"/>
@@ -1967,20 +1948,62 @@
       </p:sp>
       <p:sp>
         <p:nvSpPr>
-          <p:cNvPr id="23" name="T07/node:step-2:frame"/>
-          <p:cNvSpPr/>
-          <p:nvPr/>
-        </p:nvSpPr>
-        <p:spPr>
-          <a:xfrm>
-            <a:off x="3238500" y="1885950"/>
-            <a:ext cx="2152650" cy="1047750"/>
+          <p:cNvPr id="23" name="T07/node:step-1:detail"/>
+          <p:cNvSpPr/>
+          <p:nvPr/>
+        </p:nvSpPr>
+        <p:spPr>
+          <a:xfrm>
+            <a:off x="723900" y="2130647"/>
+            <a:ext cx="1924050" cy="592741"/>
+          </a:xfrm>
+          <a:prstGeom prst="rect">
+            <a:avLst/>
+          </a:prstGeom>
+          <a:noFill/>
+          <a:ln/>
+        </p:spPr>
+        <p:txBody>
+          <a:bodyPr wrap="none" lIns="0" tIns="0" rIns="0" bIns="0" rtlCol="0" anchor="t"/>
+          <a:lstStyle/>
+          <a:p>
+            <a:pPr algn="ctr" indent="0" marL="0">
+              <a:lnSpc>
+                <a:spcPts val="1947"/>
+              </a:lnSpc>
+              <a:buNone/>
+            </a:pPr>
+            <a:r>
+              <a:rPr lang="zh-CN" altLang="en-US" sz="1650" dirty="0">
+                <a:solidFill>
+                  <a:srgbClr val="1C2430"/>
+                </a:solidFill>
+                <a:latin typeface="Noto Sans CJK SC" pitchFamily="34" charset="0"/>
+                <a:ea typeface="Noto Sans CJK SC" pitchFamily="34" charset="-122"/>
+                <a:cs typeface="Noto Sans CJK SC" pitchFamily="34" charset="-120"/>
+              </a:rPr>
+              <a:t>目标与可用数据</a:t>
+            </a:r>
+            <a:endParaRPr lang="zh-CN" sz="1650" dirty="0"/>
+          </a:p>
+        </p:txBody>
+      </p:sp>
+      <p:sp>
+        <p:nvSpPr>
+          <p:cNvPr id="24" name="T07/node:step-2:frame"/>
+          <p:cNvSpPr/>
+          <p:nvPr/>
+        </p:nvSpPr>
+        <p:spPr>
+          <a:xfrm>
+            <a:off x="3238500" y="1721072"/>
+            <a:ext cx="2152650" cy="1088041"/>
           </a:xfrm>
           <a:prstGeom prst="rect">
             <a:avLst/>
           </a:prstGeom>
           <a:solidFill>
-            <a:srgbClr val="FFFFFF"/>
+            <a:srgbClr val="EAF2FA"/>
           </a:solidFill>
           <a:ln w="11430">
             <a:solidFill>
@@ -1992,13 +2015,13 @@
       </p:sp>
       <p:sp>
         <p:nvSpPr>
-          <p:cNvPr id="24" name="T07/node:step-2:heading-rule"/>
-          <p:cNvSpPr/>
-          <p:nvPr/>
-        </p:nvSpPr>
-        <p:spPr>
-          <a:xfrm>
-            <a:off x="3238500" y="1885950"/>
+          <p:cNvPr id="25" name="T07/node:step-2:heading-rule"/>
+          <p:cNvSpPr/>
+          <p:nvPr/>
+        </p:nvSpPr>
+        <p:spPr>
+          <a:xfrm>
+            <a:off x="3238500" y="1721072"/>
             <a:ext cx="2152650" cy="0"/>
           </a:xfrm>
           <a:prstGeom prst="line">
@@ -2007,21 +2030,21 @@
           <a:noFill/>
           <a:ln w="19050">
             <a:solidFill>
-              <a:srgbClr val="173C70"/>
-            </a:solidFill>
-            <a:prstDash val="solid"/>
-          </a:ln>
-        </p:spPr>
-      </p:sp>
-      <p:sp>
-        <p:nvSpPr>
-          <p:cNvPr id="25" name="T07/node:step-2:label"/>
-          <p:cNvSpPr/>
-          <p:nvPr/>
-        </p:nvSpPr>
-        <p:spPr>
-          <a:xfrm>
-            <a:off x="3352800" y="2276475"/>
+              <a:srgbClr val="235E96"/>
+            </a:solidFill>
+            <a:prstDash val="solid"/>
+          </a:ln>
+        </p:spPr>
+      </p:sp>
+      <p:sp>
+        <p:nvSpPr>
+          <p:cNvPr id="26" name="T07/node:step-2:label"/>
+          <p:cNvSpPr/>
+          <p:nvPr/>
+        </p:nvSpPr>
+        <p:spPr>
+          <a:xfrm>
+            <a:off x="3352800" y="1816322"/>
             <a:ext cx="1924050" cy="266700"/>
           </a:xfrm>
           <a:prstGeom prst="rect">
@@ -2043,13 +2066,13 @@
             <a:r>
               <a:rPr lang="zh-CN" altLang="en-US" sz="1800" b="1" dirty="0">
                 <a:solidFill>
-                  <a:srgbClr val="173C70"/>
-                </a:solidFill>
-                <a:latin typeface="Noto Sans CJK SC" pitchFamily="34" charset="0"/>
-                <a:ea typeface="Noto Sans CJK SC" pitchFamily="34" charset="-122"/>
-                <a:cs typeface="Noto Sans CJK SC" pitchFamily="34" charset="-120"/>
-              </a:rPr>
-              <a:t>计划与工具选择</a:t>
+                  <a:srgbClr val="235E96"/>
+                </a:solidFill>
+                <a:latin typeface="Noto Sans CJK SC" pitchFamily="34" charset="0"/>
+                <a:ea typeface="Noto Sans CJK SC" pitchFamily="34" charset="-122"/>
+                <a:cs typeface="Noto Sans CJK SC" pitchFamily="34" charset="-120"/>
+              </a:rPr>
+              <a:t>计划与工具</a:t>
             </a:r>
             <a:endParaRPr lang="zh-CN" sz="1800" dirty="0"/>
           </a:p>
@@ -2057,20 +2080,62 @@
       </p:sp>
       <p:sp>
         <p:nvSpPr>
-          <p:cNvPr id="26" name="T07/node:step-3:frame"/>
-          <p:cNvSpPr/>
-          <p:nvPr/>
-        </p:nvSpPr>
-        <p:spPr>
-          <a:xfrm>
-            <a:off x="5867400" y="1885950"/>
-            <a:ext cx="2152650" cy="1047750"/>
+          <p:cNvPr id="27" name="T07/node:step-2:detail"/>
+          <p:cNvSpPr/>
+          <p:nvPr/>
+        </p:nvSpPr>
+        <p:spPr>
+          <a:xfrm>
+            <a:off x="3352800" y="2130647"/>
+            <a:ext cx="1924050" cy="592741"/>
+          </a:xfrm>
+          <a:prstGeom prst="rect">
+            <a:avLst/>
+          </a:prstGeom>
+          <a:noFill/>
+          <a:ln/>
+        </p:spPr>
+        <p:txBody>
+          <a:bodyPr wrap="none" lIns="0" tIns="0" rIns="0" bIns="0" rtlCol="0" anchor="t"/>
+          <a:lstStyle/>
+          <a:p>
+            <a:pPr algn="ctr" indent="0" marL="0">
+              <a:lnSpc>
+                <a:spcPts val="1947"/>
+              </a:lnSpc>
+              <a:buNone/>
+            </a:pPr>
+            <a:r>
+              <a:rPr lang="zh-CN" altLang="en-US" sz="1650" dirty="0">
+                <a:solidFill>
+                  <a:srgbClr val="1C2430"/>
+                </a:solidFill>
+                <a:latin typeface="Noto Sans CJK SC" pitchFamily="34" charset="0"/>
+                <a:ea typeface="Noto Sans CJK SC" pitchFamily="34" charset="-122"/>
+                <a:cs typeface="Noto Sans CJK SC" pitchFamily="34" charset="-120"/>
+              </a:rPr>
+              <a:t>工具与调用顺序</a:t>
+            </a:r>
+            <a:endParaRPr lang="zh-CN" sz="1650" dirty="0"/>
+          </a:p>
+        </p:txBody>
+      </p:sp>
+      <p:sp>
+        <p:nvSpPr>
+          <p:cNvPr id="28" name="T07/node:step-3:frame"/>
+          <p:cNvSpPr/>
+          <p:nvPr/>
+        </p:nvSpPr>
+        <p:spPr>
+          <a:xfrm>
+            <a:off x="5867400" y="1721072"/>
+            <a:ext cx="2152650" cy="1088041"/>
           </a:xfrm>
           <a:prstGeom prst="rect">
             <a:avLst/>
           </a:prstGeom>
           <a:solidFill>
-            <a:srgbClr val="FFFFFF"/>
+            <a:srgbClr val="EAF2FA"/>
           </a:solidFill>
           <a:ln w="11430">
             <a:solidFill>
@@ -2082,13 +2147,13 @@
       </p:sp>
       <p:sp>
         <p:nvSpPr>
-          <p:cNvPr id="27" name="T07/node:step-3:heading-rule"/>
-          <p:cNvSpPr/>
-          <p:nvPr/>
-        </p:nvSpPr>
-        <p:spPr>
-          <a:xfrm>
-            <a:off x="5867400" y="1885950"/>
+          <p:cNvPr id="29" name="T07/node:step-3:heading-rule"/>
+          <p:cNvSpPr/>
+          <p:nvPr/>
+        </p:nvSpPr>
+        <p:spPr>
+          <a:xfrm>
+            <a:off x="5867400" y="1721072"/>
             <a:ext cx="2152650" cy="0"/>
           </a:xfrm>
           <a:prstGeom prst="line">
@@ -2097,21 +2162,21 @@
           <a:noFill/>
           <a:ln w="19050">
             <a:solidFill>
-              <a:srgbClr val="173C70"/>
-            </a:solidFill>
-            <a:prstDash val="solid"/>
-          </a:ln>
-        </p:spPr>
-      </p:sp>
-      <p:sp>
-        <p:nvSpPr>
-          <p:cNvPr id="28" name="T07/node:step-3:label"/>
-          <p:cNvSpPr/>
-          <p:nvPr/>
-        </p:nvSpPr>
-        <p:spPr>
-          <a:xfrm>
-            <a:off x="5981700" y="2276475"/>
+              <a:srgbClr val="235E96"/>
+            </a:solidFill>
+            <a:prstDash val="solid"/>
+          </a:ln>
+        </p:spPr>
+      </p:sp>
+      <p:sp>
+        <p:nvSpPr>
+          <p:cNvPr id="30" name="T07/node:step-3:label"/>
+          <p:cNvSpPr/>
+          <p:nvPr/>
+        </p:nvSpPr>
+        <p:spPr>
+          <a:xfrm>
+            <a:off x="5981700" y="1816322"/>
             <a:ext cx="1924050" cy="266700"/>
           </a:xfrm>
           <a:prstGeom prst="rect">
@@ -2133,7 +2198,7 @@
             <a:r>
               <a:rPr lang="zh-CN" altLang="en-US" sz="1800" b="1" dirty="0">
                 <a:solidFill>
-                  <a:srgbClr val="173C70"/>
+                  <a:srgbClr val="235E96"/>
                 </a:solidFill>
                 <a:latin typeface="Noto Sans CJK SC" pitchFamily="34" charset="0"/>
                 <a:ea typeface="Noto Sans CJK SC" pitchFamily="34" charset="-122"/>
@@ -2147,20 +2212,62 @@
       </p:sp>
       <p:sp>
         <p:nvSpPr>
-          <p:cNvPr id="29" name="T07/node:step-4:frame"/>
-          <p:cNvSpPr/>
-          <p:nvPr/>
-        </p:nvSpPr>
-        <p:spPr>
-          <a:xfrm>
-            <a:off x="5867400" y="4133850"/>
-            <a:ext cx="2152650" cy="1047750"/>
+          <p:cNvPr id="31" name="T07/node:step-3:detail"/>
+          <p:cNvSpPr/>
+          <p:nvPr/>
+        </p:nvSpPr>
+        <p:spPr>
+          <a:xfrm>
+            <a:off x="5981700" y="2130647"/>
+            <a:ext cx="1924050" cy="592741"/>
+          </a:xfrm>
+          <a:prstGeom prst="rect">
+            <a:avLst/>
+          </a:prstGeom>
+          <a:noFill/>
+          <a:ln/>
+        </p:spPr>
+        <p:txBody>
+          <a:bodyPr wrap="none" lIns="0" tIns="0" rIns="0" bIns="0" rtlCol="0" anchor="t"/>
+          <a:lstStyle/>
+          <a:p>
+            <a:pPr algn="ctr" indent="0" marL="0">
+              <a:lnSpc>
+                <a:spcPts val="1947"/>
+              </a:lnSpc>
+              <a:buNone/>
+            </a:pPr>
+            <a:r>
+              <a:rPr lang="zh-CN" altLang="en-US" sz="1650" dirty="0">
+                <a:solidFill>
+                  <a:srgbClr val="1C2430"/>
+                </a:solidFill>
+                <a:latin typeface="Noto Sans CJK SC" pitchFamily="34" charset="0"/>
+                <a:ea typeface="Noto Sans CJK SC" pitchFamily="34" charset="-122"/>
+                <a:cs typeface="Noto Sans CJK SC" pitchFamily="34" charset="-120"/>
+              </a:rPr>
+              <a:t>输入、参数和日志</a:t>
+            </a:r>
+            <a:endParaRPr lang="zh-CN" sz="1650" dirty="0"/>
+          </a:p>
+        </p:txBody>
+      </p:sp>
+      <p:sp>
+        <p:nvSpPr>
+          <p:cNvPr id="32" name="T07/node:step-4:frame"/>
+          <p:cNvSpPr/>
+          <p:nvPr/>
+        </p:nvSpPr>
+        <p:spPr>
+          <a:xfrm>
+            <a:off x="5867400" y="4055459"/>
+            <a:ext cx="2152650" cy="1088041"/>
           </a:xfrm>
           <a:prstGeom prst="rect">
             <a:avLst/>
           </a:prstGeom>
           <a:solidFill>
-            <a:srgbClr val="FFFFFF"/>
+            <a:srgbClr val="E9F4F0"/>
           </a:solidFill>
           <a:ln w="11430">
             <a:solidFill>
@@ -2172,13 +2279,13 @@
       </p:sp>
       <p:sp>
         <p:nvSpPr>
-          <p:cNvPr id="30" name="T07/node:step-4:heading-rule"/>
-          <p:cNvSpPr/>
-          <p:nvPr/>
-        </p:nvSpPr>
-        <p:spPr>
-          <a:xfrm>
-            <a:off x="5867400" y="4133850"/>
+          <p:cNvPr id="33" name="T07/node:step-4:heading-rule"/>
+          <p:cNvSpPr/>
+          <p:nvPr/>
+        </p:nvSpPr>
+        <p:spPr>
+          <a:xfrm>
+            <a:off x="5867400" y="4055459"/>
             <a:ext cx="2152650" cy="0"/>
           </a:xfrm>
           <a:prstGeom prst="line">
@@ -2187,21 +2294,21 @@
           <a:noFill/>
           <a:ln w="19050">
             <a:solidFill>
-              <a:srgbClr val="173C70"/>
-            </a:solidFill>
-            <a:prstDash val="solid"/>
-          </a:ln>
-        </p:spPr>
-      </p:sp>
-      <p:sp>
-        <p:nvSpPr>
-          <p:cNvPr id="31" name="T07/node:step-4:label"/>
-          <p:cNvSpPr/>
-          <p:nvPr/>
-        </p:nvSpPr>
-        <p:spPr>
-          <a:xfrm>
-            <a:off x="5981700" y="4524375"/>
+              <a:srgbClr val="146C63"/>
+            </a:solidFill>
+            <a:prstDash val="solid"/>
+          </a:ln>
+        </p:spPr>
+      </p:sp>
+      <p:sp>
+        <p:nvSpPr>
+          <p:cNvPr id="34" name="T07/node:step-4:label"/>
+          <p:cNvSpPr/>
+          <p:nvPr/>
+        </p:nvSpPr>
+        <p:spPr>
+          <a:xfrm>
+            <a:off x="5981700" y="4150709"/>
             <a:ext cx="1924050" cy="266700"/>
           </a:xfrm>
           <a:prstGeom prst="rect">
@@ -2223,7 +2330,7 @@
             <a:r>
               <a:rPr lang="zh-CN" altLang="en-US" sz="1800" b="1" dirty="0">
                 <a:solidFill>
-                  <a:srgbClr val="173C70"/>
+                  <a:srgbClr val="146C63"/>
                 </a:solidFill>
                 <a:latin typeface="Noto Sans CJK SC" pitchFamily="34" charset="0"/>
                 <a:ea typeface="Noto Sans CJK SC" pitchFamily="34" charset="-122"/>
@@ -2237,20 +2344,62 @@
       </p:sp>
       <p:sp>
         <p:nvSpPr>
-          <p:cNvPr id="32" name="T07/node:step-5:frame"/>
-          <p:cNvSpPr/>
-          <p:nvPr/>
-        </p:nvSpPr>
-        <p:spPr>
-          <a:xfrm>
-            <a:off x="3238500" y="4133850"/>
-            <a:ext cx="2152650" cy="1047750"/>
+          <p:cNvPr id="35" name="T07/node:step-4:detail"/>
+          <p:cNvSpPr/>
+          <p:nvPr/>
+        </p:nvSpPr>
+        <p:spPr>
+          <a:xfrm>
+            <a:off x="5981700" y="4465034"/>
+            <a:ext cx="1924050" cy="592741"/>
+          </a:xfrm>
+          <a:prstGeom prst="rect">
+            <a:avLst/>
+          </a:prstGeom>
+          <a:noFill/>
+          <a:ln/>
+        </p:spPr>
+        <p:txBody>
+          <a:bodyPr wrap="none" lIns="0" tIns="0" rIns="0" bIns="0" rtlCol="0" anchor="t"/>
+          <a:lstStyle/>
+          <a:p>
+            <a:pPr algn="ctr" indent="0" marL="0">
+              <a:lnSpc>
+                <a:spcPts val="1947"/>
+              </a:lnSpc>
+              <a:buNone/>
+            </a:pPr>
+            <a:r>
+              <a:rPr lang="zh-CN" altLang="en-US" sz="1650" dirty="0">
+                <a:solidFill>
+                  <a:srgbClr val="1C2430"/>
+                </a:solidFill>
+                <a:latin typeface="Noto Sans CJK SC" pitchFamily="34" charset="0"/>
+                <a:ea typeface="Noto Sans CJK SC" pitchFamily="34" charset="-122"/>
+                <a:cs typeface="Noto Sans CJK SC" pitchFamily="34" charset="-120"/>
+              </a:rPr>
+              <a:t>结果与来源一致</a:t>
+            </a:r>
+            <a:endParaRPr lang="zh-CN" sz="1650" dirty="0"/>
+          </a:p>
+        </p:txBody>
+      </p:sp>
+      <p:sp>
+        <p:nvSpPr>
+          <p:cNvPr id="36" name="T07/node:step-5:frame"/>
+          <p:cNvSpPr/>
+          <p:nvPr/>
+        </p:nvSpPr>
+        <p:spPr>
+          <a:xfrm>
+            <a:off x="3238500" y="4055459"/>
+            <a:ext cx="2152650" cy="1088041"/>
           </a:xfrm>
           <a:prstGeom prst="rect">
             <a:avLst/>
           </a:prstGeom>
           <a:solidFill>
-            <a:srgbClr val="FFFFFF"/>
+            <a:srgbClr val="EAF2FA"/>
           </a:solidFill>
           <a:ln w="11430">
             <a:solidFill>
@@ -2262,13 +2411,13 @@
       </p:sp>
       <p:sp>
         <p:nvSpPr>
-          <p:cNvPr id="33" name="T07/node:step-5:heading-rule"/>
-          <p:cNvSpPr/>
-          <p:nvPr/>
-        </p:nvSpPr>
-        <p:spPr>
-          <a:xfrm>
-            <a:off x="3238500" y="4133850"/>
+          <p:cNvPr id="37" name="T07/node:step-5:heading-rule"/>
+          <p:cNvSpPr/>
+          <p:nvPr/>
+        </p:nvSpPr>
+        <p:spPr>
+          <a:xfrm>
+            <a:off x="3238500" y="4055459"/>
             <a:ext cx="2152650" cy="0"/>
           </a:xfrm>
           <a:prstGeom prst="line">
@@ -2277,21 +2426,21 @@
           <a:noFill/>
           <a:ln w="19050">
             <a:solidFill>
-              <a:srgbClr val="173C70"/>
-            </a:solidFill>
-            <a:prstDash val="solid"/>
-          </a:ln>
-        </p:spPr>
-      </p:sp>
-      <p:sp>
-        <p:nvSpPr>
-          <p:cNvPr id="34" name="T07/node:step-5:label"/>
-          <p:cNvSpPr/>
-          <p:nvPr/>
-        </p:nvSpPr>
-        <p:spPr>
-          <a:xfrm>
-            <a:off x="3352800" y="4524375"/>
+              <a:srgbClr val="235E96"/>
+            </a:solidFill>
+            <a:prstDash val="solid"/>
+          </a:ln>
+        </p:spPr>
+      </p:sp>
+      <p:sp>
+        <p:nvSpPr>
+          <p:cNvPr id="38" name="T07/node:step-5:label"/>
+          <p:cNvSpPr/>
+          <p:nvPr/>
+        </p:nvSpPr>
+        <p:spPr>
+          <a:xfrm>
+            <a:off x="3352800" y="4150709"/>
             <a:ext cx="1924050" cy="266700"/>
           </a:xfrm>
           <a:prstGeom prst="rect">
@@ -2313,7 +2462,7 @@
             <a:r>
               <a:rPr lang="zh-CN" altLang="en-US" sz="1800" b="1" dirty="0">
                 <a:solidFill>
-                  <a:srgbClr val="173C70"/>
+                  <a:srgbClr val="235E96"/>
                 </a:solidFill>
                 <a:latin typeface="Noto Sans CJK SC" pitchFamily="34" charset="0"/>
                 <a:ea typeface="Noto Sans CJK SC" pitchFamily="34" charset="-122"/>
@@ -2327,20 +2476,62 @@
       </p:sp>
       <p:sp>
         <p:nvSpPr>
-          <p:cNvPr id="35" name="T07/node:step-6:frame"/>
-          <p:cNvSpPr/>
-          <p:nvPr/>
-        </p:nvSpPr>
-        <p:spPr>
-          <a:xfrm>
-            <a:off x="609600" y="4133850"/>
-            <a:ext cx="2152650" cy="1047750"/>
+          <p:cNvPr id="39" name="T07/node:step-5:detail"/>
+          <p:cNvSpPr/>
+          <p:nvPr/>
+        </p:nvSpPr>
+        <p:spPr>
+          <a:xfrm>
+            <a:off x="3352800" y="4465034"/>
+            <a:ext cx="1924050" cy="592741"/>
+          </a:xfrm>
+          <a:prstGeom prst="rect">
+            <a:avLst/>
+          </a:prstGeom>
+          <a:noFill/>
+          <a:ln/>
+        </p:spPr>
+        <p:txBody>
+          <a:bodyPr wrap="none" lIns="0" tIns="0" rIns="0" bIns="0" rtlCol="0" anchor="t"/>
+          <a:lstStyle/>
+          <a:p>
+            <a:pPr algn="ctr" indent="0" marL="0">
+              <a:lnSpc>
+                <a:spcPts val="1947"/>
+              </a:lnSpc>
+              <a:buNone/>
+            </a:pPr>
+            <a:r>
+              <a:rPr lang="zh-CN" altLang="en-US" sz="1650" dirty="0">
+                <a:solidFill>
+                  <a:srgbClr val="1C2430"/>
+                </a:solidFill>
+                <a:latin typeface="Noto Sans CJK SC" pitchFamily="34" charset="0"/>
+                <a:ea typeface="Noto Sans CJK SC" pitchFamily="34" charset="-122"/>
+                <a:cs typeface="Noto Sans CJK SC" pitchFamily="34" charset="-120"/>
+              </a:rPr>
+              <a:t>中间状态与证据</a:t>
+            </a:r>
+            <a:endParaRPr lang="zh-CN" sz="1650" dirty="0"/>
+          </a:p>
+        </p:txBody>
+      </p:sp>
+      <p:sp>
+        <p:nvSpPr>
+          <p:cNvPr id="40" name="T07/node:step-6:frame"/>
+          <p:cNvSpPr/>
+          <p:nvPr/>
+        </p:nvSpPr>
+        <p:spPr>
+          <a:xfrm>
+            <a:off x="609600" y="4055459"/>
+            <a:ext cx="2152650" cy="1088041"/>
           </a:xfrm>
           <a:prstGeom prst="rect">
             <a:avLst/>
           </a:prstGeom>
           <a:solidFill>
-            <a:srgbClr val="FFFFFF"/>
+            <a:srgbClr val="EAF2FA"/>
           </a:solidFill>
           <a:ln w="11430">
             <a:solidFill>
@@ -2352,13 +2543,13 @@
       </p:sp>
       <p:sp>
         <p:nvSpPr>
-          <p:cNvPr id="36" name="T07/node:step-6:heading-rule"/>
-          <p:cNvSpPr/>
-          <p:nvPr/>
-        </p:nvSpPr>
-        <p:spPr>
-          <a:xfrm>
-            <a:off x="609600" y="4133850"/>
+          <p:cNvPr id="41" name="T07/node:step-6:heading-rule"/>
+          <p:cNvSpPr/>
+          <p:nvPr/>
+        </p:nvSpPr>
+        <p:spPr>
+          <a:xfrm>
+            <a:off x="609600" y="4055459"/>
             <a:ext cx="2152650" cy="0"/>
           </a:xfrm>
           <a:prstGeom prst="line">
@@ -2367,21 +2558,21 @@
           <a:noFill/>
           <a:ln w="19050">
             <a:solidFill>
-              <a:srgbClr val="173C70"/>
-            </a:solidFill>
-            <a:prstDash val="solid"/>
-          </a:ln>
-        </p:spPr>
-      </p:sp>
-      <p:sp>
-        <p:nvSpPr>
-          <p:cNvPr id="37" name="T07/node:step-6:label"/>
-          <p:cNvSpPr/>
-          <p:nvPr/>
-        </p:nvSpPr>
-        <p:spPr>
-          <a:xfrm>
-            <a:off x="723900" y="4524375"/>
+              <a:srgbClr val="235E96"/>
+            </a:solidFill>
+            <a:prstDash val="solid"/>
+          </a:ln>
+        </p:spPr>
+      </p:sp>
+      <p:sp>
+        <p:nvSpPr>
+          <p:cNvPr id="42" name="T07/node:step-6:label"/>
+          <p:cNvSpPr/>
+          <p:nvPr/>
+        </p:nvSpPr>
+        <p:spPr>
+          <a:xfrm>
+            <a:off x="723900" y="4150709"/>
             <a:ext cx="1924050" cy="266700"/>
           </a:xfrm>
           <a:prstGeom prst="rect">
@@ -2403,7 +2594,7 @@
             <a:r>
               <a:rPr lang="zh-CN" altLang="en-US" sz="1800" b="1" dirty="0">
                 <a:solidFill>
-                  <a:srgbClr val="173C70"/>
+                  <a:srgbClr val="235E96"/>
                 </a:solidFill>
                 <a:latin typeface="Noto Sans CJK SC" pitchFamily="34" charset="0"/>
                 <a:ea typeface="Noto Sans CJK SC" pitchFamily="34" charset="-122"/>
@@ -2417,13 +2608,55 @@
       </p:sp>
       <p:sp>
         <p:nvSpPr>
-          <p:cNvPr id="38" name="T07/card/region-1/base-rule"/>
-          <p:cNvSpPr/>
-          <p:nvPr/>
-        </p:nvSpPr>
-        <p:spPr>
-          <a:xfrm>
-            <a:off x="8629650" y="3505200"/>
+          <p:cNvPr id="43" name="T07/node:step-6:detail"/>
+          <p:cNvSpPr/>
+          <p:nvPr/>
+        </p:nvSpPr>
+        <p:spPr>
+          <a:xfrm>
+            <a:off x="723900" y="4465034"/>
+            <a:ext cx="1924050" cy="592741"/>
+          </a:xfrm>
+          <a:prstGeom prst="rect">
+            <a:avLst/>
+          </a:prstGeom>
+          <a:noFill/>
+          <a:ln/>
+        </p:spPr>
+        <p:txBody>
+          <a:bodyPr wrap="none" lIns="0" tIns="0" rIns="0" bIns="0" rtlCol="0" anchor="t"/>
+          <a:lstStyle/>
+          <a:p>
+            <a:pPr algn="ctr" indent="0" marL="0">
+              <a:lnSpc>
+                <a:spcPts val="1947"/>
+              </a:lnSpc>
+              <a:buNone/>
+            </a:pPr>
+            <a:r>
+              <a:rPr lang="zh-CN" altLang="en-US" sz="1650" dirty="0">
+                <a:solidFill>
+                  <a:srgbClr val="1C2430"/>
+                </a:solidFill>
+                <a:latin typeface="Noto Sans CJK SC" pitchFamily="34" charset="0"/>
+                <a:ea typeface="Noto Sans CJK SC" pitchFamily="34" charset="-122"/>
+                <a:cs typeface="Noto Sans CJK SC" pitchFamily="34" charset="-120"/>
+              </a:rPr>
+              <a:t>继续或退出</a:t>
+            </a:r>
+            <a:endParaRPr lang="zh-CN" sz="1650" dirty="0"/>
+          </a:p>
+        </p:txBody>
+      </p:sp>
+      <p:sp>
+        <p:nvSpPr>
+          <p:cNvPr id="44" name="T07/card/region-1/base-rule"/>
+          <p:cNvSpPr/>
+          <p:nvPr/>
+        </p:nvSpPr>
+        <p:spPr>
+          <a:xfrm>
+            <a:off x="8629650" y="3402616"/>
             <a:ext cx="3105150" cy="0"/>
           </a:xfrm>
           <a:prstGeom prst="line">
@@ -2440,20 +2673,20 @@
       </p:sp>
       <p:sp>
         <p:nvSpPr>
-          <p:cNvPr id="39" name="T07/card/region-1/side-mark"/>
-          <p:cNvSpPr/>
-          <p:nvPr/>
-        </p:nvSpPr>
-        <p:spPr>
-          <a:xfrm>
-            <a:off x="8629650" y="1409700"/>
+          <p:cNvPr id="45" name="T07/card/region-1/side-mark"/>
+          <p:cNvSpPr/>
+          <p:nvPr/>
+        </p:nvSpPr>
+        <p:spPr>
+          <a:xfrm>
+            <a:off x="8629650" y="1225772"/>
             <a:ext cx="47625" cy="295275"/>
           </a:xfrm>
           <a:prstGeom prst="rect">
             <a:avLst/>
           </a:prstGeom>
           <a:solidFill>
-            <a:srgbClr val="173C70"/>
+            <a:srgbClr val="235E96"/>
           </a:solidFill>
           <a:ln w="12700">
             <a:solidFill>
@@ -2467,13 +2700,13 @@
       </p:sp>
       <p:sp>
         <p:nvSpPr>
-          <p:cNvPr id="40" name="T07/card/region-1/title"/>
-          <p:cNvSpPr/>
-          <p:nvPr/>
-        </p:nvSpPr>
-        <p:spPr>
-          <a:xfrm>
-            <a:off x="8782050" y="1409700"/>
+          <p:cNvPr id="46" name="T07/card/region-1/title"/>
+          <p:cNvSpPr/>
+          <p:nvPr/>
+        </p:nvSpPr>
+        <p:spPr>
+          <a:xfrm>
+            <a:off x="8782050" y="1225772"/>
             <a:ext cx="2952750" cy="304800"/>
           </a:xfrm>
           <a:prstGeom prst="rect">
@@ -2488,54 +2721,142 @@
           <a:p>
             <a:pPr algn="l" indent="0" marL="0">
               <a:lnSpc>
-                <a:spcPts val="2070"/>
+                <a:spcPts val="2242"/>
+              </a:lnSpc>
+              <a:buNone/>
+            </a:pPr>
+            <a:r>
+              <a:rPr lang="zh-CN" altLang="en-US" sz="1950" b="1" dirty="0">
+                <a:solidFill>
+                  <a:srgbClr val="235E96"/>
+                </a:solidFill>
+                <a:latin typeface="Noto Sans CJK SC" pitchFamily="34" charset="0"/>
+                <a:ea typeface="Noto Sans CJK SC" pitchFamily="34" charset="-122"/>
+                <a:cs typeface="Noto Sans CJK SC" pitchFamily="34" charset="-120"/>
+              </a:rPr>
+              <a:t>系统接口</a:t>
+            </a:r>
+            <a:endParaRPr lang="zh-CN" sz="1950" dirty="0"/>
+          </a:p>
+        </p:txBody>
+      </p:sp>
+      <p:sp>
+        <p:nvSpPr>
+          <p:cNvPr id="47" name="T07/card/region-1/body"/>
+          <p:cNvSpPr/>
+          <p:nvPr/>
+        </p:nvSpPr>
+        <p:spPr>
+          <a:xfrm>
+            <a:off x="8782050" y="1644872"/>
+            <a:ext cx="2952750" cy="1662494"/>
+          </a:xfrm>
+          <a:prstGeom prst="rect">
+            <a:avLst/>
+          </a:prstGeom>
+          <a:noFill/>
+          <a:ln/>
+        </p:spPr>
+        <p:txBody>
+          <a:bodyPr wrap="none" lIns="0" tIns="0" rIns="0" bIns="0" rtlCol="0" anchor="t"/>
+          <a:lstStyle/>
+          <a:p>
+            <a:pPr algn="l" indent="0" marL="0">
+              <a:lnSpc>
+                <a:spcPts val="2232"/>
+              </a:lnSpc>
+              <a:buNone/>
+            </a:pPr>
+            <a:r>
+              <a:rPr lang="zh-CN" altLang="en-US" sz="1800" dirty="0">
+                <a:solidFill>
+                  <a:srgbClr val="1C2430"/>
+                </a:solidFill>
+                <a:latin typeface="Noto Sans CJK SC" pitchFamily="34" charset="0"/>
+                <a:ea typeface="Noto Sans CJK SC" pitchFamily="34" charset="-122"/>
+                <a:cs typeface="Noto Sans CJK SC" pitchFamily="34" charset="-120"/>
+              </a:rPr>
+              <a:t>标出各步骤</a:t>
+            </a:r>
+            <a:pPr algn="l" indent="0" marL="0">
+              <a:lnSpc>
+                <a:spcPts val="2232"/>
               </a:lnSpc>
               <a:buNone/>
             </a:pPr>
             <a:r>
               <a:rPr lang="zh-CN" altLang="en-US" sz="1800" b="1" dirty="0">
                 <a:solidFill>
-                  <a:srgbClr val="173C70"/>
-                </a:solidFill>
-                <a:latin typeface="Noto Sans CJK SC" pitchFamily="34" charset="0"/>
-                <a:ea typeface="Noto Sans CJK SC" pitchFamily="34" charset="-122"/>
-                <a:cs typeface="Noto Sans CJK SC" pitchFamily="34" charset="-120"/>
-              </a:rPr>
-              <a:t>系统接口</a:t>
+                  <a:srgbClr val="235E96"/>
+                </a:solidFill>
+                <a:latin typeface="Noto Sans CJK SC" pitchFamily="34" charset="0"/>
+                <a:ea typeface="Noto Sans CJK SC" pitchFamily="34" charset="-122"/>
+                <a:cs typeface="Noto Sans CJK SC" pitchFamily="34" charset="-120"/>
+              </a:rPr>
+              <a:t>输入</a:t>
+            </a:r>
+            <a:pPr algn="l" indent="0" marL="0">
+              <a:lnSpc>
+                <a:spcPts val="2232"/>
+              </a:lnSpc>
+              <a:buNone/>
+            </a:pPr>
+            <a:r>
+              <a:rPr lang="zh-CN" altLang="en-US" sz="1800" dirty="0">
+                <a:solidFill>
+                  <a:srgbClr val="1C2430"/>
+                </a:solidFill>
+                <a:latin typeface="Noto Sans CJK SC" pitchFamily="34" charset="0"/>
+                <a:ea typeface="Noto Sans CJK SC" pitchFamily="34" charset="-122"/>
+                <a:cs typeface="Noto Sans CJK SC" pitchFamily="34" charset="-120"/>
+              </a:rPr>
+              <a:t>、</a:t>
+            </a:r>
+            <a:pPr algn="l" indent="0" marL="0">
+              <a:lnSpc>
+                <a:spcPts val="2232"/>
+              </a:lnSpc>
+              <a:buNone/>
+            </a:pPr>
+            <a:r>
+              <a:rPr lang="zh-CN" altLang="en-US" sz="1800" b="1" dirty="0">
+                <a:solidFill>
+                  <a:srgbClr val="235E96"/>
+                </a:solidFill>
+                <a:latin typeface="Noto Sans CJK SC" pitchFamily="34" charset="0"/>
+                <a:ea typeface="Noto Sans CJK SC" pitchFamily="34" charset="-122"/>
+                <a:cs typeface="Noto Sans CJK SC" pitchFamily="34" charset="-120"/>
+              </a:rPr>
+              <a:t>输出</a:t>
+            </a:r>
+            <a:pPr algn="l" indent="0" marL="0">
+              <a:lnSpc>
+                <a:spcPts val="2232"/>
+              </a:lnSpc>
+              <a:buNone/>
+            </a:pPr>
+            <a:r>
+              <a:rPr lang="zh-CN" altLang="en-US" sz="1800" dirty="0">
+                <a:solidFill>
+                  <a:srgbClr val="1C2430"/>
+                </a:solidFill>
+                <a:latin typeface="Noto Sans CJK SC" pitchFamily="34" charset="0"/>
+                <a:ea typeface="Noto Sans CJK SC" pitchFamily="34" charset="-122"/>
+                <a:cs typeface="Noto Sans CJK SC" pitchFamily="34" charset="-120"/>
+              </a:rPr>
+              <a:t>和记</a:t>
             </a:r>
             <a:endParaRPr lang="zh-CN" sz="1800" dirty="0"/>
           </a:p>
-        </p:txBody>
-      </p:sp>
-      <p:sp>
-        <p:nvSpPr>
-          <p:cNvPr id="41" name="T07/card/region-1/body"/>
-          <p:cNvSpPr/>
-          <p:nvPr/>
-        </p:nvSpPr>
-        <p:spPr>
-          <a:xfrm>
-            <a:off x="8782050" y="1828800"/>
-            <a:ext cx="2952750" cy="1581150"/>
-          </a:xfrm>
-          <a:prstGeom prst="rect">
-            <a:avLst/>
-          </a:prstGeom>
-          <a:noFill/>
-          <a:ln/>
-        </p:spPr>
-        <p:txBody>
-          <a:bodyPr wrap="none" lIns="0" tIns="0" rIns="0" bIns="0" rtlCol="0" anchor="t"/>
-          <a:lstStyle/>
-          <a:p>
-            <a:pPr algn="l" indent="0" marL="0">
-              <a:lnSpc>
-                <a:spcPts val="2139"/>
-              </a:lnSpc>
-              <a:buNone/>
-            </a:pPr>
-            <a:r>
-              <a:rPr lang="zh-CN" altLang="en-US" sz="1725" dirty="0">
+          <a:p>
+            <a:pPr algn="l" indent="0" marL="0">
+              <a:lnSpc>
+                <a:spcPts val="2232"/>
+              </a:lnSpc>
+              <a:buNone/>
+            </a:pPr>
+            <a:r>
+              <a:rPr lang="zh-CN" altLang="en-US" sz="1800" dirty="0">
                 <a:solidFill>
                   <a:srgbClr val="1C2430"/>
                 </a:solidFill>
@@ -2543,19 +2864,19 @@
                 <a:ea typeface="Noto Sans CJK SC" pitchFamily="34" charset="-122"/>
                 <a:cs typeface="Noto Sans CJK SC" pitchFamily="34" charset="-120"/>
               </a:rPr>
-              <a:t>标出各步骤输入、输出和记录</a:t>
-            </a:r>
-            <a:endParaRPr lang="zh-CN" sz="1725" dirty="0"/>
-          </a:p>
-          <a:p>
-            <a:pPr algn="l" indent="0" marL="0">
-              <a:lnSpc>
-                <a:spcPts val="2139"/>
-              </a:lnSpc>
-              <a:buNone/>
-            </a:pPr>
-            <a:r>
-              <a:rPr lang="zh-CN" altLang="en-US" sz="1725" dirty="0">
+              <a:t>录</a:t>
+            </a:r>
+            <a:endParaRPr lang="zh-CN" sz="1800" dirty="0"/>
+          </a:p>
+          <a:p>
+            <a:pPr algn="l" indent="0" marL="0">
+              <a:lnSpc>
+                <a:spcPts val="2232"/>
+              </a:lnSpc>
+              <a:buNone/>
+            </a:pPr>
+            <a:r>
+              <a:rPr lang="zh-CN" altLang="en-US" sz="1800" dirty="0">
                 <a:solidFill>
                   <a:srgbClr val="1C2430"/>
                 </a:solidFill>
@@ -2563,19 +2884,19 @@
                 <a:ea typeface="Noto Sans CJK SC" pitchFamily="34" charset="-122"/>
                 <a:cs typeface="Noto Sans CJK SC" pitchFamily="34" charset="-120"/>
               </a:rPr>
-              <a:t>区分模型决策与确定性工具计</a:t>
-            </a:r>
-            <a:endParaRPr lang="zh-CN" sz="1725" dirty="0"/>
-          </a:p>
-          <a:p>
-            <a:pPr algn="l" indent="0" marL="0">
-              <a:lnSpc>
-                <a:spcPts val="2139"/>
-              </a:lnSpc>
-              <a:buNone/>
-            </a:pPr>
-            <a:r>
-              <a:rPr lang="zh-CN" altLang="en-US" sz="1725" dirty="0">
+              <a:t>区分模型决策与确定性工具</a:t>
+            </a:r>
+            <a:endParaRPr lang="zh-CN" sz="1800" dirty="0"/>
+          </a:p>
+          <a:p>
+            <a:pPr algn="l" indent="0" marL="0">
+              <a:lnSpc>
+                <a:spcPts val="2232"/>
+              </a:lnSpc>
+              <a:buNone/>
+            </a:pPr>
+            <a:r>
+              <a:rPr lang="zh-CN" altLang="en-US" sz="1800" dirty="0">
                 <a:solidFill>
                   <a:srgbClr val="1C2430"/>
                 </a:solidFill>
@@ -2583,19 +2904,19 @@
                 <a:ea typeface="Noto Sans CJK SC" pitchFamily="34" charset="-122"/>
                 <a:cs typeface="Noto Sans CJK SC" pitchFamily="34" charset="-120"/>
               </a:rPr>
-              <a:t>算</a:t>
-            </a:r>
-            <a:endParaRPr lang="zh-CN" sz="1725" dirty="0"/>
-          </a:p>
-          <a:p>
-            <a:pPr algn="l" indent="0" marL="0">
-              <a:lnSpc>
-                <a:spcPts val="2139"/>
-              </a:lnSpc>
-              <a:buNone/>
-            </a:pPr>
-            <a:r>
-              <a:rPr lang="zh-CN" altLang="en-US" sz="1725" dirty="0">
+              <a:t>计算</a:t>
+            </a:r>
+            <a:endParaRPr lang="zh-CN" sz="1800" dirty="0"/>
+          </a:p>
+          <a:p>
+            <a:pPr algn="l" indent="0" marL="0">
+              <a:lnSpc>
+                <a:spcPts val="2232"/>
+              </a:lnSpc>
+              <a:buNone/>
+            </a:pPr>
+            <a:r>
+              <a:rPr lang="zh-CN" altLang="en-US" sz="1800" dirty="0">
                 <a:solidFill>
                   <a:srgbClr val="1C2430"/>
                 </a:solidFill>
@@ -2605,20 +2926,20 @@
               </a:rPr>
               <a:t>用箭头说明状态由谁更新</a:t>
             </a:r>
-            <a:endParaRPr lang="zh-CN" sz="1725" dirty="0"/>
-          </a:p>
-        </p:txBody>
-      </p:sp>
-      <p:sp>
-        <p:nvSpPr>
-          <p:cNvPr id="42" name="T07/card/region-2/frame"/>
-          <p:cNvSpPr/>
-          <p:nvPr/>
-        </p:nvSpPr>
-        <p:spPr>
-          <a:xfrm>
-            <a:off x="8629650" y="3848100"/>
-            <a:ext cx="3105150" cy="2133600"/>
+            <a:endParaRPr lang="zh-CN" sz="1800" dirty="0"/>
+          </a:p>
+        </p:txBody>
+      </p:sp>
+      <p:sp>
+        <p:nvSpPr>
+          <p:cNvPr id="48" name="T07/card/region-2/frame"/>
+          <p:cNvSpPr/>
+          <p:nvPr/>
+        </p:nvSpPr>
+        <p:spPr>
+          <a:xfrm>
+            <a:off x="8629650" y="3754279"/>
+            <a:ext cx="3105150" cy="2220087"/>
           </a:xfrm>
           <a:prstGeom prst="rect">
             <a:avLst/>
@@ -2636,20 +2957,20 @@
       </p:sp>
       <p:sp>
         <p:nvSpPr>
-          <p:cNvPr id="43" name="T07/card/region-2/tab"/>
-          <p:cNvSpPr/>
-          <p:nvPr/>
-        </p:nvSpPr>
-        <p:spPr>
-          <a:xfrm>
-            <a:off x="8743950" y="3733800"/>
-            <a:ext cx="1866900" cy="320040"/>
+          <p:cNvPr id="49" name="T07/card/region-2/tab"/>
+          <p:cNvSpPr/>
+          <p:nvPr/>
+        </p:nvSpPr>
+        <p:spPr>
+          <a:xfrm>
+            <a:off x="8743950" y="3639979"/>
+            <a:ext cx="2000250" cy="342900"/>
           </a:xfrm>
           <a:prstGeom prst="rect">
             <a:avLst/>
           </a:prstGeom>
           <a:solidFill>
-            <a:srgbClr val="903543"/>
+            <a:srgbClr val="A24736"/>
           </a:solidFill>
           <a:ln w="12700">
             <a:solidFill>
@@ -2663,14 +2984,14 @@
       </p:sp>
       <p:sp>
         <p:nvSpPr>
-          <p:cNvPr id="44" name="T07/card/region-2/title"/>
-          <p:cNvSpPr/>
-          <p:nvPr/>
-        </p:nvSpPr>
-        <p:spPr>
-          <a:xfrm>
-            <a:off x="8848725" y="3762375"/>
-            <a:ext cx="1657350" cy="262890"/>
+          <p:cNvPr id="50" name="T07/card/region-2/title"/>
+          <p:cNvSpPr/>
+          <p:nvPr/>
+        </p:nvSpPr>
+        <p:spPr>
+          <a:xfrm>
+            <a:off x="8848725" y="3668554"/>
+            <a:ext cx="1790700" cy="285750"/>
           </a:xfrm>
           <a:prstGeom prst="rect">
             <a:avLst/>
@@ -2684,54 +3005,128 @@
           <a:p>
             <a:pPr algn="l" indent="0" marL="0">
               <a:lnSpc>
-                <a:spcPts val="2070"/>
+                <a:spcPts val="2242"/>
+              </a:lnSpc>
+              <a:buNone/>
+            </a:pPr>
+            <a:r>
+              <a:rPr lang="zh-CN" altLang="en-US" sz="1950" b="1" dirty="0">
+                <a:solidFill>
+                  <a:srgbClr val="FFFFFF"/>
+                </a:solidFill>
+                <a:latin typeface="Noto Sans CJK SC" pitchFamily="34" charset="0"/>
+                <a:ea typeface="Noto Sans CJK SC" pitchFamily="34" charset="-122"/>
+                <a:cs typeface="Noto Sans CJK SC" pitchFamily="34" charset="-120"/>
+              </a:rPr>
+              <a:t>核验与失败处理</a:t>
+            </a:r>
+            <a:endParaRPr lang="zh-CN" sz="1950" dirty="0"/>
+          </a:p>
+        </p:txBody>
+      </p:sp>
+      <p:sp>
+        <p:nvSpPr>
+          <p:cNvPr id="51" name="T07/card/region-2/body"/>
+          <p:cNvSpPr/>
+          <p:nvPr/>
+        </p:nvSpPr>
+        <p:spPr>
+          <a:xfrm>
+            <a:off x="8763000" y="4125754"/>
+            <a:ext cx="2838450" cy="1753362"/>
+          </a:xfrm>
+          <a:prstGeom prst="rect">
+            <a:avLst/>
+          </a:prstGeom>
+          <a:noFill/>
+          <a:ln/>
+        </p:spPr>
+        <p:txBody>
+          <a:bodyPr wrap="none" lIns="0" tIns="0" rIns="0" bIns="0" rtlCol="0" anchor="t"/>
+          <a:lstStyle/>
+          <a:p>
+            <a:pPr algn="l" indent="0" marL="0">
+              <a:lnSpc>
+                <a:spcPts val="2232"/>
+              </a:lnSpc>
+              <a:buNone/>
+            </a:pPr>
+            <a:r>
+              <a:rPr lang="zh-CN" altLang="en-US" sz="1800" dirty="0">
+                <a:solidFill>
+                  <a:srgbClr val="1C2430"/>
+                </a:solidFill>
+                <a:latin typeface="Noto Sans CJK SC" pitchFamily="34" charset="0"/>
+                <a:ea typeface="Noto Sans CJK SC" pitchFamily="34" charset="-122"/>
+                <a:cs typeface="Noto Sans CJK SC" pitchFamily="34" charset="-120"/>
+              </a:rPr>
+              <a:t>列出错误触发与返回机制</a:t>
+            </a:r>
+            <a:endParaRPr lang="zh-CN" sz="1800" dirty="0"/>
+          </a:p>
+          <a:p>
+            <a:pPr algn="l" indent="0" marL="0">
+              <a:lnSpc>
+                <a:spcPts val="2232"/>
+              </a:lnSpc>
+              <a:buNone/>
+            </a:pPr>
+            <a:r>
+              <a:rPr lang="zh-CN" altLang="en-US" sz="1800" dirty="0">
+                <a:solidFill>
+                  <a:srgbClr val="1C2430"/>
+                </a:solidFill>
+                <a:latin typeface="Noto Sans CJK SC" pitchFamily="34" charset="0"/>
+                <a:ea typeface="Noto Sans CJK SC" pitchFamily="34" charset="-122"/>
+                <a:cs typeface="Noto Sans CJK SC" pitchFamily="34" charset="-120"/>
+              </a:rPr>
+              <a:t>保存工具</a:t>
+            </a:r>
+            <a:pPr algn="l" indent="0" marL="0">
+              <a:lnSpc>
+                <a:spcPts val="2232"/>
               </a:lnSpc>
               <a:buNone/>
             </a:pPr>
             <a:r>
               <a:rPr lang="zh-CN" altLang="en-US" sz="1800" b="1" dirty="0">
                 <a:solidFill>
-                  <a:srgbClr val="FFFFFF"/>
-                </a:solidFill>
-                <a:latin typeface="Noto Sans CJK SC" pitchFamily="34" charset="0"/>
-                <a:ea typeface="Noto Sans CJK SC" pitchFamily="34" charset="-122"/>
-                <a:cs typeface="Noto Sans CJK SC" pitchFamily="34" charset="-120"/>
-              </a:rPr>
-              <a:t>核验与失败处理</a:t>
+                  <a:srgbClr val="A24736"/>
+                </a:solidFill>
+                <a:latin typeface="Noto Sans CJK SC" pitchFamily="34" charset="0"/>
+                <a:ea typeface="Noto Sans CJK SC" pitchFamily="34" charset="-122"/>
+                <a:cs typeface="Noto Sans CJK SC" pitchFamily="34" charset="-120"/>
+              </a:rPr>
+              <a:t>输出</a:t>
+            </a:r>
+            <a:pPr algn="l" indent="0" marL="0">
+              <a:lnSpc>
+                <a:spcPts val="2232"/>
+              </a:lnSpc>
+              <a:buNone/>
+            </a:pPr>
+            <a:r>
+              <a:rPr lang="zh-CN" altLang="en-US" sz="1800" dirty="0">
+                <a:solidFill>
+                  <a:srgbClr val="1C2430"/>
+                </a:solidFill>
+                <a:latin typeface="Noto Sans CJK SC" pitchFamily="34" charset="0"/>
+                <a:ea typeface="Noto Sans CJK SC" pitchFamily="34" charset="-122"/>
+                <a:cs typeface="Noto Sans CJK SC" pitchFamily="34" charset="-120"/>
+              </a:rPr>
+              <a:t>、引用和重试</a:t>
             </a:r>
             <a:endParaRPr lang="zh-CN" sz="1800" dirty="0"/>
           </a:p>
-        </p:txBody>
-      </p:sp>
-      <p:sp>
-        <p:nvSpPr>
-          <p:cNvPr id="45" name="T07/card/region-2/body"/>
-          <p:cNvSpPr/>
-          <p:nvPr/>
-        </p:nvSpPr>
-        <p:spPr>
-          <a:xfrm>
-            <a:off x="8763000" y="4196715"/>
-            <a:ext cx="2838450" cy="1689735"/>
-          </a:xfrm>
-          <a:prstGeom prst="rect">
-            <a:avLst/>
-          </a:prstGeom>
-          <a:noFill/>
-          <a:ln/>
-        </p:spPr>
-        <p:txBody>
-          <a:bodyPr wrap="none" lIns="0" tIns="0" rIns="0" bIns="0" rtlCol="0" anchor="t"/>
-          <a:lstStyle/>
-          <a:p>
-            <a:pPr algn="l" indent="0" marL="0">
-              <a:lnSpc>
-                <a:spcPts val="2139"/>
-              </a:lnSpc>
-              <a:buNone/>
-            </a:pPr>
-            <a:r>
-              <a:rPr lang="zh-CN" altLang="en-US" sz="1725" dirty="0">
+          <a:p>
+            <a:pPr algn="l" indent="0" marL="0">
+              <a:lnSpc>
+                <a:spcPts val="2232"/>
+              </a:lnSpc>
+              <a:buNone/>
+            </a:pPr>
+            <a:r>
+              <a:rPr lang="zh-CN" altLang="en-US" sz="1800" dirty="0">
                 <a:solidFill>
                   <a:srgbClr val="1C2430"/>
                 </a:solidFill>
@@ -2739,19 +3134,19 @@
                 <a:ea typeface="Noto Sans CJK SC" pitchFamily="34" charset="-122"/>
                 <a:cs typeface="Noto Sans CJK SC" pitchFamily="34" charset="-120"/>
               </a:rPr>
-              <a:t>列出错误触发与返回机制</a:t>
-            </a:r>
-            <a:endParaRPr lang="zh-CN" sz="1725" dirty="0"/>
-          </a:p>
-          <a:p>
-            <a:pPr algn="l" indent="0" marL="0">
-              <a:lnSpc>
-                <a:spcPts val="2139"/>
-              </a:lnSpc>
-              <a:buNone/>
-            </a:pPr>
-            <a:r>
-              <a:rPr lang="zh-CN" altLang="en-US" sz="1725" dirty="0">
+              <a:t>记录</a:t>
+            </a:r>
+            <a:endParaRPr lang="zh-CN" sz="1800" dirty="0"/>
+          </a:p>
+          <a:p>
+            <a:pPr algn="l" indent="0" marL="0">
+              <a:lnSpc>
+                <a:spcPts val="2232"/>
+              </a:lnSpc>
+              <a:buNone/>
+            </a:pPr>
+            <a:r>
+              <a:rPr lang="zh-CN" altLang="en-US" sz="1800" dirty="0">
                 <a:solidFill>
                   <a:srgbClr val="1C2430"/>
                 </a:solidFill>
@@ -2759,55 +3154,15 @@
                 <a:ea typeface="Noto Sans CJK SC" pitchFamily="34" charset="-122"/>
                 <a:cs typeface="Noto Sans CJK SC" pitchFamily="34" charset="-120"/>
               </a:rPr>
-              <a:t>保存工具输出、引用和重试</a:t>
-            </a:r>
-            <a:endParaRPr lang="zh-CN" sz="1725" dirty="0"/>
-          </a:p>
-          <a:p>
-            <a:pPr algn="l" indent="0" marL="0">
-              <a:lnSpc>
-                <a:spcPts val="2139"/>
-              </a:lnSpc>
-              <a:buNone/>
-            </a:pPr>
-            <a:r>
-              <a:rPr lang="zh-CN" altLang="en-US" sz="1725" dirty="0">
-                <a:solidFill>
-                  <a:srgbClr val="1C2430"/>
-                </a:solidFill>
-                <a:latin typeface="Noto Sans CJK SC" pitchFamily="34" charset="0"/>
-                <a:ea typeface="Noto Sans CJK SC" pitchFamily="34" charset="-122"/>
-                <a:cs typeface="Noto Sans CJK SC" pitchFamily="34" charset="-120"/>
-              </a:rPr>
-              <a:t>记录</a:t>
-            </a:r>
-            <a:endParaRPr lang="zh-CN" sz="1725" dirty="0"/>
-          </a:p>
-          <a:p>
-            <a:pPr algn="l" indent="0" marL="0">
-              <a:lnSpc>
-                <a:spcPts val="2139"/>
-              </a:lnSpc>
-              <a:buNone/>
-            </a:pPr>
-            <a:r>
-              <a:rPr lang="zh-CN" altLang="en-US" sz="1725" dirty="0">
-                <a:solidFill>
-                  <a:srgbClr val="1C2430"/>
-                </a:solidFill>
-                <a:latin typeface="Noto Sans CJK SC" pitchFamily="34" charset="0"/>
-                <a:ea typeface="Noto Sans CJK SC" pitchFamily="34" charset="-122"/>
-                <a:cs typeface="Noto Sans CJK SC" pitchFamily="34" charset="-120"/>
-              </a:rPr>
               <a:t>核验模块的成本也需要评价</a:t>
             </a:r>
-            <a:endParaRPr lang="zh-CN" sz="1725" dirty="0"/>
-          </a:p>
-        </p:txBody>
-      </p:sp>
-      <p:sp>
-        <p:nvSpPr>
-          <p:cNvPr id="46" name="T07/sources"/>
+            <a:endParaRPr lang="zh-CN" sz="1800" dirty="0"/>
+          </a:p>
+        </p:txBody>
+      </p:sp>
+      <p:sp>
+        <p:nvSpPr>
+          <p:cNvPr id="52" name="T07/sources"/>
           <p:cNvSpPr/>
           <p:nvPr/>
         </p:nvSpPr>
@@ -2841,7 +3196,7 @@
                 <a:ea typeface="Noto Sans CJK SC" pitchFamily="34" charset="-122"/>
                 <a:cs typeface="Noto Sans CJK SC" pitchFamily="34" charset="-120"/>
               </a:rPr>
-              <a:t>T1 · 2026 · 待替换</a:t>
+              <a:t>T1 · 2026 · 书目占位；图表均为合成示例</a:t>
             </a:r>
             <a:endParaRPr lang="zh-CN" sz="1125" dirty="0"/>
           </a:p>
@@ -2950,14 +3305,14 @@
       </p:sp>
       <p:sp>
         <p:nvSpPr>
-          <p:cNvPr id="4" name="T08/kicker"/>
-          <p:cNvSpPr/>
-          <p:nvPr/>
-        </p:nvSpPr>
-        <p:spPr>
-          <a:xfrm>
-            <a:off x="457200" y="152400"/>
-            <a:ext cx="11277600" cy="190500"/>
+          <p:cNvPr id="4" name="T08/title"/>
+          <p:cNvSpPr/>
+          <p:nvPr/>
+        </p:nvSpPr>
+        <p:spPr>
+          <a:xfrm>
+            <a:off x="457200" y="209550"/>
+            <a:ext cx="11277600" cy="438150"/>
           </a:xfrm>
           <a:prstGeom prst="rect">
             <a:avLst/>
@@ -2971,54 +3326,12 @@
           <a:p>
             <a:pPr algn="l" indent="0" marL="0">
               <a:lnSpc>
-                <a:spcPts val="1320"/>
-              </a:lnSpc>
-              <a:buNone/>
-            </a:pPr>
-            <a:r>
-              <a:rPr lang="zh-CN" altLang="en-US" sz="1200" dirty="0">
-                <a:solidFill>
-                  <a:srgbClr val="515B68"/>
-                </a:solidFill>
-                <a:latin typeface="Noto Sans CJK SC" pitchFamily="34" charset="0"/>
-                <a:ea typeface="Noto Sans CJK SC" pitchFamily="34" charset="-122"/>
-                <a:cs typeface="Noto Sans CJK SC" pitchFamily="34" charset="-120"/>
-              </a:rPr>
-              <a:t>结构模板 / 占位说明与合成数据</a:t>
-            </a:r>
-            <a:endParaRPr lang="zh-CN" sz="1200" dirty="0"/>
-          </a:p>
-        </p:txBody>
-      </p:sp>
-      <p:sp>
-        <p:nvSpPr>
-          <p:cNvPr id="5" name="T08/title"/>
-          <p:cNvSpPr/>
-          <p:nvPr/>
-        </p:nvSpPr>
-        <p:spPr>
-          <a:xfrm>
-            <a:off x="457200" y="381000"/>
-            <a:ext cx="11277600" cy="400050"/>
-          </a:xfrm>
-          <a:prstGeom prst="rect">
-            <a:avLst/>
-          </a:prstGeom>
-          <a:noFill/>
-          <a:ln/>
-        </p:spPr>
-        <p:txBody>
-          <a:bodyPr wrap="none" lIns="0" tIns="0" rIns="0" bIns="0" rtlCol="0" anchor="t"/>
-          <a:lstStyle/>
-          <a:p>
-            <a:pPr algn="l" indent="0" marL="0">
-              <a:lnSpc>
-                <a:spcPts val="2856"/>
-              </a:lnSpc>
-              <a:buNone/>
-            </a:pPr>
-            <a:r>
-              <a:rPr lang="zh-CN" altLang="en-US" sz="2550" b="1" dirty="0">
+                <a:spcPts val="3360"/>
+              </a:lnSpc>
+              <a:buNone/>
+            </a:pPr>
+            <a:r>
+              <a:rPr lang="zh-CN" altLang="en-US" sz="3000" b="1" dirty="0">
                 <a:solidFill>
                   <a:srgbClr val="1C2430"/>
                 </a:solidFill>
@@ -3028,26 +3341,49 @@
               </a:rPr>
               <a:t>强化学习的状态动作奖励</a:t>
             </a:r>
-            <a:endParaRPr lang="zh-CN" sz="2550" dirty="0"/>
-          </a:p>
-        </p:txBody>
-      </p:sp>
-      <p:sp>
-        <p:nvSpPr>
-          <p:cNvPr id="6" name="T08/header-rule"/>
-          <p:cNvSpPr/>
-          <p:nvPr/>
-        </p:nvSpPr>
-        <p:spPr>
-          <a:xfrm>
-            <a:off x="457200" y="876300"/>
+            <a:endParaRPr lang="zh-CN" sz="3000" dirty="0"/>
+          </a:p>
+        </p:txBody>
+      </p:sp>
+      <p:sp>
+        <p:nvSpPr>
+          <p:cNvPr id="5" name="T08/header-rule"/>
+          <p:cNvSpPr/>
+          <p:nvPr/>
+        </p:nvSpPr>
+        <p:spPr>
+          <a:xfrm>
+            <a:off x="457200" y="752475"/>
             <a:ext cx="11277600" cy="0"/>
           </a:xfrm>
           <a:prstGeom prst="line">
             <a:avLst/>
           </a:prstGeom>
           <a:noFill/>
-          <a:ln w="11430">
+          <a:ln w="10478">
+            <a:solidFill>
+              <a:srgbClr val="BEC8D4"/>
+            </a:solidFill>
+            <a:prstDash val="solid"/>
+          </a:ln>
+        </p:spPr>
+      </p:sp>
+      <p:sp>
+        <p:nvSpPr>
+          <p:cNvPr id="6" name="T08/header-accent"/>
+          <p:cNvSpPr/>
+          <p:nvPr/>
+        </p:nvSpPr>
+        <p:spPr>
+          <a:xfrm>
+            <a:off x="457200" y="752475"/>
+            <a:ext cx="704850" cy="0"/>
+          </a:xfrm>
+          <a:prstGeom prst="line">
+            <a:avLst/>
+          </a:prstGeom>
+          <a:noFill/>
+          <a:ln w="28575">
             <a:solidFill>
               <a:srgbClr val="173C70"/>
             </a:solidFill>
@@ -3063,7 +3399,7 @@
         </p:nvSpPr>
         <p:spPr>
           <a:xfrm>
-            <a:off x="3333750" y="2362200"/>
+            <a:off x="3333750" y="2215610"/>
             <a:ext cx="990600" cy="0"/>
           </a:xfrm>
           <a:prstGeom prst="line">
@@ -3087,8 +3423,8 @@
         </p:nvSpPr>
         <p:spPr>
           <a:xfrm>
-            <a:off x="5676900" y="2971800"/>
-            <a:ext cx="0" cy="1066800"/>
+            <a:off x="5676900" y="2848642"/>
+            <a:ext cx="0" cy="1107853"/>
           </a:xfrm>
           <a:prstGeom prst="line">
             <a:avLst/>
@@ -3111,7 +3447,7 @@
         </p:nvSpPr>
         <p:spPr>
           <a:xfrm flipH="1">
-            <a:off x="3333750" y="4648200"/>
+            <a:off x="3333750" y="4589526"/>
             <a:ext cx="990600" cy="0"/>
           </a:xfrm>
           <a:prstGeom prst="line">
@@ -3135,7 +3471,7 @@
         </p:nvSpPr>
         <p:spPr>
           <a:xfrm flipH="1">
-            <a:off x="466725" y="4648200"/>
+            <a:off x="466725" y="4589526"/>
             <a:ext cx="161925" cy="0"/>
           </a:xfrm>
           <a:prstGeom prst="line">
@@ -3158,8 +3494,8 @@
         </p:nvSpPr>
         <p:spPr>
           <a:xfrm flipV="1">
-            <a:off x="466725" y="2362200"/>
-            <a:ext cx="0" cy="2286000"/>
+            <a:off x="466725" y="2215610"/>
+            <a:ext cx="0" cy="2373916"/>
           </a:xfrm>
           <a:prstGeom prst="line">
             <a:avLst/>
@@ -3181,7 +3517,7 @@
         </p:nvSpPr>
         <p:spPr>
           <a:xfrm>
-            <a:off x="466725" y="2362200"/>
+            <a:off x="466725" y="2215610"/>
             <a:ext cx="161925" cy="0"/>
           </a:xfrm>
           <a:prstGeom prst="line">
@@ -3205,14 +3541,14 @@
         </p:nvSpPr>
         <p:spPr>
           <a:xfrm>
-            <a:off x="628650" y="1752600"/>
-            <a:ext cx="2705100" cy="1219200"/>
+            <a:off x="628650" y="1582579"/>
+            <a:ext cx="2705100" cy="1266063"/>
           </a:xfrm>
           <a:prstGeom prst="rect">
             <a:avLst/>
           </a:prstGeom>
           <a:solidFill>
-            <a:srgbClr val="FFFFFF"/>
+            <a:srgbClr val="E9F4F0"/>
           </a:solidFill>
           <a:ln w="11430">
             <a:solidFill>
@@ -3230,7 +3566,7 @@
         </p:nvSpPr>
         <p:spPr>
           <a:xfrm>
-            <a:off x="628650" y="1752600"/>
+            <a:off x="628650" y="1582579"/>
             <a:ext cx="2705100" cy="0"/>
           </a:xfrm>
           <a:prstGeom prst="line">
@@ -3239,7 +3575,7 @@
           <a:noFill/>
           <a:ln w="19050">
             <a:solidFill>
-              <a:srgbClr val="173C70"/>
+              <a:srgbClr val="146C63"/>
             </a:solidFill>
             <a:prstDash val="solid"/>
           </a:ln>
@@ -3253,7 +3589,7 @@
         </p:nvSpPr>
         <p:spPr>
           <a:xfrm>
-            <a:off x="742950" y="1847850"/>
+            <a:off x="742950" y="1677829"/>
             <a:ext cx="2476500" cy="266700"/>
           </a:xfrm>
           <a:prstGeom prst="rect">
@@ -3275,7 +3611,7 @@
             <a:r>
               <a:rPr lang="zh-CN" altLang="en-US" sz="1800" b="1" dirty="0">
                 <a:solidFill>
-                  <a:srgbClr val="173C70"/>
+                  <a:srgbClr val="146C63"/>
                 </a:solidFill>
                 <a:latin typeface="Noto Sans CJK SC" pitchFamily="34" charset="0"/>
                 <a:ea typeface="Noto Sans CJK SC" pitchFamily="34" charset="-122"/>
@@ -3295,8 +3631,8 @@
         </p:nvSpPr>
         <p:spPr>
           <a:xfrm>
-            <a:off x="742950" y="2162175"/>
-            <a:ext cx="2476500" cy="723900"/>
+            <a:off x="742950" y="1992154"/>
+            <a:ext cx="2476500" cy="770763"/>
           </a:xfrm>
           <a:prstGeom prst="rect">
             <a:avLst/>
@@ -3323,7 +3659,7 @@
                 <a:ea typeface="Noto Sans CJK SC" pitchFamily="34" charset="-122"/>
                 <a:cs typeface="Noto Sans CJK SC" pitchFamily="34" charset="-120"/>
               </a:rPr>
-              <a:t>填写接口与条件</a:t>
+              <a:t>传感、气象与历史</a:t>
             </a:r>
             <a:endParaRPr lang="zh-CN" sz="1650" dirty="0"/>
           </a:p>
@@ -3337,14 +3673,14 @@
         </p:nvSpPr>
         <p:spPr>
           <a:xfrm>
-            <a:off x="4324350" y="1752600"/>
-            <a:ext cx="2705100" cy="1219200"/>
+            <a:off x="4324350" y="1582579"/>
+            <a:ext cx="2705100" cy="1266063"/>
           </a:xfrm>
           <a:prstGeom prst="rect">
             <a:avLst/>
           </a:prstGeom>
           <a:solidFill>
-            <a:srgbClr val="FFFFFF"/>
+            <a:srgbClr val="EAF2FA"/>
           </a:solidFill>
           <a:ln w="11430">
             <a:solidFill>
@@ -3362,7 +3698,7 @@
         </p:nvSpPr>
         <p:spPr>
           <a:xfrm>
-            <a:off x="4324350" y="1752600"/>
+            <a:off x="4324350" y="1582579"/>
             <a:ext cx="2705100" cy="0"/>
           </a:xfrm>
           <a:prstGeom prst="line">
@@ -3371,7 +3707,7 @@
           <a:noFill/>
           <a:ln w="19050">
             <a:solidFill>
-              <a:srgbClr val="173C70"/>
+              <a:srgbClr val="235E96"/>
             </a:solidFill>
             <a:prstDash val="solid"/>
           </a:ln>
@@ -3385,7 +3721,7 @@
         </p:nvSpPr>
         <p:spPr>
           <a:xfrm>
-            <a:off x="4438650" y="1847850"/>
+            <a:off x="4438650" y="1677829"/>
             <a:ext cx="2476500" cy="266700"/>
           </a:xfrm>
           <a:prstGeom prst="rect">
@@ -3407,7 +3743,7 @@
             <a:r>
               <a:rPr lang="zh-CN" altLang="en-US" sz="1800" b="1" dirty="0">
                 <a:solidFill>
-                  <a:srgbClr val="173C70"/>
+                  <a:srgbClr val="235E96"/>
                 </a:solidFill>
                 <a:latin typeface="Noto Sans CJK SC" pitchFamily="34" charset="0"/>
                 <a:ea typeface="Noto Sans CJK SC" pitchFamily="34" charset="-122"/>
@@ -3427,8 +3763,8 @@
         </p:nvSpPr>
         <p:spPr>
           <a:xfrm>
-            <a:off x="4438650" y="2162175"/>
-            <a:ext cx="2476500" cy="723900"/>
+            <a:off x="4438650" y="1992154"/>
+            <a:ext cx="2476500" cy="770763"/>
           </a:xfrm>
           <a:prstGeom prst="rect">
             <a:avLst/>
@@ -3455,7 +3791,7 @@
                 <a:ea typeface="Noto Sans CJK SC" pitchFamily="34" charset="-122"/>
                 <a:cs typeface="Noto Sans CJK SC" pitchFamily="34" charset="-120"/>
               </a:rPr>
-              <a:t>填写接口与条件</a:t>
+              <a:t>状态映射到动作</a:t>
             </a:r>
             <a:endParaRPr lang="zh-CN" sz="1650" dirty="0"/>
           </a:p>
@@ -3469,14 +3805,14 @@
         </p:nvSpPr>
         <p:spPr>
           <a:xfrm>
-            <a:off x="4324350" y="4038600"/>
-            <a:ext cx="2705100" cy="1219200"/>
+            <a:off x="4324350" y="3956495"/>
+            <a:ext cx="2705100" cy="1266063"/>
           </a:xfrm>
           <a:prstGeom prst="rect">
             <a:avLst/>
           </a:prstGeom>
           <a:solidFill>
-            <a:srgbClr val="FFFFFF"/>
+            <a:srgbClr val="EAF2FA"/>
           </a:solidFill>
           <a:ln w="11430">
             <a:solidFill>
@@ -3494,7 +3830,7 @@
         </p:nvSpPr>
         <p:spPr>
           <a:xfrm>
-            <a:off x="4324350" y="4038600"/>
+            <a:off x="4324350" y="3956495"/>
             <a:ext cx="2705100" cy="0"/>
           </a:xfrm>
           <a:prstGeom prst="line">
@@ -3503,7 +3839,7 @@
           <a:noFill/>
           <a:ln w="19050">
             <a:solidFill>
-              <a:srgbClr val="173C70"/>
+              <a:srgbClr val="235E96"/>
             </a:solidFill>
             <a:prstDash val="solid"/>
           </a:ln>
@@ -3517,7 +3853,7 @@
         </p:nvSpPr>
         <p:spPr>
           <a:xfrm>
-            <a:off x="4438650" y="4133850"/>
+            <a:off x="4438650" y="4051744"/>
             <a:ext cx="2476500" cy="266700"/>
           </a:xfrm>
           <a:prstGeom prst="rect">
@@ -3539,7 +3875,7 @@
             <a:r>
               <a:rPr lang="zh-CN" altLang="en-US" sz="1800" b="1" dirty="0">
                 <a:solidFill>
-                  <a:srgbClr val="173C70"/>
+                  <a:srgbClr val="235E96"/>
                 </a:solidFill>
                 <a:latin typeface="Noto Sans CJK SC" pitchFamily="34" charset="0"/>
                 <a:ea typeface="Noto Sans CJK SC" pitchFamily="34" charset="-122"/>
@@ -3559,8 +3895,8 @@
         </p:nvSpPr>
         <p:spPr>
           <a:xfrm>
-            <a:off x="4438650" y="4448175"/>
-            <a:ext cx="2476500" cy="723900"/>
+            <a:off x="4438650" y="4366070"/>
+            <a:ext cx="2476500" cy="770763"/>
           </a:xfrm>
           <a:prstGeom prst="rect">
             <a:avLst/>
@@ -3587,7 +3923,7 @@
                 <a:ea typeface="Noto Sans CJK SC" pitchFamily="34" charset="-122"/>
                 <a:cs typeface="Noto Sans CJK SC" pitchFamily="34" charset="-120"/>
               </a:rPr>
-              <a:t>填写接口与条件</a:t>
+              <a:t>执行实际管理</a:t>
             </a:r>
             <a:endParaRPr lang="zh-CN" sz="1650" dirty="0"/>
           </a:p>
@@ -3601,14 +3937,14 @@
         </p:nvSpPr>
         <p:spPr>
           <a:xfrm>
-            <a:off x="628650" y="4038600"/>
-            <a:ext cx="2705100" cy="1219200"/>
+            <a:off x="628650" y="3956495"/>
+            <a:ext cx="2705100" cy="1266063"/>
           </a:xfrm>
           <a:prstGeom prst="rect">
             <a:avLst/>
           </a:prstGeom>
           <a:solidFill>
-            <a:srgbClr val="FFFFFF"/>
+            <a:srgbClr val="FAEEE8"/>
           </a:solidFill>
           <a:ln w="11430">
             <a:solidFill>
@@ -3626,7 +3962,7 @@
         </p:nvSpPr>
         <p:spPr>
           <a:xfrm>
-            <a:off x="628650" y="4038600"/>
+            <a:off x="628650" y="3956495"/>
             <a:ext cx="2705100" cy="0"/>
           </a:xfrm>
           <a:prstGeom prst="line">
@@ -3635,7 +3971,7 @@
           <a:noFill/>
           <a:ln w="19050">
             <a:solidFill>
-              <a:srgbClr val="173C70"/>
+              <a:srgbClr val="A24736"/>
             </a:solidFill>
             <a:prstDash val="solid"/>
           </a:ln>
@@ -3649,7 +3985,7 @@
         </p:nvSpPr>
         <p:spPr>
           <a:xfrm>
-            <a:off x="742950" y="4133850"/>
+            <a:off x="742950" y="4051744"/>
             <a:ext cx="2476500" cy="266700"/>
           </a:xfrm>
           <a:prstGeom prst="rect">
@@ -3671,7 +4007,7 @@
             <a:r>
               <a:rPr lang="zh-CN" altLang="en-US" sz="1800" b="1" dirty="0">
                 <a:solidFill>
-                  <a:srgbClr val="173C70"/>
+                  <a:srgbClr val="A24736"/>
                 </a:solidFill>
                 <a:latin typeface="Noto Sans CJK SC" pitchFamily="34" charset="0"/>
                 <a:ea typeface="Noto Sans CJK SC" pitchFamily="34" charset="-122"/>
@@ -3691,8 +4027,8 @@
         </p:nvSpPr>
         <p:spPr>
           <a:xfrm>
-            <a:off x="742950" y="4448175"/>
-            <a:ext cx="2476500" cy="723900"/>
+            <a:off x="742950" y="4366070"/>
+            <a:ext cx="2476500" cy="770763"/>
           </a:xfrm>
           <a:prstGeom prst="rect">
             <a:avLst/>
@@ -3719,7 +4055,7 @@
                 <a:ea typeface="Noto Sans CJK SC" pitchFamily="34" charset="-122"/>
                 <a:cs typeface="Noto Sans CJK SC" pitchFamily="34" charset="-120"/>
               </a:rPr>
-              <a:t>填写接口与条件</a:t>
+              <a:t>奖励与约束检查</a:t>
             </a:r>
             <a:endParaRPr lang="zh-CN" sz="1650" dirty="0"/>
           </a:p>
@@ -3733,7 +4069,7 @@
         </p:nvSpPr>
         <p:spPr>
           <a:xfrm>
-            <a:off x="7924800" y="1371600"/>
+            <a:off x="7924800" y="1186244"/>
             <a:ext cx="3810000" cy="323850"/>
           </a:xfrm>
           <a:prstGeom prst="rect">
@@ -3748,14 +4084,14 @@
           <a:p>
             <a:pPr algn="l" indent="0" marL="0">
               <a:lnSpc>
-                <a:spcPts val="2156"/>
-              </a:lnSpc>
-              <a:buNone/>
-            </a:pPr>
-            <a:r>
-              <a:rPr lang="zh-CN" altLang="en-US" sz="1875" b="1" dirty="0">
-                <a:solidFill>
-                  <a:srgbClr val="173C70"/>
+                <a:spcPts val="2242"/>
+              </a:lnSpc>
+              <a:buNone/>
+            </a:pPr>
+            <a:r>
+              <a:rPr lang="zh-CN" altLang="en-US" sz="1950" b="1" dirty="0">
+                <a:solidFill>
+                  <a:srgbClr val="235E96"/>
                 </a:solidFill>
                 <a:latin typeface="Noto Sans CJK SC" pitchFamily="34" charset="0"/>
                 <a:ea typeface="Noto Sans CJK SC" pitchFamily="34" charset="-122"/>
@@ -3763,7 +4099,7 @@
               </a:rPr>
               <a:t>状态 s_t</a:t>
             </a:r>
-            <a:endParaRPr lang="zh-CN" sz="1875" dirty="0"/>
+            <a:endParaRPr lang="zh-CN" sz="1950" dirty="0"/>
           </a:p>
         </p:txBody>
       </p:sp>
@@ -3775,8 +4111,8 @@
         </p:nvSpPr>
         <p:spPr>
           <a:xfrm>
-            <a:off x="7924800" y="1752600"/>
-            <a:ext cx="3810000" cy="628650"/>
+            <a:off x="7924800" y="1567244"/>
+            <a:ext cx="3810000" cy="669703"/>
           </a:xfrm>
           <a:prstGeom prst="rect">
             <a:avLst/>
@@ -3790,12 +4126,12 @@
           <a:p>
             <a:pPr algn="l" indent="0" marL="0">
               <a:lnSpc>
-                <a:spcPts val="2139"/>
-              </a:lnSpc>
-              <a:buNone/>
-            </a:pPr>
-            <a:r>
-              <a:rPr lang="zh-CN" altLang="en-US" sz="1725" dirty="0">
+                <a:spcPts val="2232"/>
+              </a:lnSpc>
+              <a:buNone/>
+            </a:pPr>
+            <a:r>
+              <a:rPr lang="zh-CN" altLang="en-US" sz="1800" dirty="0">
                 <a:solidFill>
                   <a:srgbClr val="1C2430"/>
                 </a:solidFill>
@@ -3805,17 +4141,17 @@
               </a:rPr>
               <a:t>观测变量、历史和缺失值</a:t>
             </a:r>
-            <a:endParaRPr lang="zh-CN" sz="1725" dirty="0"/>
-          </a:p>
-          <a:p>
-            <a:pPr algn="l" indent="0" marL="0">
-              <a:lnSpc>
-                <a:spcPts val="2139"/>
-              </a:lnSpc>
-              <a:buNone/>
-            </a:pPr>
-            <a:r>
-              <a:rPr lang="zh-CN" altLang="en-US" sz="1725" dirty="0">
+            <a:endParaRPr lang="zh-CN" sz="1800" dirty="0"/>
+          </a:p>
+          <a:p>
+            <a:pPr algn="l" indent="0" marL="0">
+              <a:lnSpc>
+                <a:spcPts val="2232"/>
+              </a:lnSpc>
+              <a:buNone/>
+            </a:pPr>
+            <a:r>
+              <a:rPr lang="zh-CN" altLang="en-US" sz="1800" dirty="0">
                 <a:solidFill>
                   <a:srgbClr val="1C2430"/>
                 </a:solidFill>
@@ -3823,9 +4159,43 @@
                 <a:ea typeface="Noto Sans CJK SC" pitchFamily="34" charset="-122"/>
                 <a:cs typeface="Noto Sans CJK SC" pitchFamily="34" charset="-120"/>
               </a:rPr>
-              <a:t>记录单位、采样频率与可得时间</a:t>
-            </a:r>
-            <a:endParaRPr lang="zh-CN" sz="1725" dirty="0"/>
+              <a:t>记录</a:t>
+            </a:r>
+            <a:pPr algn="l" indent="0" marL="0">
+              <a:lnSpc>
+                <a:spcPts val="2232"/>
+              </a:lnSpc>
+              <a:buNone/>
+            </a:pPr>
+            <a:r>
+              <a:rPr lang="zh-CN" altLang="en-US" sz="1800" b="1" dirty="0">
+                <a:solidFill>
+                  <a:srgbClr val="235E96"/>
+                </a:solidFill>
+                <a:latin typeface="Noto Sans CJK SC" pitchFamily="34" charset="0"/>
+                <a:ea typeface="Noto Sans CJK SC" pitchFamily="34" charset="-122"/>
+                <a:cs typeface="Noto Sans CJK SC" pitchFamily="34" charset="-120"/>
+              </a:rPr>
+              <a:t>单位</a:t>
+            </a:r>
+            <a:pPr algn="l" indent="0" marL="0">
+              <a:lnSpc>
+                <a:spcPts val="2232"/>
+              </a:lnSpc>
+              <a:buNone/>
+            </a:pPr>
+            <a:r>
+              <a:rPr lang="zh-CN" altLang="en-US" sz="1800" dirty="0">
+                <a:solidFill>
+                  <a:srgbClr val="1C2430"/>
+                </a:solidFill>
+                <a:latin typeface="Noto Sans CJK SC" pitchFamily="34" charset="0"/>
+                <a:ea typeface="Noto Sans CJK SC" pitchFamily="34" charset="-122"/>
+                <a:cs typeface="Noto Sans CJK SC" pitchFamily="34" charset="-120"/>
+              </a:rPr>
+              <a:t>、采样频率与可得时间</a:t>
+            </a:r>
+            <a:endParaRPr lang="zh-CN" sz="1800" dirty="0"/>
           </a:p>
         </p:txBody>
       </p:sp>
@@ -3837,7 +4207,7 @@
         </p:nvSpPr>
         <p:spPr>
           <a:xfrm>
-            <a:off x="7924800" y="2590800"/>
+            <a:off x="7924800" y="2452307"/>
             <a:ext cx="3810000" cy="323850"/>
           </a:xfrm>
           <a:prstGeom prst="rect">
@@ -3852,14 +4222,14 @@
           <a:p>
             <a:pPr algn="l" indent="0" marL="0">
               <a:lnSpc>
-                <a:spcPts val="2156"/>
-              </a:lnSpc>
-              <a:buNone/>
-            </a:pPr>
-            <a:r>
-              <a:rPr lang="zh-CN" altLang="en-US" sz="1875" b="1" dirty="0">
-                <a:solidFill>
-                  <a:srgbClr val="173C70"/>
+                <a:spcPts val="2242"/>
+              </a:lnSpc>
+              <a:buNone/>
+            </a:pPr>
+            <a:r>
+              <a:rPr lang="zh-CN" altLang="en-US" sz="1950" b="1" dirty="0">
+                <a:solidFill>
+                  <a:srgbClr val="235E96"/>
                 </a:solidFill>
                 <a:latin typeface="Noto Sans CJK SC" pitchFamily="34" charset="0"/>
                 <a:ea typeface="Noto Sans CJK SC" pitchFamily="34" charset="-122"/>
@@ -3867,7 +4237,7 @@
               </a:rPr>
               <a:t>动作 a_t</a:t>
             </a:r>
-            <a:endParaRPr lang="zh-CN" sz="1875" dirty="0"/>
+            <a:endParaRPr lang="zh-CN" sz="1950" dirty="0"/>
           </a:p>
         </p:txBody>
       </p:sp>
@@ -3879,8 +4249,8 @@
         </p:nvSpPr>
         <p:spPr>
           <a:xfrm>
-            <a:off x="7924800" y="2971800"/>
-            <a:ext cx="3810000" cy="628650"/>
+            <a:off x="7924800" y="2833307"/>
+            <a:ext cx="3810000" cy="669703"/>
           </a:xfrm>
           <a:prstGeom prst="rect">
             <a:avLst/>
@@ -3894,12 +4264,12 @@
           <a:p>
             <a:pPr algn="l" indent="0" marL="0">
               <a:lnSpc>
-                <a:spcPts val="2139"/>
-              </a:lnSpc>
-              <a:buNone/>
-            </a:pPr>
-            <a:r>
-              <a:rPr lang="zh-CN" altLang="en-US" sz="1725" dirty="0">
+                <a:spcPts val="2232"/>
+              </a:lnSpc>
+              <a:buNone/>
+            </a:pPr>
+            <a:r>
+              <a:rPr lang="zh-CN" altLang="en-US" sz="1800" dirty="0">
                 <a:solidFill>
                   <a:srgbClr val="1C2430"/>
                 </a:solidFill>
@@ -3909,17 +4279,17 @@
               </a:rPr>
               <a:t>管理对象、离散或连续范围</a:t>
             </a:r>
-            <a:endParaRPr lang="zh-CN" sz="1725" dirty="0"/>
-          </a:p>
-          <a:p>
-            <a:pPr algn="l" indent="0" marL="0">
-              <a:lnSpc>
-                <a:spcPts val="2139"/>
-              </a:lnSpc>
-              <a:buNone/>
-            </a:pPr>
-            <a:r>
-              <a:rPr lang="zh-CN" altLang="en-US" sz="1725" dirty="0">
+            <a:endParaRPr lang="zh-CN" sz="1800" dirty="0"/>
+          </a:p>
+          <a:p>
+            <a:pPr algn="l" indent="0" marL="0">
+              <a:lnSpc>
+                <a:spcPts val="2232"/>
+              </a:lnSpc>
+              <a:buNone/>
+            </a:pPr>
+            <a:r>
+              <a:rPr lang="zh-CN" altLang="en-US" sz="1800" dirty="0">
                 <a:solidFill>
                   <a:srgbClr val="1C2430"/>
                 </a:solidFill>
@@ -3929,7 +4299,7 @@
               </a:rPr>
               <a:t>说明执行频率和现实约束</a:t>
             </a:r>
-            <a:endParaRPr lang="zh-CN" sz="1725" dirty="0"/>
+            <a:endParaRPr lang="zh-CN" sz="1800" dirty="0"/>
           </a:p>
         </p:txBody>
       </p:sp>
@@ -3941,7 +4311,7 @@
         </p:nvSpPr>
         <p:spPr>
           <a:xfrm>
-            <a:off x="7924800" y="3810000"/>
+            <a:off x="7924800" y="3718370"/>
             <a:ext cx="3810000" cy="323850"/>
           </a:xfrm>
           <a:prstGeom prst="rect">
@@ -3956,14 +4326,14 @@
           <a:p>
             <a:pPr algn="l" indent="0" marL="0">
               <a:lnSpc>
-                <a:spcPts val="2156"/>
-              </a:lnSpc>
-              <a:buNone/>
-            </a:pPr>
-            <a:r>
-              <a:rPr lang="zh-CN" altLang="en-US" sz="1875" b="1" dirty="0">
-                <a:solidFill>
-                  <a:srgbClr val="173C70"/>
+                <a:spcPts val="2242"/>
+              </a:lnSpc>
+              <a:buNone/>
+            </a:pPr>
+            <a:r>
+              <a:rPr lang="zh-CN" altLang="en-US" sz="1950" b="1" dirty="0">
+                <a:solidFill>
+                  <a:srgbClr val="235E96"/>
                 </a:solidFill>
                 <a:latin typeface="Noto Sans CJK SC" pitchFamily="34" charset="0"/>
                 <a:ea typeface="Noto Sans CJK SC" pitchFamily="34" charset="-122"/>
@@ -3971,7 +4341,7 @@
               </a:rPr>
               <a:t>奖励 r_t</a:t>
             </a:r>
-            <a:endParaRPr lang="zh-CN" sz="1875" dirty="0"/>
+            <a:endParaRPr lang="zh-CN" sz="1950" dirty="0"/>
           </a:p>
         </p:txBody>
       </p:sp>
@@ -3983,8 +4353,8 @@
         </p:nvSpPr>
         <p:spPr>
           <a:xfrm>
-            <a:off x="7924800" y="4191000"/>
-            <a:ext cx="3810000" cy="628650"/>
+            <a:off x="7924800" y="4099370"/>
+            <a:ext cx="3810000" cy="669703"/>
           </a:xfrm>
           <a:prstGeom prst="rect">
             <a:avLst/>
@@ -3998,12 +4368,12 @@
           <a:p>
             <a:pPr algn="l" indent="0" marL="0">
               <a:lnSpc>
-                <a:spcPts val="2139"/>
-              </a:lnSpc>
-              <a:buNone/>
-            </a:pPr>
-            <a:r>
-              <a:rPr lang="zh-CN" altLang="en-US" sz="1725" dirty="0">
+                <a:spcPts val="2232"/>
+              </a:lnSpc>
+              <a:buNone/>
+            </a:pPr>
+            <a:r>
+              <a:rPr lang="zh-CN" altLang="en-US" sz="1800" dirty="0">
                 <a:solidFill>
                   <a:srgbClr val="1C2430"/>
                 </a:solidFill>
@@ -4013,17 +4383,17 @@
               </a:rPr>
               <a:t>写出奖励组成与归一化方法</a:t>
             </a:r>
-            <a:endParaRPr lang="zh-CN" sz="1725" dirty="0"/>
-          </a:p>
-          <a:p>
-            <a:pPr algn="l" indent="0" marL="0">
-              <a:lnSpc>
-                <a:spcPts val="2139"/>
-              </a:lnSpc>
-              <a:buNone/>
-            </a:pPr>
-            <a:r>
-              <a:rPr lang="zh-CN" altLang="en-US" sz="1725" dirty="0">
+            <a:endParaRPr lang="zh-CN" sz="1800" dirty="0"/>
+          </a:p>
+          <a:p>
+            <a:pPr algn="l" indent="0" marL="0">
+              <a:lnSpc>
+                <a:spcPts val="2232"/>
+              </a:lnSpc>
+              <a:buNone/>
+            </a:pPr>
+            <a:r>
+              <a:rPr lang="zh-CN" altLang="en-US" sz="1800" dirty="0">
                 <a:solidFill>
                   <a:srgbClr val="1C2430"/>
                 </a:solidFill>
@@ -4033,7 +4403,7 @@
               </a:rPr>
               <a:t>区分即时奖励和最终目标</a:t>
             </a:r>
-            <a:endParaRPr lang="zh-CN" sz="1725" dirty="0"/>
+            <a:endParaRPr lang="zh-CN" sz="1800" dirty="0"/>
           </a:p>
         </p:txBody>
       </p:sp>
@@ -4045,7 +4415,7 @@
         </p:nvSpPr>
         <p:spPr>
           <a:xfrm>
-            <a:off x="7924800" y="5029200"/>
+            <a:off x="7924800" y="4984528"/>
             <a:ext cx="3810000" cy="323850"/>
           </a:xfrm>
           <a:prstGeom prst="rect">
@@ -4060,14 +4430,14 @@
           <a:p>
             <a:pPr algn="l" indent="0" marL="0">
               <a:lnSpc>
-                <a:spcPts val="2156"/>
-              </a:lnSpc>
-              <a:buNone/>
-            </a:pPr>
-            <a:r>
-              <a:rPr lang="zh-CN" altLang="en-US" sz="1875" b="1" dirty="0">
-                <a:solidFill>
-                  <a:srgbClr val="173C70"/>
+                <a:spcPts val="2242"/>
+              </a:lnSpc>
+              <a:buNone/>
+            </a:pPr>
+            <a:r>
+              <a:rPr lang="zh-CN" altLang="en-US" sz="1950" b="1" dirty="0">
+                <a:solidFill>
+                  <a:srgbClr val="A24736"/>
                 </a:solidFill>
                 <a:latin typeface="Noto Sans CJK SC" pitchFamily="34" charset="0"/>
                 <a:ea typeface="Noto Sans CJK SC" pitchFamily="34" charset="-122"/>
@@ -4075,7 +4445,7 @@
               </a:rPr>
               <a:t>安全约束</a:t>
             </a:r>
-            <a:endParaRPr lang="zh-CN" sz="1875" dirty="0"/>
+            <a:endParaRPr lang="zh-CN" sz="1950" dirty="0"/>
           </a:p>
         </p:txBody>
       </p:sp>
@@ -4087,8 +4457,8 @@
         </p:nvSpPr>
         <p:spPr>
           <a:xfrm>
-            <a:off x="7924800" y="5410200"/>
-            <a:ext cx="3810000" cy="628650"/>
+            <a:off x="7924800" y="5365528"/>
+            <a:ext cx="3810000" cy="669703"/>
           </a:xfrm>
           <a:prstGeom prst="rect">
             <a:avLst/>
@@ -4102,12 +4472,12 @@
           <a:p>
             <a:pPr algn="l" indent="0" marL="0">
               <a:lnSpc>
-                <a:spcPts val="2139"/>
-              </a:lnSpc>
-              <a:buNone/>
-            </a:pPr>
-            <a:r>
-              <a:rPr lang="zh-CN" altLang="en-US" sz="1725" dirty="0">
+                <a:spcPts val="2232"/>
+              </a:lnSpc>
+              <a:buNone/>
+            </a:pPr>
+            <a:r>
+              <a:rPr lang="zh-CN" altLang="en-US" sz="1800" dirty="0">
                 <a:solidFill>
                   <a:srgbClr val="1C2430"/>
                 </a:solidFill>
@@ -4117,17 +4487,17 @@
               </a:rPr>
               <a:t>硬边界、软惩罚与终止条件</a:t>
             </a:r>
-            <a:endParaRPr lang="zh-CN" sz="1725" dirty="0"/>
-          </a:p>
-          <a:p>
-            <a:pPr algn="l" indent="0" marL="0">
-              <a:lnSpc>
-                <a:spcPts val="2139"/>
-              </a:lnSpc>
-              <a:buNone/>
-            </a:pPr>
-            <a:r>
-              <a:rPr lang="zh-CN" altLang="en-US" sz="1725" dirty="0">
+            <a:endParaRPr lang="zh-CN" sz="1800" dirty="0"/>
+          </a:p>
+          <a:p>
+            <a:pPr algn="l" indent="0" marL="0">
+              <a:lnSpc>
+                <a:spcPts val="2232"/>
+              </a:lnSpc>
+              <a:buNone/>
+            </a:pPr>
+            <a:r>
+              <a:rPr lang="zh-CN" altLang="en-US" sz="1800" dirty="0">
                 <a:solidFill>
                   <a:srgbClr val="1C2430"/>
                 </a:solidFill>
@@ -4135,9 +4505,43 @@
                 <a:ea typeface="Noto Sans CJK SC" pitchFamily="34" charset="-122"/>
                 <a:cs typeface="Noto Sans CJK SC" pitchFamily="34" charset="-120"/>
               </a:rPr>
-              <a:t>单独报告约束违反情况</a:t>
-            </a:r>
-            <a:endParaRPr lang="zh-CN" sz="1725" dirty="0"/>
+              <a:t>单独报告</a:t>
+            </a:r>
+            <a:pPr algn="l" indent="0" marL="0">
+              <a:lnSpc>
+                <a:spcPts val="2232"/>
+              </a:lnSpc>
+              <a:buNone/>
+            </a:pPr>
+            <a:r>
+              <a:rPr lang="zh-CN" altLang="en-US" sz="1800" b="1" dirty="0">
+                <a:solidFill>
+                  <a:srgbClr val="A24736"/>
+                </a:solidFill>
+                <a:latin typeface="Noto Sans CJK SC" pitchFamily="34" charset="0"/>
+                <a:ea typeface="Noto Sans CJK SC" pitchFamily="34" charset="-122"/>
+                <a:cs typeface="Noto Sans CJK SC" pitchFamily="34" charset="-120"/>
+              </a:rPr>
+              <a:t>约束违反</a:t>
+            </a:r>
+            <a:pPr algn="l" indent="0" marL="0">
+              <a:lnSpc>
+                <a:spcPts val="2232"/>
+              </a:lnSpc>
+              <a:buNone/>
+            </a:pPr>
+            <a:r>
+              <a:rPr lang="zh-CN" altLang="en-US" sz="1800" dirty="0">
+                <a:solidFill>
+                  <a:srgbClr val="1C2430"/>
+                </a:solidFill>
+                <a:latin typeface="Noto Sans CJK SC" pitchFamily="34" charset="0"/>
+                <a:ea typeface="Noto Sans CJK SC" pitchFamily="34" charset="-122"/>
+                <a:cs typeface="Noto Sans CJK SC" pitchFamily="34" charset="-120"/>
+              </a:rPr>
+              <a:t>情况</a:t>
+            </a:r>
+            <a:endParaRPr lang="zh-CN" sz="1800" dirty="0"/>
           </a:p>
         </p:txBody>
       </p:sp>
@@ -4177,7 +4581,7 @@
                 <a:ea typeface="Noto Sans CJK SC" pitchFamily="34" charset="-122"/>
                 <a:cs typeface="Noto Sans CJK SC" pitchFamily="34" charset="-120"/>
               </a:rPr>
-              <a:t>T1 · 2026 · 待替换</a:t>
+              <a:t>T1 · 2026 · 书目占位；图表均为合成示例</a:t>
             </a:r>
             <a:endParaRPr lang="zh-CN" sz="1125" dirty="0"/>
           </a:p>
@@ -4286,14 +4690,14 @@
       </p:sp>
       <p:sp>
         <p:nvSpPr>
-          <p:cNvPr id="4" name="T09/kicker"/>
-          <p:cNvSpPr/>
-          <p:nvPr/>
-        </p:nvSpPr>
-        <p:spPr>
-          <a:xfrm>
-            <a:off x="457200" y="152400"/>
-            <a:ext cx="11277600" cy="190500"/>
+          <p:cNvPr id="4" name="T09/title"/>
+          <p:cNvSpPr/>
+          <p:nvPr/>
+        </p:nvSpPr>
+        <p:spPr>
+          <a:xfrm>
+            <a:off x="457200" y="209550"/>
+            <a:ext cx="11277600" cy="438150"/>
           </a:xfrm>
           <a:prstGeom prst="rect">
             <a:avLst/>
@@ -4307,54 +4711,12 @@
           <a:p>
             <a:pPr algn="l" indent="0" marL="0">
               <a:lnSpc>
-                <a:spcPts val="1320"/>
-              </a:lnSpc>
-              <a:buNone/>
-            </a:pPr>
-            <a:r>
-              <a:rPr lang="zh-CN" altLang="en-US" sz="1200" dirty="0">
-                <a:solidFill>
-                  <a:srgbClr val="515B68"/>
-                </a:solidFill>
-                <a:latin typeface="Noto Sans CJK SC" pitchFamily="34" charset="0"/>
-                <a:ea typeface="Noto Sans CJK SC" pitchFamily="34" charset="-122"/>
-                <a:cs typeface="Noto Sans CJK SC" pitchFamily="34" charset="-120"/>
-              </a:rPr>
-              <a:t>结构模板 / 占位说明与合成数据</a:t>
-            </a:r>
-            <a:endParaRPr lang="zh-CN" sz="1200" dirty="0"/>
-          </a:p>
-        </p:txBody>
-      </p:sp>
-      <p:sp>
-        <p:nvSpPr>
-          <p:cNvPr id="5" name="T09/title"/>
-          <p:cNvSpPr/>
-          <p:nvPr/>
-        </p:nvSpPr>
-        <p:spPr>
-          <a:xfrm>
-            <a:off x="457200" y="381000"/>
-            <a:ext cx="11277600" cy="400050"/>
-          </a:xfrm>
-          <a:prstGeom prst="rect">
-            <a:avLst/>
-          </a:prstGeom>
-          <a:noFill/>
-          <a:ln/>
-        </p:spPr>
-        <p:txBody>
-          <a:bodyPr wrap="none" lIns="0" tIns="0" rIns="0" bIns="0" rtlCol="0" anchor="t"/>
-          <a:lstStyle/>
-          <a:p>
-            <a:pPr algn="l" indent="0" marL="0">
-              <a:lnSpc>
-                <a:spcPts val="2856"/>
-              </a:lnSpc>
-              <a:buNone/>
-            </a:pPr>
-            <a:r>
-              <a:rPr lang="zh-CN" altLang="en-US" sz="2550" b="1" dirty="0">
+                <a:spcPts val="3360"/>
+              </a:lnSpc>
+              <a:buNone/>
+            </a:pPr>
+            <a:r>
+              <a:rPr lang="zh-CN" altLang="en-US" sz="3000" b="1" dirty="0">
                 <a:solidFill>
                   <a:srgbClr val="1C2430"/>
                 </a:solidFill>
@@ -4364,26 +4726,49 @@
               </a:rPr>
               <a:t>工具路由与能力边界</a:t>
             </a:r>
-            <a:endParaRPr lang="zh-CN" sz="2550" dirty="0"/>
-          </a:p>
-        </p:txBody>
-      </p:sp>
-      <p:sp>
-        <p:nvSpPr>
-          <p:cNvPr id="6" name="T09/header-rule"/>
-          <p:cNvSpPr/>
-          <p:nvPr/>
-        </p:nvSpPr>
-        <p:spPr>
-          <a:xfrm>
-            <a:off x="457200" y="876300"/>
+            <a:endParaRPr lang="zh-CN" sz="3000" dirty="0"/>
+          </a:p>
+        </p:txBody>
+      </p:sp>
+      <p:sp>
+        <p:nvSpPr>
+          <p:cNvPr id="5" name="T09/header-rule"/>
+          <p:cNvSpPr/>
+          <p:nvPr/>
+        </p:nvSpPr>
+        <p:spPr>
+          <a:xfrm>
+            <a:off x="457200" y="752475"/>
             <a:ext cx="11277600" cy="0"/>
           </a:xfrm>
           <a:prstGeom prst="line">
             <a:avLst/>
           </a:prstGeom>
           <a:noFill/>
-          <a:ln w="11430">
+          <a:ln w="10478">
+            <a:solidFill>
+              <a:srgbClr val="BEC8D4"/>
+            </a:solidFill>
+            <a:prstDash val="solid"/>
+          </a:ln>
+        </p:spPr>
+      </p:sp>
+      <p:sp>
+        <p:nvSpPr>
+          <p:cNvPr id="6" name="T09/header-accent"/>
+          <p:cNvSpPr/>
+          <p:nvPr/>
+        </p:nvSpPr>
+        <p:spPr>
+          <a:xfrm>
+            <a:off x="457200" y="752475"/>
+            <a:ext cx="704850" cy="0"/>
+          </a:xfrm>
+          <a:prstGeom prst="line">
+            <a:avLst/>
+          </a:prstGeom>
+          <a:noFill/>
+          <a:ln w="28575">
             <a:solidFill>
               <a:srgbClr val="173C70"/>
             </a:solidFill>
@@ -4399,8 +4784,8 @@
         </p:nvSpPr>
         <p:spPr>
           <a:xfrm>
-            <a:off x="457200" y="1428750"/>
-            <a:ext cx="7905750" cy="4610100"/>
+            <a:off x="457200" y="1241870"/>
+            <a:ext cx="7905750" cy="4791837"/>
           </a:xfrm>
           <a:prstGeom prst="rect">
             <a:avLst/>
@@ -4424,14 +4809,14 @@
         </p:nvSpPr>
         <p:spPr>
           <a:xfrm>
-            <a:off x="571500" y="1314450"/>
-            <a:ext cx="2095500" cy="323850"/>
+            <a:off x="571500" y="1127570"/>
+            <a:ext cx="2343150" cy="342900"/>
           </a:xfrm>
           <a:prstGeom prst="rect">
             <a:avLst/>
           </a:prstGeom>
           <a:solidFill>
-            <a:srgbClr val="173C70"/>
+            <a:srgbClr val="235E96"/>
           </a:solidFill>
           <a:ln w="12700">
             <a:solidFill>
@@ -4451,8 +4836,8 @@
         </p:nvSpPr>
         <p:spPr>
           <a:xfrm>
-            <a:off x="676275" y="1343025"/>
-            <a:ext cx="1885950" cy="276225"/>
+            <a:off x="676275" y="1156145"/>
+            <a:ext cx="2133600" cy="285750"/>
           </a:xfrm>
           <a:prstGeom prst="rect">
             <a:avLst/>
@@ -4466,12 +4851,12 @@
           <a:p>
             <a:pPr algn="l" indent="0" marL="0">
               <a:lnSpc>
-                <a:spcPts val="2070"/>
-              </a:lnSpc>
-              <a:buNone/>
-            </a:pPr>
-            <a:r>
-              <a:rPr lang="zh-CN" altLang="en-US" sz="1800" b="1" dirty="0">
+                <a:spcPts val="2242"/>
+              </a:lnSpc>
+              <a:buNone/>
+            </a:pPr>
+            <a:r>
+              <a:rPr lang="zh-CN" altLang="en-US" sz="1950" b="1" dirty="0">
                 <a:solidFill>
                   <a:srgbClr val="FFFFFF"/>
                 </a:solidFill>
@@ -4481,7 +4866,7 @@
               </a:rPr>
               <a:t>任务、工具与输出</a:t>
             </a:r>
-            <a:endParaRPr lang="zh-CN" sz="1800" dirty="0"/>
+            <a:endParaRPr lang="zh-CN" sz="1950" dirty="0"/>
           </a:p>
         </p:txBody>
       </p:sp>
@@ -4493,8 +4878,8 @@
         </p:nvSpPr>
         <p:spPr>
           <a:xfrm>
-            <a:off x="4324350" y="2552700"/>
-            <a:ext cx="0" cy="361950"/>
+            <a:off x="4324350" y="2413445"/>
+            <a:ext cx="0" cy="375904"/>
           </a:xfrm>
           <a:prstGeom prst="line">
             <a:avLst/>
@@ -4516,7 +4901,7 @@
         </p:nvSpPr>
         <p:spPr>
           <a:xfrm flipH="1">
-            <a:off x="1704975" y="2914650"/>
+            <a:off x="1704975" y="2789349"/>
             <a:ext cx="2619375" cy="0"/>
           </a:xfrm>
           <a:prstGeom prst="line">
@@ -4539,8 +4924,8 @@
         </p:nvSpPr>
         <p:spPr>
           <a:xfrm>
-            <a:off x="1704975" y="2914650"/>
-            <a:ext cx="0" cy="361950"/>
+            <a:off x="1704975" y="2789349"/>
+            <a:ext cx="0" cy="375904"/>
           </a:xfrm>
           <a:prstGeom prst="line">
             <a:avLst/>
@@ -4563,8 +4948,8 @@
         </p:nvSpPr>
         <p:spPr>
           <a:xfrm>
-            <a:off x="4324350" y="2552700"/>
-            <a:ext cx="0" cy="361950"/>
+            <a:off x="4324350" y="2413445"/>
+            <a:ext cx="0" cy="375904"/>
           </a:xfrm>
           <a:prstGeom prst="line">
             <a:avLst/>
@@ -4586,7 +4971,7 @@
         </p:nvSpPr>
         <p:spPr>
           <a:xfrm>
-            <a:off x="4324350" y="2914650"/>
+            <a:off x="4324350" y="2789349"/>
             <a:ext cx="161925" cy="0"/>
           </a:xfrm>
           <a:prstGeom prst="line">
@@ -4609,8 +4994,8 @@
         </p:nvSpPr>
         <p:spPr>
           <a:xfrm>
-            <a:off x="4486275" y="2914650"/>
-            <a:ext cx="0" cy="361950"/>
+            <a:off x="4486275" y="2789349"/>
+            <a:ext cx="0" cy="375904"/>
           </a:xfrm>
           <a:prstGeom prst="line">
             <a:avLst/>
@@ -4633,7 +5018,7 @@
         </p:nvSpPr>
         <p:spPr>
           <a:xfrm>
-            <a:off x="5600700" y="2181225"/>
+            <a:off x="5600700" y="2027682"/>
             <a:ext cx="276225" cy="0"/>
           </a:xfrm>
           <a:prstGeom prst="line">
@@ -4656,8 +5041,8 @@
         </p:nvSpPr>
         <p:spPr>
           <a:xfrm>
-            <a:off x="5876925" y="2181225"/>
-            <a:ext cx="0" cy="1619250"/>
+            <a:off x="5876925" y="2027682"/>
+            <a:ext cx="0" cy="1681591"/>
           </a:xfrm>
           <a:prstGeom prst="line">
             <a:avLst/>
@@ -4679,7 +5064,7 @@
         </p:nvSpPr>
         <p:spPr>
           <a:xfrm>
-            <a:off x="5876925" y="3800475"/>
+            <a:off x="5876925" y="3709273"/>
             <a:ext cx="276225" cy="0"/>
           </a:xfrm>
           <a:prstGeom prst="line">
@@ -4703,7 +5088,7 @@
         </p:nvSpPr>
         <p:spPr>
           <a:xfrm>
-            <a:off x="2800350" y="3800475"/>
+            <a:off x="2800350" y="3709273"/>
             <a:ext cx="123825" cy="0"/>
           </a:xfrm>
           <a:prstGeom prst="line">
@@ -4726,8 +5111,8 @@
         </p:nvSpPr>
         <p:spPr>
           <a:xfrm>
-            <a:off x="2924175" y="3800475"/>
-            <a:ext cx="0" cy="1762125"/>
+            <a:off x="2924175" y="3709273"/>
+            <a:ext cx="0" cy="1829848"/>
           </a:xfrm>
           <a:prstGeom prst="line">
             <a:avLst/>
@@ -4749,7 +5134,7 @@
         </p:nvSpPr>
         <p:spPr>
           <a:xfrm>
-            <a:off x="2924175" y="5562600"/>
+            <a:off x="2924175" y="5539121"/>
             <a:ext cx="123825" cy="0"/>
           </a:xfrm>
           <a:prstGeom prst="line">
@@ -4773,8 +5158,8 @@
         </p:nvSpPr>
         <p:spPr>
           <a:xfrm>
-            <a:off x="4486275" y="4324350"/>
-            <a:ext cx="0" cy="447675"/>
+            <a:off x="4486275" y="4253294"/>
+            <a:ext cx="0" cy="464868"/>
           </a:xfrm>
           <a:prstGeom prst="line">
             <a:avLst/>
@@ -4796,7 +5181,7 @@
         </p:nvSpPr>
         <p:spPr>
           <a:xfrm flipH="1">
-            <a:off x="4324350" y="4772025"/>
+            <a:off x="4324350" y="4718161"/>
             <a:ext cx="161925" cy="0"/>
           </a:xfrm>
           <a:prstGeom prst="line">
@@ -4819,8 +5204,8 @@
         </p:nvSpPr>
         <p:spPr>
           <a:xfrm>
-            <a:off x="4324350" y="4772025"/>
-            <a:ext cx="0" cy="447675"/>
+            <a:off x="4324350" y="4718161"/>
+            <a:ext cx="0" cy="464868"/>
           </a:xfrm>
           <a:prstGeom prst="line">
             <a:avLst/>
@@ -4843,8 +5228,8 @@
         </p:nvSpPr>
         <p:spPr>
           <a:xfrm>
-            <a:off x="7181850" y="4324350"/>
-            <a:ext cx="0" cy="447675"/>
+            <a:off x="7181850" y="4253294"/>
+            <a:ext cx="0" cy="464868"/>
           </a:xfrm>
           <a:prstGeom prst="line">
             <a:avLst/>
@@ -4866,7 +5251,7 @@
         </p:nvSpPr>
         <p:spPr>
           <a:xfrm flipH="1">
-            <a:off x="4324350" y="4772025"/>
+            <a:off x="4324350" y="4718161"/>
             <a:ext cx="2857500" cy="0"/>
           </a:xfrm>
           <a:prstGeom prst="line">
@@ -4889,8 +5274,8 @@
         </p:nvSpPr>
         <p:spPr>
           <a:xfrm>
-            <a:off x="4324350" y="4772025"/>
-            <a:ext cx="0" cy="447675"/>
+            <a:off x="4324350" y="4718161"/>
+            <a:ext cx="0" cy="464868"/>
           </a:xfrm>
           <a:prstGeom prst="line">
             <a:avLst/>
@@ -4913,14 +5298,14 @@
         </p:nvSpPr>
         <p:spPr>
           <a:xfrm>
-            <a:off x="3048000" y="1809750"/>
-            <a:ext cx="2552700" cy="742950"/>
+            <a:off x="3048000" y="1641920"/>
+            <a:ext cx="2552700" cy="771525"/>
           </a:xfrm>
           <a:prstGeom prst="rect">
             <a:avLst/>
           </a:prstGeom>
           <a:solidFill>
-            <a:srgbClr val="FFFFFF"/>
+            <a:srgbClr val="EAF2FA"/>
           </a:solidFill>
           <a:ln w="11430">
             <a:solidFill>
@@ -4938,7 +5323,7 @@
         </p:nvSpPr>
         <p:spPr>
           <a:xfrm>
-            <a:off x="3048000" y="1809750"/>
+            <a:off x="3048000" y="1641920"/>
             <a:ext cx="2552700" cy="0"/>
           </a:xfrm>
           <a:prstGeom prst="line">
@@ -4947,7 +5332,7 @@
           <a:noFill/>
           <a:ln w="19050">
             <a:solidFill>
-              <a:srgbClr val="173C70"/>
+              <a:srgbClr val="235E96"/>
             </a:solidFill>
             <a:prstDash val="solid"/>
           </a:ln>
@@ -4961,7 +5346,7 @@
         </p:nvSpPr>
         <p:spPr>
           <a:xfrm>
-            <a:off x="3162300" y="2047875"/>
+            <a:off x="3162300" y="1894332"/>
             <a:ext cx="2324100" cy="266700"/>
           </a:xfrm>
           <a:prstGeom prst="rect">
@@ -4983,7 +5368,7 @@
             <a:r>
               <a:rPr lang="zh-CN" altLang="en-US" sz="1800" b="1" dirty="0">
                 <a:solidFill>
-                  <a:srgbClr val="173C70"/>
+                  <a:srgbClr val="235E96"/>
                 </a:solidFill>
                 <a:latin typeface="Noto Sans CJK SC" pitchFamily="34" charset="0"/>
                 <a:ea typeface="Noto Sans CJK SC" pitchFamily="34" charset="-122"/>
@@ -5003,14 +5388,14 @@
         </p:nvSpPr>
         <p:spPr>
           <a:xfrm>
-            <a:off x="609600" y="3276600"/>
-            <a:ext cx="2190750" cy="1047750"/>
+            <a:off x="609600" y="3165253"/>
+            <a:ext cx="2190750" cy="1088041"/>
           </a:xfrm>
           <a:prstGeom prst="rect">
             <a:avLst/>
           </a:prstGeom>
           <a:solidFill>
-            <a:srgbClr val="FFFFFF"/>
+            <a:srgbClr val="EAF2FA"/>
           </a:solidFill>
           <a:ln w="11430">
             <a:solidFill>
@@ -5028,7 +5413,7 @@
         </p:nvSpPr>
         <p:spPr>
           <a:xfrm>
-            <a:off x="609600" y="3276600"/>
+            <a:off x="609600" y="3165253"/>
             <a:ext cx="2190750" cy="0"/>
           </a:xfrm>
           <a:prstGeom prst="line">
@@ -5037,7 +5422,7 @@
           <a:noFill/>
           <a:ln w="19050">
             <a:solidFill>
-              <a:srgbClr val="173C70"/>
+              <a:srgbClr val="235E96"/>
             </a:solidFill>
             <a:prstDash val="solid"/>
           </a:ln>
@@ -5051,7 +5436,7 @@
         </p:nvSpPr>
         <p:spPr>
           <a:xfrm>
-            <a:off x="723900" y="3667125"/>
+            <a:off x="723900" y="3575923"/>
             <a:ext cx="1962150" cy="266700"/>
           </a:xfrm>
           <a:prstGeom prst="rect">
@@ -5073,7 +5458,7 @@
             <a:r>
               <a:rPr lang="zh-CN" altLang="en-US" sz="1800" b="1" dirty="0">
                 <a:solidFill>
-                  <a:srgbClr val="173C70"/>
+                  <a:srgbClr val="235E96"/>
                 </a:solidFill>
                 <a:latin typeface="Noto Sans CJK SC" pitchFamily="34" charset="0"/>
                 <a:ea typeface="Noto Sans CJK SC" pitchFamily="34" charset="-122"/>
@@ -5093,14 +5478,14 @@
         </p:nvSpPr>
         <p:spPr>
           <a:xfrm>
-            <a:off x="3390900" y="3276600"/>
-            <a:ext cx="2190750" cy="1047750"/>
+            <a:off x="3390900" y="3165253"/>
+            <a:ext cx="2190750" cy="1088041"/>
           </a:xfrm>
           <a:prstGeom prst="rect">
             <a:avLst/>
           </a:prstGeom>
           <a:solidFill>
-            <a:srgbClr val="FFFFFF"/>
+            <a:srgbClr val="E9F4F0"/>
           </a:solidFill>
           <a:ln w="11430">
             <a:solidFill>
@@ -5118,7 +5503,7 @@
         </p:nvSpPr>
         <p:spPr>
           <a:xfrm>
-            <a:off x="3390900" y="3276600"/>
+            <a:off x="3390900" y="3165253"/>
             <a:ext cx="2190750" cy="0"/>
           </a:xfrm>
           <a:prstGeom prst="line">
@@ -5127,7 +5512,7 @@
           <a:noFill/>
           <a:ln w="19050">
             <a:solidFill>
-              <a:srgbClr val="173C70"/>
+              <a:srgbClr val="146C63"/>
             </a:solidFill>
             <a:prstDash val="solid"/>
           </a:ln>
@@ -5141,7 +5526,7 @@
         </p:nvSpPr>
         <p:spPr>
           <a:xfrm>
-            <a:off x="3505200" y="3667125"/>
+            <a:off x="3505200" y="3575923"/>
             <a:ext cx="1962150" cy="266700"/>
           </a:xfrm>
           <a:prstGeom prst="rect">
@@ -5163,7 +5548,7 @@
             <a:r>
               <a:rPr lang="zh-CN" altLang="en-US" sz="1800" b="1" dirty="0">
                 <a:solidFill>
-                  <a:srgbClr val="173C70"/>
+                  <a:srgbClr val="146C63"/>
                 </a:solidFill>
                 <a:latin typeface="Noto Sans CJK SC" pitchFamily="34" charset="0"/>
                 <a:ea typeface="Noto Sans CJK SC" pitchFamily="34" charset="-122"/>
@@ -5183,14 +5568,14 @@
         </p:nvSpPr>
         <p:spPr>
           <a:xfrm>
-            <a:off x="6153150" y="3276600"/>
-            <a:ext cx="2057400" cy="1047750"/>
+            <a:off x="6153150" y="3165253"/>
+            <a:ext cx="2057400" cy="1088041"/>
           </a:xfrm>
           <a:prstGeom prst="rect">
             <a:avLst/>
           </a:prstGeom>
           <a:solidFill>
-            <a:srgbClr val="FFFFFF"/>
+            <a:srgbClr val="EAF2FA"/>
           </a:solidFill>
           <a:ln w="11430">
             <a:solidFill>
@@ -5208,7 +5593,7 @@
         </p:nvSpPr>
         <p:spPr>
           <a:xfrm>
-            <a:off x="6153150" y="3276600"/>
+            <a:off x="6153150" y="3165253"/>
             <a:ext cx="2057400" cy="0"/>
           </a:xfrm>
           <a:prstGeom prst="line">
@@ -5217,7 +5602,7 @@
           <a:noFill/>
           <a:ln w="19050">
             <a:solidFill>
-              <a:srgbClr val="173C70"/>
+              <a:srgbClr val="235E96"/>
             </a:solidFill>
             <a:prstDash val="solid"/>
           </a:ln>
@@ -5231,7 +5616,7 @@
         </p:nvSpPr>
         <p:spPr>
           <a:xfrm>
-            <a:off x="6267450" y="3667125"/>
+            <a:off x="6267450" y="3575923"/>
             <a:ext cx="1828800" cy="266700"/>
           </a:xfrm>
           <a:prstGeom prst="rect">
@@ -5253,7 +5638,7 @@
             <a:r>
               <a:rPr lang="zh-CN" altLang="en-US" sz="1800" b="1" dirty="0">
                 <a:solidFill>
-                  <a:srgbClr val="173C70"/>
+                  <a:srgbClr val="235E96"/>
                 </a:solidFill>
                 <a:latin typeface="Noto Sans CJK SC" pitchFamily="34" charset="0"/>
                 <a:ea typeface="Noto Sans CJK SC" pitchFamily="34" charset="-122"/>
@@ -5273,14 +5658,14 @@
         </p:nvSpPr>
         <p:spPr>
           <a:xfrm>
-            <a:off x="3048000" y="5219700"/>
-            <a:ext cx="2552700" cy="685800"/>
+            <a:off x="3048000" y="5183029"/>
+            <a:ext cx="2552700" cy="712184"/>
           </a:xfrm>
           <a:prstGeom prst="rect">
             <a:avLst/>
           </a:prstGeom>
           <a:solidFill>
-            <a:srgbClr val="FFFFFF"/>
+            <a:srgbClr val="E9F4F0"/>
           </a:solidFill>
           <a:ln w="11430">
             <a:solidFill>
@@ -5298,7 +5683,7 @@
         </p:nvSpPr>
         <p:spPr>
           <a:xfrm>
-            <a:off x="3048000" y="5219700"/>
+            <a:off x="3048000" y="5183029"/>
             <a:ext cx="2552700" cy="0"/>
           </a:xfrm>
           <a:prstGeom prst="line">
@@ -5307,7 +5692,7 @@
           <a:noFill/>
           <a:ln w="19050">
             <a:solidFill>
-              <a:srgbClr val="173C70"/>
+              <a:srgbClr val="146C63"/>
             </a:solidFill>
             <a:prstDash val="solid"/>
           </a:ln>
@@ -5321,7 +5706,7 @@
         </p:nvSpPr>
         <p:spPr>
           <a:xfrm>
-            <a:off x="3162300" y="5429250"/>
+            <a:off x="3162300" y="5405771"/>
             <a:ext cx="2324100" cy="266700"/>
           </a:xfrm>
           <a:prstGeom prst="rect">
@@ -5343,7 +5728,7 @@
             <a:r>
               <a:rPr lang="zh-CN" altLang="en-US" sz="1800" b="1" dirty="0">
                 <a:solidFill>
-                  <a:srgbClr val="173C70"/>
+                  <a:srgbClr val="146C63"/>
                 </a:solidFill>
                 <a:latin typeface="Noto Sans CJK SC" pitchFamily="34" charset="0"/>
                 <a:ea typeface="Noto Sans CJK SC" pitchFamily="34" charset="-122"/>
@@ -5363,8 +5748,8 @@
         </p:nvSpPr>
         <p:spPr>
           <a:xfrm>
-            <a:off x="8648700" y="1371600"/>
-            <a:ext cx="3086100" cy="2057400"/>
+            <a:off x="8648700" y="1187006"/>
+            <a:ext cx="3086100" cy="2136553"/>
           </a:xfrm>
           <a:prstGeom prst="rect">
             <a:avLst/>
@@ -5388,14 +5773,14 @@
         </p:nvSpPr>
         <p:spPr>
           <a:xfrm>
-            <a:off x="8658225" y="1381125"/>
+            <a:off x="8658225" y="1196531"/>
             <a:ext cx="3067050" cy="371475"/>
           </a:xfrm>
           <a:prstGeom prst="rect">
             <a:avLst/>
           </a:prstGeom>
           <a:solidFill>
-            <a:srgbClr val="EEF3F8"/>
+            <a:srgbClr val="EAF2FA"/>
           </a:solidFill>
           <a:ln w="12700">
             <a:solidFill>
@@ -5415,7 +5800,7 @@
         </p:nvSpPr>
         <p:spPr>
           <a:xfrm>
-            <a:off x="8648700" y="1752600"/>
+            <a:off x="8648700" y="1568006"/>
             <a:ext cx="3086100" cy="0"/>
           </a:xfrm>
           <a:prstGeom prst="line">
@@ -5438,8 +5823,8 @@
         </p:nvSpPr>
         <p:spPr>
           <a:xfrm>
-            <a:off x="8772525" y="1428750"/>
-            <a:ext cx="2838450" cy="276225"/>
+            <a:off x="8772525" y="1234631"/>
+            <a:ext cx="2838450" cy="295275"/>
           </a:xfrm>
           <a:prstGeom prst="rect">
             <a:avLst/>
@@ -5453,14 +5838,14 @@
           <a:p>
             <a:pPr algn="l" indent="0" marL="0">
               <a:lnSpc>
-                <a:spcPts val="2070"/>
-              </a:lnSpc>
-              <a:buNone/>
-            </a:pPr>
-            <a:r>
-              <a:rPr lang="zh-CN" altLang="en-US" sz="1800" b="1" dirty="0">
-                <a:solidFill>
-                  <a:srgbClr val="173C70"/>
+                <a:spcPts val="2242"/>
+              </a:lnSpc>
+              <a:buNone/>
+            </a:pPr>
+            <a:r>
+              <a:rPr lang="zh-CN" altLang="en-US" sz="1950" b="1" dirty="0">
+                <a:solidFill>
+                  <a:srgbClr val="235E96"/>
                 </a:solidFill>
                 <a:latin typeface="Noto Sans CJK SC" pitchFamily="34" charset="0"/>
                 <a:ea typeface="Noto Sans CJK SC" pitchFamily="34" charset="-122"/>
@@ -5468,39 +5853,59 @@
               </a:rPr>
               <a:t>路由依据</a:t>
             </a:r>
+            <a:endParaRPr lang="zh-CN" sz="1950" dirty="0"/>
+          </a:p>
+        </p:txBody>
+      </p:sp>
+      <p:sp>
+        <p:nvSpPr>
+          <p:cNvPr id="47" name="T09/card/region-1/body"/>
+          <p:cNvSpPr/>
+          <p:nvPr/>
+        </p:nvSpPr>
+        <p:spPr>
+          <a:xfrm>
+            <a:off x="8782050" y="1672781"/>
+            <a:ext cx="2819400" cy="1555528"/>
+          </a:xfrm>
+          <a:prstGeom prst="rect">
+            <a:avLst/>
+          </a:prstGeom>
+          <a:noFill/>
+          <a:ln/>
+        </p:spPr>
+        <p:txBody>
+          <a:bodyPr wrap="none" lIns="0" tIns="0" rIns="0" bIns="0" rtlCol="0" anchor="t"/>
+          <a:lstStyle/>
+          <a:p>
+            <a:pPr algn="l" indent="0" marL="0">
+              <a:lnSpc>
+                <a:spcPts val="2232"/>
+              </a:lnSpc>
+              <a:buNone/>
+            </a:pPr>
+            <a:r>
+              <a:rPr lang="zh-CN" altLang="en-US" sz="1800" dirty="0">
+                <a:solidFill>
+                  <a:srgbClr val="1C2430"/>
+                </a:solidFill>
+                <a:latin typeface="Noto Sans CJK SC" pitchFamily="34" charset="0"/>
+                <a:ea typeface="Noto Sans CJK SC" pitchFamily="34" charset="-122"/>
+                <a:cs typeface="Noto Sans CJK SC" pitchFamily="34" charset="-120"/>
+              </a:rPr>
+              <a:t>任务类型如何匹配工具能力</a:t>
+            </a:r>
             <a:endParaRPr lang="zh-CN" sz="1800" dirty="0"/>
           </a:p>
-        </p:txBody>
-      </p:sp>
-      <p:sp>
-        <p:nvSpPr>
-          <p:cNvPr id="47" name="T09/card/region-1/body"/>
-          <p:cNvSpPr/>
-          <p:nvPr/>
-        </p:nvSpPr>
-        <p:spPr>
-          <a:xfrm>
-            <a:off x="8782050" y="1866900"/>
-            <a:ext cx="2819400" cy="1466850"/>
-          </a:xfrm>
-          <a:prstGeom prst="rect">
-            <a:avLst/>
-          </a:prstGeom>
-          <a:noFill/>
-          <a:ln/>
-        </p:spPr>
-        <p:txBody>
-          <a:bodyPr wrap="none" lIns="0" tIns="0" rIns="0" bIns="0" rtlCol="0" anchor="t"/>
-          <a:lstStyle/>
-          <a:p>
-            <a:pPr algn="l" indent="0" marL="0">
-              <a:lnSpc>
-                <a:spcPts val="2139"/>
-              </a:lnSpc>
-              <a:buNone/>
-            </a:pPr>
-            <a:r>
-              <a:rPr lang="zh-CN" altLang="en-US" sz="1725" dirty="0">
+          <a:p>
+            <a:pPr algn="l" indent="0" marL="0">
+              <a:lnSpc>
+                <a:spcPts val="2232"/>
+              </a:lnSpc>
+              <a:buNone/>
+            </a:pPr>
+            <a:r>
+              <a:rPr lang="zh-CN" altLang="en-US" sz="1800" dirty="0">
                 <a:solidFill>
                   <a:srgbClr val="1C2430"/>
                 </a:solidFill>
@@ -5508,19 +5913,19 @@
                 <a:ea typeface="Noto Sans CJK SC" pitchFamily="34" charset="-122"/>
                 <a:cs typeface="Noto Sans CJK SC" pitchFamily="34" charset="-120"/>
               </a:rPr>
-              <a:t>任务类型如何匹配工具能力</a:t>
-            </a:r>
-            <a:endParaRPr lang="zh-CN" sz="1725" dirty="0"/>
-          </a:p>
-          <a:p>
-            <a:pPr algn="l" indent="0" marL="0">
-              <a:lnSpc>
-                <a:spcPts val="2139"/>
-              </a:lnSpc>
-              <a:buNone/>
-            </a:pPr>
-            <a:r>
-              <a:rPr lang="zh-CN" altLang="en-US" sz="1725" dirty="0">
+              <a:t>工具选择是否使用相同的信</a:t>
+            </a:r>
+            <a:endParaRPr lang="zh-CN" sz="1800" dirty="0"/>
+          </a:p>
+          <a:p>
+            <a:pPr algn="l" indent="0" marL="0">
+              <a:lnSpc>
+                <a:spcPts val="2232"/>
+              </a:lnSpc>
+              <a:buNone/>
+            </a:pPr>
+            <a:r>
+              <a:rPr lang="zh-CN" altLang="en-US" sz="1800" dirty="0">
                 <a:solidFill>
                   <a:srgbClr val="1C2430"/>
                 </a:solidFill>
@@ -5528,19 +5933,19 @@
                 <a:ea typeface="Noto Sans CJK SC" pitchFamily="34" charset="-122"/>
                 <a:cs typeface="Noto Sans CJK SC" pitchFamily="34" charset="-120"/>
               </a:rPr>
-              <a:t>工具选择是否使用相同的信</a:t>
-            </a:r>
-            <a:endParaRPr lang="zh-CN" sz="1725" dirty="0"/>
-          </a:p>
-          <a:p>
-            <a:pPr algn="l" indent="0" marL="0">
-              <a:lnSpc>
-                <a:spcPts val="2139"/>
-              </a:lnSpc>
-              <a:buNone/>
-            </a:pPr>
-            <a:r>
-              <a:rPr lang="zh-CN" altLang="en-US" sz="1725" dirty="0">
+              <a:t>息</a:t>
+            </a:r>
+            <a:endParaRPr lang="zh-CN" sz="1800" dirty="0"/>
+          </a:p>
+          <a:p>
+            <a:pPr algn="l" indent="0" marL="0">
+              <a:lnSpc>
+                <a:spcPts val="2232"/>
+              </a:lnSpc>
+              <a:buNone/>
+            </a:pPr>
+            <a:r>
+              <a:rPr lang="zh-CN" altLang="en-US" sz="1800" dirty="0">
                 <a:solidFill>
                   <a:srgbClr val="1C2430"/>
                 </a:solidFill>
@@ -5548,19 +5953,19 @@
                 <a:ea typeface="Noto Sans CJK SC" pitchFamily="34" charset="-122"/>
                 <a:cs typeface="Noto Sans CJK SC" pitchFamily="34" charset="-120"/>
               </a:rPr>
-              <a:t>息</a:t>
-            </a:r>
-            <a:endParaRPr lang="zh-CN" sz="1725" dirty="0"/>
-          </a:p>
-          <a:p>
-            <a:pPr algn="l" indent="0" marL="0">
-              <a:lnSpc>
-                <a:spcPts val="2139"/>
-              </a:lnSpc>
-              <a:buNone/>
-            </a:pPr>
-            <a:r>
-              <a:rPr lang="zh-CN" altLang="en-US" sz="1725" dirty="0">
+              <a:t>缺少工具时应明确退出或求</a:t>
+            </a:r>
+            <a:endParaRPr lang="zh-CN" sz="1800" dirty="0"/>
+          </a:p>
+          <a:p>
+            <a:pPr algn="l" indent="0" marL="0">
+              <a:lnSpc>
+                <a:spcPts val="2232"/>
+              </a:lnSpc>
+              <a:buNone/>
+            </a:pPr>
+            <a:r>
+              <a:rPr lang="zh-CN" altLang="en-US" sz="1800" dirty="0">
                 <a:solidFill>
                   <a:srgbClr val="1C2430"/>
                 </a:solidFill>
@@ -5568,29 +5973,9 @@
                 <a:ea typeface="Noto Sans CJK SC" pitchFamily="34" charset="-122"/>
                 <a:cs typeface="Noto Sans CJK SC" pitchFamily="34" charset="-120"/>
               </a:rPr>
-              <a:t>缺少工具时应明确退出或求</a:t>
-            </a:r>
-            <a:endParaRPr lang="zh-CN" sz="1725" dirty="0"/>
-          </a:p>
-          <a:p>
-            <a:pPr algn="l" indent="0" marL="0">
-              <a:lnSpc>
-                <a:spcPts val="2139"/>
-              </a:lnSpc>
-              <a:buNone/>
-            </a:pPr>
-            <a:r>
-              <a:rPr lang="zh-CN" altLang="en-US" sz="1725" dirty="0">
-                <a:solidFill>
-                  <a:srgbClr val="1C2430"/>
-                </a:solidFill>
-                <a:latin typeface="Noto Sans CJK SC" pitchFamily="34" charset="0"/>
-                <a:ea typeface="Noto Sans CJK SC" pitchFamily="34" charset="-122"/>
-                <a:cs typeface="Noto Sans CJK SC" pitchFamily="34" charset="-120"/>
-              </a:rPr>
               <a:t>助</a:t>
             </a:r>
-            <a:endParaRPr lang="zh-CN" sz="1725" dirty="0"/>
+            <a:endParaRPr lang="zh-CN" sz="1800" dirty="0"/>
           </a:p>
         </p:txBody>
       </p:sp>
@@ -5602,8 +5987,8 @@
         </p:nvSpPr>
         <p:spPr>
           <a:xfrm>
-            <a:off x="8648700" y="3829050"/>
-            <a:ext cx="3086100" cy="2171700"/>
+            <a:off x="8648700" y="3734562"/>
+            <a:ext cx="3086100" cy="2259616"/>
           </a:xfrm>
           <a:prstGeom prst="rect">
             <a:avLst/>
@@ -5627,14 +6012,14 @@
         </p:nvSpPr>
         <p:spPr>
           <a:xfrm>
-            <a:off x="8763000" y="3714750"/>
-            <a:ext cx="1638300" cy="320040"/>
+            <a:off x="8763000" y="3620262"/>
+            <a:ext cx="1752600" cy="342900"/>
           </a:xfrm>
           <a:prstGeom prst="rect">
             <a:avLst/>
           </a:prstGeom>
           <a:solidFill>
-            <a:srgbClr val="173C70"/>
+            <a:srgbClr val="536A7A"/>
           </a:solidFill>
           <a:ln w="12700">
             <a:solidFill>
@@ -5654,8 +6039,8 @@
         </p:nvSpPr>
         <p:spPr>
           <a:xfrm>
-            <a:off x="8867775" y="3743325"/>
-            <a:ext cx="1428750" cy="262890"/>
+            <a:off x="8867775" y="3648837"/>
+            <a:ext cx="1543050" cy="285750"/>
           </a:xfrm>
           <a:prstGeom prst="rect">
             <a:avLst/>
@@ -5669,54 +6054,111 @@
           <a:p>
             <a:pPr algn="l" indent="0" marL="0">
               <a:lnSpc>
-                <a:spcPts val="2070"/>
+                <a:spcPts val="2242"/>
+              </a:lnSpc>
+              <a:buNone/>
+            </a:pPr>
+            <a:r>
+              <a:rPr lang="zh-CN" altLang="en-US" sz="1950" b="1" dirty="0">
+                <a:solidFill>
+                  <a:srgbClr val="FFFFFF"/>
+                </a:solidFill>
+                <a:latin typeface="Noto Sans CJK SC" pitchFamily="34" charset="0"/>
+                <a:ea typeface="Noto Sans CJK SC" pitchFamily="34" charset="-122"/>
+                <a:cs typeface="Noto Sans CJK SC" pitchFamily="34" charset="-120"/>
+              </a:rPr>
+              <a:t>工具覆盖范围</a:t>
+            </a:r>
+            <a:endParaRPr lang="zh-CN" sz="1950" dirty="0"/>
+          </a:p>
+        </p:txBody>
+      </p:sp>
+      <p:sp>
+        <p:nvSpPr>
+          <p:cNvPr id="51" name="T09/card/region-2/body"/>
+          <p:cNvSpPr/>
+          <p:nvPr/>
+        </p:nvSpPr>
+        <p:spPr>
+          <a:xfrm>
+            <a:off x="8782050" y="4106037"/>
+            <a:ext cx="2819400" cy="1792891"/>
+          </a:xfrm>
+          <a:prstGeom prst="rect">
+            <a:avLst/>
+          </a:prstGeom>
+          <a:noFill/>
+          <a:ln/>
+        </p:spPr>
+        <p:txBody>
+          <a:bodyPr wrap="none" lIns="0" tIns="0" rIns="0" bIns="0" rtlCol="0" anchor="t"/>
+          <a:lstStyle/>
+          <a:p>
+            <a:pPr algn="l" indent="0" marL="0">
+              <a:lnSpc>
+                <a:spcPts val="2232"/>
+              </a:lnSpc>
+              <a:buNone/>
+            </a:pPr>
+            <a:r>
+              <a:rPr lang="zh-CN" altLang="en-US" sz="1800" dirty="0">
+                <a:solidFill>
+                  <a:srgbClr val="1C2430"/>
+                </a:solidFill>
+                <a:latin typeface="Noto Sans CJK SC" pitchFamily="34" charset="0"/>
+                <a:ea typeface="Noto Sans CJK SC" pitchFamily="34" charset="-122"/>
+                <a:cs typeface="Noto Sans CJK SC" pitchFamily="34" charset="-120"/>
+              </a:rPr>
+              <a:t>列出工具能处理的对象和</a:t>
+            </a:r>
+            <a:pPr algn="l" indent="0" marL="0">
+              <a:lnSpc>
+                <a:spcPts val="2232"/>
               </a:lnSpc>
               <a:buNone/>
             </a:pPr>
             <a:r>
               <a:rPr lang="zh-CN" altLang="en-US" sz="1800" b="1" dirty="0">
                 <a:solidFill>
-                  <a:srgbClr val="FFFFFF"/>
-                </a:solidFill>
-                <a:latin typeface="Noto Sans CJK SC" pitchFamily="34" charset="0"/>
-                <a:ea typeface="Noto Sans CJK SC" pitchFamily="34" charset="-122"/>
-                <a:cs typeface="Noto Sans CJK SC" pitchFamily="34" charset="-120"/>
-              </a:rPr>
-              <a:t>工具覆盖范围</a:t>
+                  <a:srgbClr val="536A7A"/>
+                </a:solidFill>
+                <a:latin typeface="Noto Sans CJK SC" pitchFamily="34" charset="0"/>
+                <a:ea typeface="Noto Sans CJK SC" pitchFamily="34" charset="-122"/>
+                <a:cs typeface="Noto Sans CJK SC" pitchFamily="34" charset="-120"/>
+              </a:rPr>
+              <a:t>输</a:t>
             </a:r>
             <a:endParaRPr lang="zh-CN" sz="1800" dirty="0"/>
           </a:p>
-        </p:txBody>
-      </p:sp>
-      <p:sp>
-        <p:nvSpPr>
-          <p:cNvPr id="51" name="T09/card/region-2/body"/>
-          <p:cNvSpPr/>
-          <p:nvPr/>
-        </p:nvSpPr>
-        <p:spPr>
-          <a:xfrm>
-            <a:off x="8782050" y="4177665"/>
-            <a:ext cx="2819400" cy="1727835"/>
-          </a:xfrm>
-          <a:prstGeom prst="rect">
-            <a:avLst/>
-          </a:prstGeom>
-          <a:noFill/>
-          <a:ln/>
-        </p:spPr>
-        <p:txBody>
-          <a:bodyPr wrap="none" lIns="0" tIns="0" rIns="0" bIns="0" rtlCol="0" anchor="t"/>
-          <a:lstStyle/>
-          <a:p>
-            <a:pPr algn="l" indent="0" marL="0">
-              <a:lnSpc>
-                <a:spcPts val="2139"/>
-              </a:lnSpc>
-              <a:buNone/>
-            </a:pPr>
-            <a:r>
-              <a:rPr lang="zh-CN" altLang="en-US" sz="1725" dirty="0">
+          <a:p>
+            <a:pPr algn="l" indent="0" marL="0">
+              <a:lnSpc>
+                <a:spcPts val="2232"/>
+              </a:lnSpc>
+              <a:buNone/>
+            </a:pPr>
+            <a:r>
+              <a:rPr lang="zh-CN" altLang="en-US" sz="1800" b="1" dirty="0">
+                <a:solidFill>
+                  <a:srgbClr val="536A7A"/>
+                </a:solidFill>
+                <a:latin typeface="Noto Sans CJK SC" pitchFamily="34" charset="0"/>
+                <a:ea typeface="Noto Sans CJK SC" pitchFamily="34" charset="-122"/>
+                <a:cs typeface="Noto Sans CJK SC" pitchFamily="34" charset="-120"/>
+              </a:rPr>
+              <a:t>入</a:t>
+            </a:r>
+            <a:endParaRPr lang="zh-CN" sz="1800" dirty="0"/>
+          </a:p>
+          <a:p>
+            <a:pPr algn="l" indent="0" marL="0">
+              <a:lnSpc>
+                <a:spcPts val="2232"/>
+              </a:lnSpc>
+              <a:buNone/>
+            </a:pPr>
+            <a:r>
+              <a:rPr lang="zh-CN" altLang="en-US" sz="1800" dirty="0">
                 <a:solidFill>
                   <a:srgbClr val="1C2430"/>
                 </a:solidFill>
@@ -5724,19 +6166,19 @@
                 <a:ea typeface="Noto Sans CJK SC" pitchFamily="34" charset="-122"/>
                 <a:cs typeface="Noto Sans CJK SC" pitchFamily="34" charset="-120"/>
               </a:rPr>
-              <a:t>列出工具能处理的对象和输</a:t>
-            </a:r>
-            <a:endParaRPr lang="zh-CN" sz="1725" dirty="0"/>
-          </a:p>
-          <a:p>
-            <a:pPr algn="l" indent="0" marL="0">
-              <a:lnSpc>
-                <a:spcPts val="2139"/>
-              </a:lnSpc>
-              <a:buNone/>
-            </a:pPr>
-            <a:r>
-              <a:rPr lang="zh-CN" altLang="en-US" sz="1725" dirty="0">
+              <a:t>标注分布外样本与失败类别</a:t>
+            </a:r>
+            <a:endParaRPr lang="zh-CN" sz="1800" dirty="0"/>
+          </a:p>
+          <a:p>
+            <a:pPr algn="l" indent="0" marL="0">
+              <a:lnSpc>
+                <a:spcPts val="2232"/>
+              </a:lnSpc>
+              <a:buNone/>
+            </a:pPr>
+            <a:r>
+              <a:rPr lang="zh-CN" altLang="en-US" sz="1800" dirty="0">
                 <a:solidFill>
                   <a:srgbClr val="1C2430"/>
                 </a:solidFill>
@@ -5744,19 +6186,19 @@
                 <a:ea typeface="Noto Sans CJK SC" pitchFamily="34" charset="-122"/>
                 <a:cs typeface="Noto Sans CJK SC" pitchFamily="34" charset="-120"/>
               </a:rPr>
-              <a:t>入</a:t>
-            </a:r>
-            <a:endParaRPr lang="zh-CN" sz="1725" dirty="0"/>
-          </a:p>
-          <a:p>
-            <a:pPr algn="l" indent="0" marL="0">
-              <a:lnSpc>
-                <a:spcPts val="2139"/>
-              </a:lnSpc>
-              <a:buNone/>
-            </a:pPr>
-            <a:r>
-              <a:rPr lang="zh-CN" altLang="en-US" sz="1725" dirty="0">
+              <a:t>解释工具更新后需重做哪些</a:t>
+            </a:r>
+            <a:endParaRPr lang="zh-CN" sz="1800" dirty="0"/>
+          </a:p>
+          <a:p>
+            <a:pPr algn="l" indent="0" marL="0">
+              <a:lnSpc>
+                <a:spcPts val="2232"/>
+              </a:lnSpc>
+              <a:buNone/>
+            </a:pPr>
+            <a:r>
+              <a:rPr lang="zh-CN" altLang="en-US" sz="1800" dirty="0">
                 <a:solidFill>
                   <a:srgbClr val="1C2430"/>
                 </a:solidFill>
@@ -5764,49 +6206,9 @@
                 <a:ea typeface="Noto Sans CJK SC" pitchFamily="34" charset="-122"/>
                 <a:cs typeface="Noto Sans CJK SC" pitchFamily="34" charset="-120"/>
               </a:rPr>
-              <a:t>标注分布外样本与失败类别</a:t>
-            </a:r>
-            <a:endParaRPr lang="zh-CN" sz="1725" dirty="0"/>
-          </a:p>
-          <a:p>
-            <a:pPr algn="l" indent="0" marL="0">
-              <a:lnSpc>
-                <a:spcPts val="2139"/>
-              </a:lnSpc>
-              <a:buNone/>
-            </a:pPr>
-            <a:r>
-              <a:rPr lang="zh-CN" altLang="en-US" sz="1725" dirty="0">
-                <a:solidFill>
-                  <a:srgbClr val="1C2430"/>
-                </a:solidFill>
-                <a:latin typeface="Noto Sans CJK SC" pitchFamily="34" charset="0"/>
-                <a:ea typeface="Noto Sans CJK SC" pitchFamily="34" charset="-122"/>
-                <a:cs typeface="Noto Sans CJK SC" pitchFamily="34" charset="-120"/>
-              </a:rPr>
-              <a:t>解释工具更新后需重做哪些</a:t>
-            </a:r>
-            <a:endParaRPr lang="zh-CN" sz="1725" dirty="0"/>
-          </a:p>
-          <a:p>
-            <a:pPr algn="l" indent="0" marL="0">
-              <a:lnSpc>
-                <a:spcPts val="2139"/>
-              </a:lnSpc>
-              <a:buNone/>
-            </a:pPr>
-            <a:r>
-              <a:rPr lang="zh-CN" altLang="en-US" sz="1725" dirty="0">
-                <a:solidFill>
-                  <a:srgbClr val="1C2430"/>
-                </a:solidFill>
-                <a:latin typeface="Noto Sans CJK SC" pitchFamily="34" charset="0"/>
-                <a:ea typeface="Noto Sans CJK SC" pitchFamily="34" charset="-122"/>
-                <a:cs typeface="Noto Sans CJK SC" pitchFamily="34" charset="-120"/>
-              </a:rPr>
               <a:t>验证</a:t>
             </a:r>
-            <a:endParaRPr lang="zh-CN" sz="1725" dirty="0"/>
+            <a:endParaRPr lang="zh-CN" sz="1800" dirty="0"/>
           </a:p>
         </p:txBody>
       </p:sp>
@@ -5846,7 +6248,7 @@
                 <a:ea typeface="Noto Sans CJK SC" pitchFamily="34" charset="-122"/>
                 <a:cs typeface="Noto Sans CJK SC" pitchFamily="34" charset="-120"/>
               </a:rPr>
-              <a:t>T1 · 2026 · 待替换</a:t>
+              <a:t>T1 · 2026 · 书目占位；图表均为合成示例</a:t>
             </a:r>
             <a:endParaRPr lang="zh-CN" sz="1125" dirty="0"/>
           </a:p>
@@ -5955,14 +6357,14 @@
       </p:sp>
       <p:sp>
         <p:nvSpPr>
-          <p:cNvPr id="4" name="T10/kicker"/>
-          <p:cNvSpPr/>
-          <p:nvPr/>
-        </p:nvSpPr>
-        <p:spPr>
-          <a:xfrm>
-            <a:off x="457200" y="152400"/>
-            <a:ext cx="11277600" cy="190500"/>
+          <p:cNvPr id="4" name="T10/title"/>
+          <p:cNvSpPr/>
+          <p:nvPr/>
+        </p:nvSpPr>
+        <p:spPr>
+          <a:xfrm>
+            <a:off x="457200" y="209550"/>
+            <a:ext cx="11277600" cy="438150"/>
           </a:xfrm>
           <a:prstGeom prst="rect">
             <a:avLst/>
@@ -5976,54 +6378,12 @@
           <a:p>
             <a:pPr algn="l" indent="0" marL="0">
               <a:lnSpc>
-                <a:spcPts val="1320"/>
-              </a:lnSpc>
-              <a:buNone/>
-            </a:pPr>
-            <a:r>
-              <a:rPr lang="zh-CN" altLang="en-US" sz="1200" dirty="0">
-                <a:solidFill>
-                  <a:srgbClr val="515B68"/>
-                </a:solidFill>
-                <a:latin typeface="Noto Sans CJK SC" pitchFamily="34" charset="0"/>
-                <a:ea typeface="Noto Sans CJK SC" pitchFamily="34" charset="-122"/>
-                <a:cs typeface="Noto Sans CJK SC" pitchFamily="34" charset="-120"/>
-              </a:rPr>
-              <a:t>结构模板 / 占位说明与合成数据</a:t>
-            </a:r>
-            <a:endParaRPr lang="zh-CN" sz="1200" dirty="0"/>
-          </a:p>
-        </p:txBody>
-      </p:sp>
-      <p:sp>
-        <p:nvSpPr>
-          <p:cNvPr id="5" name="T10/title"/>
-          <p:cNvSpPr/>
-          <p:nvPr/>
-        </p:nvSpPr>
-        <p:spPr>
-          <a:xfrm>
-            <a:off x="457200" y="381000"/>
-            <a:ext cx="11277600" cy="400050"/>
-          </a:xfrm>
-          <a:prstGeom prst="rect">
-            <a:avLst/>
-          </a:prstGeom>
-          <a:noFill/>
-          <a:ln/>
-        </p:spPr>
-        <p:txBody>
-          <a:bodyPr wrap="none" lIns="0" tIns="0" rIns="0" bIns="0" rtlCol="0" anchor="t"/>
-          <a:lstStyle/>
-          <a:p>
-            <a:pPr algn="l" indent="0" marL="0">
-              <a:lnSpc>
-                <a:spcPts val="2856"/>
-              </a:lnSpc>
-              <a:buNone/>
-            </a:pPr>
-            <a:r>
-              <a:rPr lang="zh-CN" altLang="en-US" sz="2550" b="1" dirty="0">
+                <a:spcPts val="3360"/>
+              </a:lnSpc>
+              <a:buNone/>
+            </a:pPr>
+            <a:r>
+              <a:rPr lang="zh-CN" altLang="en-US" sz="3000" b="1" dirty="0">
                 <a:solidFill>
                   <a:srgbClr val="1C2430"/>
                 </a:solidFill>
@@ -6033,26 +6393,49 @@
               </a:rPr>
               <a:t>机理模型与优化器耦合</a:t>
             </a:r>
-            <a:endParaRPr lang="zh-CN" sz="2550" dirty="0"/>
-          </a:p>
-        </p:txBody>
-      </p:sp>
-      <p:sp>
-        <p:nvSpPr>
-          <p:cNvPr id="6" name="T10/header-rule"/>
-          <p:cNvSpPr/>
-          <p:nvPr/>
-        </p:nvSpPr>
-        <p:spPr>
-          <a:xfrm>
-            <a:off x="457200" y="876300"/>
+            <a:endParaRPr lang="zh-CN" sz="3000" dirty="0"/>
+          </a:p>
+        </p:txBody>
+      </p:sp>
+      <p:sp>
+        <p:nvSpPr>
+          <p:cNvPr id="5" name="T10/header-rule"/>
+          <p:cNvSpPr/>
+          <p:nvPr/>
+        </p:nvSpPr>
+        <p:spPr>
+          <a:xfrm>
+            <a:off x="457200" y="752475"/>
             <a:ext cx="11277600" cy="0"/>
           </a:xfrm>
           <a:prstGeom prst="line">
             <a:avLst/>
           </a:prstGeom>
           <a:noFill/>
-          <a:ln w="11430">
+          <a:ln w="10478">
+            <a:solidFill>
+              <a:srgbClr val="BEC8D4"/>
+            </a:solidFill>
+            <a:prstDash val="solid"/>
+          </a:ln>
+        </p:spPr>
+      </p:sp>
+      <p:sp>
+        <p:nvSpPr>
+          <p:cNvPr id="6" name="T10/header-accent"/>
+          <p:cNvSpPr/>
+          <p:nvPr/>
+        </p:nvSpPr>
+        <p:spPr>
+          <a:xfrm>
+            <a:off x="457200" y="752475"/>
+            <a:ext cx="704850" cy="0"/>
+          </a:xfrm>
+          <a:prstGeom prst="line">
+            <a:avLst/>
+          </a:prstGeom>
+          <a:noFill/>
+          <a:ln w="28575">
             <a:solidFill>
               <a:srgbClr val="173C70"/>
             </a:solidFill>
@@ -6068,8 +6451,8 @@
         </p:nvSpPr>
         <p:spPr>
           <a:xfrm>
-            <a:off x="457200" y="1352550"/>
-            <a:ext cx="11277600" cy="1809750"/>
+            <a:off x="457200" y="1167194"/>
+            <a:ext cx="11277600" cy="1879378"/>
           </a:xfrm>
           <a:prstGeom prst="rect">
             <a:avLst/>
@@ -6093,14 +6476,14 @@
         </p:nvSpPr>
         <p:spPr>
           <a:xfrm>
-            <a:off x="466725" y="1362075"/>
+            <a:off x="466725" y="1176719"/>
             <a:ext cx="11258550" cy="381000"/>
           </a:xfrm>
           <a:prstGeom prst="rect">
             <a:avLst/>
           </a:prstGeom>
           <a:solidFill>
-            <a:srgbClr val="EEF3F8"/>
+            <a:srgbClr val="EAF2FA"/>
           </a:solidFill>
           <a:ln w="12700">
             <a:solidFill>
@@ -6120,7 +6503,7 @@
         </p:nvSpPr>
         <p:spPr>
           <a:xfrm>
-            <a:off x="457200" y="1743075"/>
+            <a:off x="457200" y="1557719"/>
             <a:ext cx="11277600" cy="0"/>
           </a:xfrm>
           <a:prstGeom prst="line">
@@ -6143,8 +6526,8 @@
         </p:nvSpPr>
         <p:spPr>
           <a:xfrm>
-            <a:off x="581025" y="1409700"/>
-            <a:ext cx="11029950" cy="295275"/>
+            <a:off x="581025" y="1214819"/>
+            <a:ext cx="11029950" cy="304800"/>
           </a:xfrm>
           <a:prstGeom prst="rect">
             <a:avLst/>
@@ -6158,20 +6541,182 @@
           <a:p>
             <a:pPr algn="l" indent="0" marL="0">
               <a:lnSpc>
-                <a:spcPts val="2070"/>
+                <a:spcPts val="2242"/>
+              </a:lnSpc>
+              <a:buNone/>
+            </a:pPr>
+            <a:r>
+              <a:rPr lang="zh-CN" altLang="en-US" sz="1950" b="1" dirty="0">
+                <a:solidFill>
+                  <a:srgbClr val="235E96"/>
+                </a:solidFill>
+                <a:latin typeface="Noto Sans CJK SC" pitchFamily="34" charset="0"/>
+                <a:ea typeface="Noto Sans CJK SC" pitchFamily="34" charset="-122"/>
+                <a:cs typeface="Noto Sans CJK SC" pitchFamily="34" charset="-120"/>
+              </a:rPr>
+              <a:t>耦合计算链</a:t>
+            </a:r>
+            <a:endParaRPr lang="zh-CN" sz="1950" dirty="0"/>
+          </a:p>
+        </p:txBody>
+      </p:sp>
+      <p:sp>
+        <p:nvSpPr>
+          <p:cNvPr id="11" name="T10/edge:0"/>
+          <p:cNvSpPr/>
+          <p:nvPr/>
+        </p:nvSpPr>
+        <p:spPr>
+          <a:xfrm>
+            <a:off x="2762250" y="2275046"/>
+            <a:ext cx="723900" cy="0"/>
+          </a:xfrm>
+          <a:prstGeom prst="line">
+            <a:avLst/>
+          </a:prstGeom>
+          <a:noFill/>
+          <a:ln w="15240">
+            <a:solidFill>
+              <a:srgbClr val="355D88"/>
+            </a:solidFill>
+            <a:prstDash val="solid"/>
+            <a:tailEnd type="triangle"/>
+          </a:ln>
+        </p:spPr>
+      </p:sp>
+      <p:sp>
+        <p:nvSpPr>
+          <p:cNvPr id="12" name="T10/edge:1"/>
+          <p:cNvSpPr/>
+          <p:nvPr/>
+        </p:nvSpPr>
+        <p:spPr>
+          <a:xfrm>
+            <a:off x="5638800" y="2275046"/>
+            <a:ext cx="742950" cy="0"/>
+          </a:xfrm>
+          <a:prstGeom prst="line">
+            <a:avLst/>
+          </a:prstGeom>
+          <a:noFill/>
+          <a:ln w="15240">
+            <a:solidFill>
+              <a:srgbClr val="355D88"/>
+            </a:solidFill>
+            <a:prstDash val="solid"/>
+            <a:tailEnd type="triangle"/>
+          </a:ln>
+        </p:spPr>
+      </p:sp>
+      <p:sp>
+        <p:nvSpPr>
+          <p:cNvPr id="13" name="T10/edge:2"/>
+          <p:cNvSpPr/>
+          <p:nvPr/>
+        </p:nvSpPr>
+        <p:spPr>
+          <a:xfrm>
+            <a:off x="8534400" y="2275046"/>
+            <a:ext cx="742950" cy="0"/>
+          </a:xfrm>
+          <a:prstGeom prst="line">
+            <a:avLst/>
+          </a:prstGeom>
+          <a:noFill/>
+          <a:ln w="15240">
+            <a:solidFill>
+              <a:srgbClr val="355D88"/>
+            </a:solidFill>
+            <a:prstDash val="solid"/>
+            <a:tailEnd type="triangle"/>
+          </a:ln>
+        </p:spPr>
+      </p:sp>
+      <p:sp>
+        <p:nvSpPr>
+          <p:cNvPr id="14" name="T10/node:step-1:frame"/>
+          <p:cNvSpPr/>
+          <p:nvPr/>
+        </p:nvSpPr>
+        <p:spPr>
+          <a:xfrm>
+            <a:off x="609600" y="1701356"/>
+            <a:ext cx="2152650" cy="1147381"/>
+          </a:xfrm>
+          <a:prstGeom prst="rect">
+            <a:avLst/>
+          </a:prstGeom>
+          <a:solidFill>
+            <a:srgbClr val="F0F3F6"/>
+          </a:solidFill>
+          <a:ln w="11430">
+            <a:solidFill>
+              <a:srgbClr val="BEC8D4"/>
+            </a:solidFill>
+            <a:prstDash val="solid"/>
+          </a:ln>
+        </p:spPr>
+      </p:sp>
+      <p:sp>
+        <p:nvSpPr>
+          <p:cNvPr id="15" name="T10/node:step-1:heading-rule"/>
+          <p:cNvSpPr/>
+          <p:nvPr/>
+        </p:nvSpPr>
+        <p:spPr>
+          <a:xfrm>
+            <a:off x="609600" y="1701356"/>
+            <a:ext cx="2152650" cy="0"/>
+          </a:xfrm>
+          <a:prstGeom prst="line">
+            <a:avLst/>
+          </a:prstGeom>
+          <a:noFill/>
+          <a:ln w="19050">
+            <a:solidFill>
+              <a:srgbClr val="536A7A"/>
+            </a:solidFill>
+            <a:prstDash val="solid"/>
+          </a:ln>
+        </p:spPr>
+      </p:sp>
+      <p:sp>
+        <p:nvSpPr>
+          <p:cNvPr id="16" name="T10/node:step-1:label"/>
+          <p:cNvSpPr/>
+          <p:nvPr/>
+        </p:nvSpPr>
+        <p:spPr>
+          <a:xfrm>
+            <a:off x="723900" y="1796606"/>
+            <a:ext cx="1924050" cy="266700"/>
+          </a:xfrm>
+          <a:prstGeom prst="rect">
+            <a:avLst/>
+          </a:prstGeom>
+          <a:noFill/>
+          <a:ln/>
+        </p:spPr>
+        <p:txBody>
+          <a:bodyPr wrap="none" lIns="0" tIns="0" rIns="0" bIns="0" rtlCol="0" anchor="t"/>
+          <a:lstStyle/>
+          <a:p>
+            <a:pPr algn="ctr" indent="0" marL="0">
+              <a:lnSpc>
+                <a:spcPts val="2088"/>
               </a:lnSpc>
               <a:buNone/>
             </a:pPr>
             <a:r>
               <a:rPr lang="zh-CN" altLang="en-US" sz="1800" b="1" dirty="0">
                 <a:solidFill>
-                  <a:srgbClr val="173C70"/>
-                </a:solidFill>
-                <a:latin typeface="Noto Sans CJK SC" pitchFamily="34" charset="0"/>
-                <a:ea typeface="Noto Sans CJK SC" pitchFamily="34" charset="-122"/>
-                <a:cs typeface="Noto Sans CJK SC" pitchFamily="34" charset="-120"/>
-              </a:rPr>
-              <a:t>耦合计算链</a:t>
+                  <a:srgbClr val="536A7A"/>
+                </a:solidFill>
+                <a:latin typeface="Noto Sans CJK SC" pitchFamily="34" charset="0"/>
+                <a:ea typeface="Noto Sans CJK SC" pitchFamily="34" charset="-122"/>
+                <a:cs typeface="Noto Sans CJK SC" pitchFamily="34" charset="-120"/>
+              </a:rPr>
+              <a:t>环境与管理输入</a:t>
             </a:r>
             <a:endParaRPr lang="zh-CN" sz="1800" dirty="0"/>
           </a:p>
@@ -6179,86 +6724,452 @@
       </p:sp>
       <p:sp>
         <p:nvSpPr>
-          <p:cNvPr id="11" name="T10/edge:0"/>
-          <p:cNvSpPr/>
-          <p:nvPr/>
-        </p:nvSpPr>
-        <p:spPr>
-          <a:xfrm>
-            <a:off x="2762250" y="2419350"/>
-            <a:ext cx="723900" cy="0"/>
+          <p:cNvPr id="17" name="T10/node:step-1:detail"/>
+          <p:cNvSpPr/>
+          <p:nvPr/>
+        </p:nvSpPr>
+        <p:spPr>
+          <a:xfrm>
+            <a:off x="723900" y="2110931"/>
+            <a:ext cx="1924050" cy="652081"/>
+          </a:xfrm>
+          <a:prstGeom prst="rect">
+            <a:avLst/>
+          </a:prstGeom>
+          <a:noFill/>
+          <a:ln/>
+        </p:spPr>
+        <p:txBody>
+          <a:bodyPr wrap="none" lIns="0" tIns="0" rIns="0" bIns="0" rtlCol="0" anchor="t"/>
+          <a:lstStyle/>
+          <a:p>
+            <a:pPr algn="ctr" indent="0" marL="0">
+              <a:lnSpc>
+                <a:spcPts val="1947"/>
+              </a:lnSpc>
+              <a:buNone/>
+            </a:pPr>
+            <a:r>
+              <a:rPr lang="zh-CN" altLang="en-US" sz="1650" dirty="0">
+                <a:solidFill>
+                  <a:srgbClr val="1C2430"/>
+                </a:solidFill>
+                <a:latin typeface="Noto Sans CJK SC" pitchFamily="34" charset="0"/>
+                <a:ea typeface="Noto Sans CJK SC" pitchFamily="34" charset="-122"/>
+                <a:cs typeface="Noto Sans CJK SC" pitchFamily="34" charset="-120"/>
+              </a:rPr>
+              <a:t>同一时间步和物理量</a:t>
+            </a:r>
+            <a:endParaRPr lang="zh-CN" sz="1650" dirty="0"/>
+          </a:p>
+        </p:txBody>
+      </p:sp>
+      <p:sp>
+        <p:nvSpPr>
+          <p:cNvPr id="18" name="T10/node:step-2:frame"/>
+          <p:cNvSpPr/>
+          <p:nvPr/>
+        </p:nvSpPr>
+        <p:spPr>
+          <a:xfrm>
+            <a:off x="3486150" y="1701356"/>
+            <a:ext cx="2152650" cy="1147381"/>
+          </a:xfrm>
+          <a:prstGeom prst="rect">
+            <a:avLst/>
+          </a:prstGeom>
+          <a:solidFill>
+            <a:srgbClr val="EAF2FA"/>
+          </a:solidFill>
+          <a:ln w="11430">
+            <a:solidFill>
+              <a:srgbClr val="BEC8D4"/>
+            </a:solidFill>
+            <a:prstDash val="solid"/>
+          </a:ln>
+        </p:spPr>
+      </p:sp>
+      <p:sp>
+        <p:nvSpPr>
+          <p:cNvPr id="19" name="T10/node:step-2:heading-rule"/>
+          <p:cNvSpPr/>
+          <p:nvPr/>
+        </p:nvSpPr>
+        <p:spPr>
+          <a:xfrm>
+            <a:off x="3486150" y="1701356"/>
+            <a:ext cx="2152650" cy="0"/>
           </a:xfrm>
           <a:prstGeom prst="line">
             <a:avLst/>
           </a:prstGeom>
           <a:noFill/>
-          <a:ln w="15240">
-            <a:solidFill>
-              <a:srgbClr val="355D88"/>
-            </a:solidFill>
-            <a:prstDash val="solid"/>
-            <a:tailEnd type="triangle"/>
-          </a:ln>
-        </p:spPr>
-      </p:sp>
-      <p:sp>
-        <p:nvSpPr>
-          <p:cNvPr id="12" name="T10/edge:1"/>
-          <p:cNvSpPr/>
-          <p:nvPr/>
-        </p:nvSpPr>
-        <p:spPr>
-          <a:xfrm>
-            <a:off x="5638800" y="2419350"/>
-            <a:ext cx="742950" cy="0"/>
+          <a:ln w="19050">
+            <a:solidFill>
+              <a:srgbClr val="235E96"/>
+            </a:solidFill>
+            <a:prstDash val="solid"/>
+          </a:ln>
+        </p:spPr>
+      </p:sp>
+      <p:sp>
+        <p:nvSpPr>
+          <p:cNvPr id="20" name="T10/node:step-2:label"/>
+          <p:cNvSpPr/>
+          <p:nvPr/>
+        </p:nvSpPr>
+        <p:spPr>
+          <a:xfrm>
+            <a:off x="3600450" y="1796606"/>
+            <a:ext cx="1924050" cy="266700"/>
+          </a:xfrm>
+          <a:prstGeom prst="rect">
+            <a:avLst/>
+          </a:prstGeom>
+          <a:noFill/>
+          <a:ln/>
+        </p:spPr>
+        <p:txBody>
+          <a:bodyPr wrap="none" lIns="0" tIns="0" rIns="0" bIns="0" rtlCol="0" anchor="t"/>
+          <a:lstStyle/>
+          <a:p>
+            <a:pPr algn="ctr" indent="0" marL="0">
+              <a:lnSpc>
+                <a:spcPts val="2088"/>
+              </a:lnSpc>
+              <a:buNone/>
+            </a:pPr>
+            <a:r>
+              <a:rPr lang="zh-CN" altLang="en-US" sz="1800" b="1" dirty="0">
+                <a:solidFill>
+                  <a:srgbClr val="235E96"/>
+                </a:solidFill>
+                <a:latin typeface="Noto Sans CJK SC" pitchFamily="34" charset="0"/>
+                <a:ea typeface="Noto Sans CJK SC" pitchFamily="34" charset="-122"/>
+                <a:cs typeface="Noto Sans CJK SC" pitchFamily="34" charset="-120"/>
+              </a:rPr>
+              <a:t>机理模型</a:t>
+            </a:r>
+            <a:endParaRPr lang="zh-CN" sz="1800" dirty="0"/>
+          </a:p>
+        </p:txBody>
+      </p:sp>
+      <p:sp>
+        <p:nvSpPr>
+          <p:cNvPr id="21" name="T10/node:step-2:detail"/>
+          <p:cNvSpPr/>
+          <p:nvPr/>
+        </p:nvSpPr>
+        <p:spPr>
+          <a:xfrm>
+            <a:off x="3600450" y="2110931"/>
+            <a:ext cx="1924050" cy="652081"/>
+          </a:xfrm>
+          <a:prstGeom prst="rect">
+            <a:avLst/>
+          </a:prstGeom>
+          <a:noFill/>
+          <a:ln/>
+        </p:spPr>
+        <p:txBody>
+          <a:bodyPr wrap="none" lIns="0" tIns="0" rIns="0" bIns="0" rtlCol="0" anchor="t"/>
+          <a:lstStyle/>
+          <a:p>
+            <a:pPr algn="ctr" indent="0" marL="0">
+              <a:lnSpc>
+                <a:spcPts val="1947"/>
+              </a:lnSpc>
+              <a:buNone/>
+            </a:pPr>
+            <a:r>
+              <a:rPr lang="zh-CN" altLang="en-US" sz="1650" dirty="0">
+                <a:solidFill>
+                  <a:srgbClr val="1C2430"/>
+                </a:solidFill>
+                <a:latin typeface="Noto Sans CJK SC" pitchFamily="34" charset="0"/>
+                <a:ea typeface="Noto Sans CJK SC" pitchFamily="34" charset="-122"/>
+                <a:cs typeface="Noto Sans CJK SC" pitchFamily="34" charset="-120"/>
+              </a:rPr>
+              <a:t>参数与状态演化</a:t>
+            </a:r>
+            <a:endParaRPr lang="zh-CN" sz="1650" dirty="0"/>
+          </a:p>
+        </p:txBody>
+      </p:sp>
+      <p:sp>
+        <p:nvSpPr>
+          <p:cNvPr id="22" name="T10/node:step-3:frame"/>
+          <p:cNvSpPr/>
+          <p:nvPr/>
+        </p:nvSpPr>
+        <p:spPr>
+          <a:xfrm>
+            <a:off x="6381750" y="1701356"/>
+            <a:ext cx="2152650" cy="1147381"/>
+          </a:xfrm>
+          <a:prstGeom prst="rect">
+            <a:avLst/>
+          </a:prstGeom>
+          <a:solidFill>
+            <a:srgbClr val="FAEEE8"/>
+          </a:solidFill>
+          <a:ln w="11430">
+            <a:solidFill>
+              <a:srgbClr val="BEC8D4"/>
+            </a:solidFill>
+            <a:prstDash val="solid"/>
+          </a:ln>
+        </p:spPr>
+      </p:sp>
+      <p:sp>
+        <p:nvSpPr>
+          <p:cNvPr id="23" name="T10/node:step-3:heading-rule"/>
+          <p:cNvSpPr/>
+          <p:nvPr/>
+        </p:nvSpPr>
+        <p:spPr>
+          <a:xfrm>
+            <a:off x="6381750" y="1701356"/>
+            <a:ext cx="2152650" cy="0"/>
           </a:xfrm>
           <a:prstGeom prst="line">
             <a:avLst/>
           </a:prstGeom>
           <a:noFill/>
-          <a:ln w="15240">
-            <a:solidFill>
-              <a:srgbClr val="355D88"/>
-            </a:solidFill>
-            <a:prstDash val="solid"/>
-            <a:tailEnd type="triangle"/>
-          </a:ln>
-        </p:spPr>
-      </p:sp>
-      <p:sp>
-        <p:nvSpPr>
-          <p:cNvPr id="13" name="T10/edge:2"/>
-          <p:cNvSpPr/>
-          <p:nvPr/>
-        </p:nvSpPr>
-        <p:spPr>
-          <a:xfrm>
-            <a:off x="8534400" y="2419350"/>
-            <a:ext cx="742950" cy="0"/>
+          <a:ln w="19050">
+            <a:solidFill>
+              <a:srgbClr val="A24736"/>
+            </a:solidFill>
+            <a:prstDash val="solid"/>
+          </a:ln>
+        </p:spPr>
+      </p:sp>
+      <p:sp>
+        <p:nvSpPr>
+          <p:cNvPr id="24" name="T10/node:step-3:label"/>
+          <p:cNvSpPr/>
+          <p:nvPr/>
+        </p:nvSpPr>
+        <p:spPr>
+          <a:xfrm>
+            <a:off x="6496050" y="1796606"/>
+            <a:ext cx="1924050" cy="266700"/>
+          </a:xfrm>
+          <a:prstGeom prst="rect">
+            <a:avLst/>
+          </a:prstGeom>
+          <a:noFill/>
+          <a:ln/>
+        </p:spPr>
+        <p:txBody>
+          <a:bodyPr wrap="none" lIns="0" tIns="0" rIns="0" bIns="0" rtlCol="0" anchor="t"/>
+          <a:lstStyle/>
+          <a:p>
+            <a:pPr algn="ctr" indent="0" marL="0">
+              <a:lnSpc>
+                <a:spcPts val="2088"/>
+              </a:lnSpc>
+              <a:buNone/>
+            </a:pPr>
+            <a:r>
+              <a:rPr lang="zh-CN" altLang="en-US" sz="1800" b="1" dirty="0">
+                <a:solidFill>
+                  <a:srgbClr val="A24736"/>
+                </a:solidFill>
+                <a:latin typeface="Noto Sans CJK SC" pitchFamily="34" charset="0"/>
+                <a:ea typeface="Noto Sans CJK SC" pitchFamily="34" charset="-122"/>
+                <a:cs typeface="Noto Sans CJK SC" pitchFamily="34" charset="-120"/>
+              </a:rPr>
+              <a:t>目标与约束计算</a:t>
+            </a:r>
+            <a:endParaRPr lang="zh-CN" sz="1800" dirty="0"/>
+          </a:p>
+        </p:txBody>
+      </p:sp>
+      <p:sp>
+        <p:nvSpPr>
+          <p:cNvPr id="25" name="T10/node:step-3:detail"/>
+          <p:cNvSpPr/>
+          <p:nvPr/>
+        </p:nvSpPr>
+        <p:spPr>
+          <a:xfrm>
+            <a:off x="6496050" y="2110931"/>
+            <a:ext cx="1924050" cy="652081"/>
+          </a:xfrm>
+          <a:prstGeom prst="rect">
+            <a:avLst/>
+          </a:prstGeom>
+          <a:noFill/>
+          <a:ln/>
+        </p:spPr>
+        <p:txBody>
+          <a:bodyPr wrap="none" lIns="0" tIns="0" rIns="0" bIns="0" rtlCol="0" anchor="t"/>
+          <a:lstStyle/>
+          <a:p>
+            <a:pPr algn="ctr" indent="0" marL="0">
+              <a:lnSpc>
+                <a:spcPts val="1947"/>
+              </a:lnSpc>
+              <a:buNone/>
+            </a:pPr>
+            <a:r>
+              <a:rPr lang="zh-CN" altLang="en-US" sz="1650" dirty="0">
+                <a:solidFill>
+                  <a:srgbClr val="1C2430"/>
+                </a:solidFill>
+                <a:latin typeface="Noto Sans CJK SC" pitchFamily="34" charset="0"/>
+                <a:ea typeface="Noto Sans CJK SC" pitchFamily="34" charset="-122"/>
+                <a:cs typeface="Noto Sans CJK SC" pitchFamily="34" charset="-120"/>
+              </a:rPr>
+              <a:t>效应、损失和边界</a:t>
+            </a:r>
+            <a:endParaRPr lang="zh-CN" sz="1650" dirty="0"/>
+          </a:p>
+        </p:txBody>
+      </p:sp>
+      <p:sp>
+        <p:nvSpPr>
+          <p:cNvPr id="26" name="T10/node:step-4:frame"/>
+          <p:cNvSpPr/>
+          <p:nvPr/>
+        </p:nvSpPr>
+        <p:spPr>
+          <a:xfrm>
+            <a:off x="9277350" y="1701356"/>
+            <a:ext cx="2305050" cy="1147381"/>
+          </a:xfrm>
+          <a:prstGeom prst="rect">
+            <a:avLst/>
+          </a:prstGeom>
+          <a:solidFill>
+            <a:srgbClr val="EAF2FA"/>
+          </a:solidFill>
+          <a:ln w="11430">
+            <a:solidFill>
+              <a:srgbClr val="BEC8D4"/>
+            </a:solidFill>
+            <a:prstDash val="solid"/>
+          </a:ln>
+        </p:spPr>
+      </p:sp>
+      <p:sp>
+        <p:nvSpPr>
+          <p:cNvPr id="27" name="T10/node:step-4:heading-rule"/>
+          <p:cNvSpPr/>
+          <p:nvPr/>
+        </p:nvSpPr>
+        <p:spPr>
+          <a:xfrm>
+            <a:off x="9277350" y="1701356"/>
+            <a:ext cx="2305050" cy="0"/>
           </a:xfrm>
           <a:prstGeom prst="line">
             <a:avLst/>
           </a:prstGeom>
           <a:noFill/>
-          <a:ln w="15240">
-            <a:solidFill>
-              <a:srgbClr val="355D88"/>
-            </a:solidFill>
-            <a:prstDash val="solid"/>
-            <a:tailEnd type="triangle"/>
-          </a:ln>
-        </p:spPr>
-      </p:sp>
-      <p:sp>
-        <p:nvSpPr>
-          <p:cNvPr id="14" name="T10/node:step-1:frame"/>
-          <p:cNvSpPr/>
-          <p:nvPr/>
-        </p:nvSpPr>
-        <p:spPr>
-          <a:xfrm>
-            <a:off x="609600" y="1866900"/>
-            <a:ext cx="2152650" cy="1104900"/>
+          <a:ln w="19050">
+            <a:solidFill>
+              <a:srgbClr val="235E96"/>
+            </a:solidFill>
+            <a:prstDash val="solid"/>
+          </a:ln>
+        </p:spPr>
+      </p:sp>
+      <p:sp>
+        <p:nvSpPr>
+          <p:cNvPr id="28" name="T10/node:step-4:label"/>
+          <p:cNvSpPr/>
+          <p:nvPr/>
+        </p:nvSpPr>
+        <p:spPr>
+          <a:xfrm>
+            <a:off x="9391650" y="1796606"/>
+            <a:ext cx="2076450" cy="266700"/>
+          </a:xfrm>
+          <a:prstGeom prst="rect">
+            <a:avLst/>
+          </a:prstGeom>
+          <a:noFill/>
+          <a:ln/>
+        </p:spPr>
+        <p:txBody>
+          <a:bodyPr wrap="none" lIns="0" tIns="0" rIns="0" bIns="0" rtlCol="0" anchor="t"/>
+          <a:lstStyle/>
+          <a:p>
+            <a:pPr algn="ctr" indent="0" marL="0">
+              <a:lnSpc>
+                <a:spcPts val="2088"/>
+              </a:lnSpc>
+              <a:buNone/>
+            </a:pPr>
+            <a:r>
+              <a:rPr lang="zh-CN" altLang="en-US" sz="1800" b="1" dirty="0">
+                <a:solidFill>
+                  <a:srgbClr val="235E96"/>
+                </a:solidFill>
+                <a:latin typeface="Noto Sans CJK SC" pitchFamily="34" charset="0"/>
+                <a:ea typeface="Noto Sans CJK SC" pitchFamily="34" charset="-122"/>
+                <a:cs typeface="Noto Sans CJK SC" pitchFamily="34" charset="-120"/>
+              </a:rPr>
+              <a:t>优化或策略更新</a:t>
+            </a:r>
+            <a:endParaRPr lang="zh-CN" sz="1800" dirty="0"/>
+          </a:p>
+        </p:txBody>
+      </p:sp>
+      <p:sp>
+        <p:nvSpPr>
+          <p:cNvPr id="29" name="T10/node:step-4:detail"/>
+          <p:cNvSpPr/>
+          <p:nvPr/>
+        </p:nvSpPr>
+        <p:spPr>
+          <a:xfrm>
+            <a:off x="9391650" y="2110931"/>
+            <a:ext cx="2076450" cy="652081"/>
+          </a:xfrm>
+          <a:prstGeom prst="rect">
+            <a:avLst/>
+          </a:prstGeom>
+          <a:noFill/>
+          <a:ln/>
+        </p:spPr>
+        <p:txBody>
+          <a:bodyPr wrap="none" lIns="0" tIns="0" rIns="0" bIns="0" rtlCol="0" anchor="t"/>
+          <a:lstStyle/>
+          <a:p>
+            <a:pPr algn="ctr" indent="0" marL="0">
+              <a:lnSpc>
+                <a:spcPts val="1947"/>
+              </a:lnSpc>
+              <a:buNone/>
+            </a:pPr>
+            <a:r>
+              <a:rPr lang="zh-CN" altLang="en-US" sz="1650" dirty="0">
+                <a:solidFill>
+                  <a:srgbClr val="1C2430"/>
+                </a:solidFill>
+                <a:latin typeface="Noto Sans CJK SC" pitchFamily="34" charset="0"/>
+                <a:ea typeface="Noto Sans CJK SC" pitchFamily="34" charset="-122"/>
+                <a:cs typeface="Noto Sans CJK SC" pitchFamily="34" charset="-120"/>
+              </a:rPr>
+              <a:t>反馈到下一轮</a:t>
+            </a:r>
+            <a:endParaRPr lang="zh-CN" sz="1650" dirty="0"/>
+          </a:p>
+        </p:txBody>
+      </p:sp>
+      <p:sp>
+        <p:nvSpPr>
+          <p:cNvPr id="30" name="T10/card/region-1/frame"/>
+          <p:cNvSpPr/>
+          <p:nvPr/>
+        </p:nvSpPr>
+        <p:spPr>
+          <a:xfrm>
+            <a:off x="457200" y="3461956"/>
+            <a:ext cx="3486150" cy="2492597"/>
           </a:xfrm>
           <a:prstGeom prst="rect">
             <a:avLst/>
@@ -6266,7 +7177,7 @@
           <a:solidFill>
             <a:srgbClr val="FFFFFF"/>
           </a:solidFill>
-          <a:ln w="11430">
+          <a:ln w="9525">
             <a:solidFill>
               <a:srgbClr val="BEC8D4"/>
             </a:solidFill>
@@ -6276,546 +7187,20 @@
       </p:sp>
       <p:sp>
         <p:nvSpPr>
-          <p:cNvPr id="15" name="T10/node:step-1:heading-rule"/>
-          <p:cNvSpPr/>
-          <p:nvPr/>
-        </p:nvSpPr>
-        <p:spPr>
-          <a:xfrm>
-            <a:off x="609600" y="1866900"/>
-            <a:ext cx="2152650" cy="0"/>
-          </a:xfrm>
-          <a:prstGeom prst="line">
-            <a:avLst/>
-          </a:prstGeom>
-          <a:noFill/>
-          <a:ln w="19050">
-            <a:solidFill>
-              <a:srgbClr val="173C70"/>
-            </a:solidFill>
-            <a:prstDash val="solid"/>
-          </a:ln>
-        </p:spPr>
-      </p:sp>
-      <p:sp>
-        <p:nvSpPr>
-          <p:cNvPr id="16" name="T10/node:step-1:label"/>
-          <p:cNvSpPr/>
-          <p:nvPr/>
-        </p:nvSpPr>
-        <p:spPr>
-          <a:xfrm>
-            <a:off x="723900" y="1962150"/>
-            <a:ext cx="1924050" cy="266700"/>
-          </a:xfrm>
-          <a:prstGeom prst="rect">
-            <a:avLst/>
-          </a:prstGeom>
-          <a:noFill/>
-          <a:ln/>
-        </p:spPr>
-        <p:txBody>
-          <a:bodyPr wrap="none" lIns="0" tIns="0" rIns="0" bIns="0" rtlCol="0" anchor="t"/>
-          <a:lstStyle/>
-          <a:p>
-            <a:pPr algn="ctr" indent="0" marL="0">
-              <a:lnSpc>
-                <a:spcPts val="2088"/>
-              </a:lnSpc>
-              <a:buNone/>
-            </a:pPr>
-            <a:r>
-              <a:rPr lang="zh-CN" altLang="en-US" sz="1800" b="1" dirty="0">
-                <a:solidFill>
-                  <a:srgbClr val="173C70"/>
-                </a:solidFill>
-                <a:latin typeface="Noto Sans CJK SC" pitchFamily="34" charset="0"/>
-                <a:ea typeface="Noto Sans CJK SC" pitchFamily="34" charset="-122"/>
-                <a:cs typeface="Noto Sans CJK SC" pitchFamily="34" charset="-120"/>
-              </a:rPr>
-              <a:t>环境与管理输入</a:t>
-            </a:r>
-            <a:endParaRPr lang="zh-CN" sz="1800" dirty="0"/>
-          </a:p>
-        </p:txBody>
-      </p:sp>
-      <p:sp>
-        <p:nvSpPr>
-          <p:cNvPr id="17" name="T10/node:step-1:detail"/>
-          <p:cNvSpPr/>
-          <p:nvPr/>
-        </p:nvSpPr>
-        <p:spPr>
-          <a:xfrm>
-            <a:off x="723900" y="2276475"/>
-            <a:ext cx="1924050" cy="609600"/>
-          </a:xfrm>
-          <a:prstGeom prst="rect">
-            <a:avLst/>
-          </a:prstGeom>
-          <a:noFill/>
-          <a:ln/>
-        </p:spPr>
-        <p:txBody>
-          <a:bodyPr wrap="none" lIns="0" tIns="0" rIns="0" bIns="0" rtlCol="0" anchor="t"/>
-          <a:lstStyle/>
-          <a:p>
-            <a:pPr algn="ctr" indent="0" marL="0">
-              <a:lnSpc>
-                <a:spcPts val="1947"/>
-              </a:lnSpc>
-              <a:buNone/>
-            </a:pPr>
-            <a:r>
-              <a:rPr lang="zh-CN" altLang="en-US" sz="1650" dirty="0">
-                <a:solidFill>
-                  <a:srgbClr val="1C2430"/>
-                </a:solidFill>
-                <a:latin typeface="Noto Sans CJK SC" pitchFamily="34" charset="0"/>
-                <a:ea typeface="Noto Sans CJK SC" pitchFamily="34" charset="-122"/>
-                <a:cs typeface="Noto Sans CJK SC" pitchFamily="34" charset="-120"/>
-              </a:rPr>
-              <a:t>填写接口与条件</a:t>
-            </a:r>
-            <a:endParaRPr lang="zh-CN" sz="1650" dirty="0"/>
-          </a:p>
-        </p:txBody>
-      </p:sp>
-      <p:sp>
-        <p:nvSpPr>
-          <p:cNvPr id="18" name="T10/node:step-2:frame"/>
-          <p:cNvSpPr/>
-          <p:nvPr/>
-        </p:nvSpPr>
-        <p:spPr>
-          <a:xfrm>
-            <a:off x="3486150" y="1866900"/>
-            <a:ext cx="2152650" cy="1104900"/>
+          <p:cNvPr id="31" name="T10/card/region-1/label"/>
+          <p:cNvSpPr/>
+          <p:nvPr/>
+        </p:nvSpPr>
+        <p:spPr>
+          <a:xfrm>
+            <a:off x="457200" y="3461956"/>
+            <a:ext cx="1010983" cy="2492597"/>
           </a:xfrm>
           <a:prstGeom prst="rect">
             <a:avLst/>
           </a:prstGeom>
           <a:solidFill>
-            <a:srgbClr val="FFFFFF"/>
-          </a:solidFill>
-          <a:ln w="11430">
-            <a:solidFill>
-              <a:srgbClr val="BEC8D4"/>
-            </a:solidFill>
-            <a:prstDash val="solid"/>
-          </a:ln>
-        </p:spPr>
-      </p:sp>
-      <p:sp>
-        <p:nvSpPr>
-          <p:cNvPr id="19" name="T10/node:step-2:heading-rule"/>
-          <p:cNvSpPr/>
-          <p:nvPr/>
-        </p:nvSpPr>
-        <p:spPr>
-          <a:xfrm>
-            <a:off x="3486150" y="1866900"/>
-            <a:ext cx="2152650" cy="0"/>
-          </a:xfrm>
-          <a:prstGeom prst="line">
-            <a:avLst/>
-          </a:prstGeom>
-          <a:noFill/>
-          <a:ln w="19050">
-            <a:solidFill>
-              <a:srgbClr val="173C70"/>
-            </a:solidFill>
-            <a:prstDash val="solid"/>
-          </a:ln>
-        </p:spPr>
-      </p:sp>
-      <p:sp>
-        <p:nvSpPr>
-          <p:cNvPr id="20" name="T10/node:step-2:label"/>
-          <p:cNvSpPr/>
-          <p:nvPr/>
-        </p:nvSpPr>
-        <p:spPr>
-          <a:xfrm>
-            <a:off x="3600450" y="1962150"/>
-            <a:ext cx="1924050" cy="266700"/>
-          </a:xfrm>
-          <a:prstGeom prst="rect">
-            <a:avLst/>
-          </a:prstGeom>
-          <a:noFill/>
-          <a:ln/>
-        </p:spPr>
-        <p:txBody>
-          <a:bodyPr wrap="none" lIns="0" tIns="0" rIns="0" bIns="0" rtlCol="0" anchor="t"/>
-          <a:lstStyle/>
-          <a:p>
-            <a:pPr algn="ctr" indent="0" marL="0">
-              <a:lnSpc>
-                <a:spcPts val="2088"/>
-              </a:lnSpc>
-              <a:buNone/>
-            </a:pPr>
-            <a:r>
-              <a:rPr lang="zh-CN" altLang="en-US" sz="1800" b="1" dirty="0">
-                <a:solidFill>
-                  <a:srgbClr val="173C70"/>
-                </a:solidFill>
-                <a:latin typeface="Noto Sans CJK SC" pitchFamily="34" charset="0"/>
-                <a:ea typeface="Noto Sans CJK SC" pitchFamily="34" charset="-122"/>
-                <a:cs typeface="Noto Sans CJK SC" pitchFamily="34" charset="-120"/>
-              </a:rPr>
-              <a:t>机理模型</a:t>
-            </a:r>
-            <a:endParaRPr lang="zh-CN" sz="1800" dirty="0"/>
-          </a:p>
-        </p:txBody>
-      </p:sp>
-      <p:sp>
-        <p:nvSpPr>
-          <p:cNvPr id="21" name="T10/node:step-2:detail"/>
-          <p:cNvSpPr/>
-          <p:nvPr/>
-        </p:nvSpPr>
-        <p:spPr>
-          <a:xfrm>
-            <a:off x="3600450" y="2276475"/>
-            <a:ext cx="1924050" cy="609600"/>
-          </a:xfrm>
-          <a:prstGeom prst="rect">
-            <a:avLst/>
-          </a:prstGeom>
-          <a:noFill/>
-          <a:ln/>
-        </p:spPr>
-        <p:txBody>
-          <a:bodyPr wrap="none" lIns="0" tIns="0" rIns="0" bIns="0" rtlCol="0" anchor="t"/>
-          <a:lstStyle/>
-          <a:p>
-            <a:pPr algn="ctr" indent="0" marL="0">
-              <a:lnSpc>
-                <a:spcPts val="1947"/>
-              </a:lnSpc>
-              <a:buNone/>
-            </a:pPr>
-            <a:r>
-              <a:rPr lang="zh-CN" altLang="en-US" sz="1650" dirty="0">
-                <a:solidFill>
-                  <a:srgbClr val="1C2430"/>
-                </a:solidFill>
-                <a:latin typeface="Noto Sans CJK SC" pitchFamily="34" charset="0"/>
-                <a:ea typeface="Noto Sans CJK SC" pitchFamily="34" charset="-122"/>
-                <a:cs typeface="Noto Sans CJK SC" pitchFamily="34" charset="-120"/>
-              </a:rPr>
-              <a:t>填写接口与条件</a:t>
-            </a:r>
-            <a:endParaRPr lang="zh-CN" sz="1650" dirty="0"/>
-          </a:p>
-        </p:txBody>
-      </p:sp>
-      <p:sp>
-        <p:nvSpPr>
-          <p:cNvPr id="22" name="T10/node:step-3:frame"/>
-          <p:cNvSpPr/>
-          <p:nvPr/>
-        </p:nvSpPr>
-        <p:spPr>
-          <a:xfrm>
-            <a:off x="6381750" y="1866900"/>
-            <a:ext cx="2152650" cy="1104900"/>
-          </a:xfrm>
-          <a:prstGeom prst="rect">
-            <a:avLst/>
-          </a:prstGeom>
-          <a:solidFill>
-            <a:srgbClr val="FFFFFF"/>
-          </a:solidFill>
-          <a:ln w="11430">
-            <a:solidFill>
-              <a:srgbClr val="BEC8D4"/>
-            </a:solidFill>
-            <a:prstDash val="solid"/>
-          </a:ln>
-        </p:spPr>
-      </p:sp>
-      <p:sp>
-        <p:nvSpPr>
-          <p:cNvPr id="23" name="T10/node:step-3:heading-rule"/>
-          <p:cNvSpPr/>
-          <p:nvPr/>
-        </p:nvSpPr>
-        <p:spPr>
-          <a:xfrm>
-            <a:off x="6381750" y="1866900"/>
-            <a:ext cx="2152650" cy="0"/>
-          </a:xfrm>
-          <a:prstGeom prst="line">
-            <a:avLst/>
-          </a:prstGeom>
-          <a:noFill/>
-          <a:ln w="19050">
-            <a:solidFill>
-              <a:srgbClr val="173C70"/>
-            </a:solidFill>
-            <a:prstDash val="solid"/>
-          </a:ln>
-        </p:spPr>
-      </p:sp>
-      <p:sp>
-        <p:nvSpPr>
-          <p:cNvPr id="24" name="T10/node:step-3:label"/>
-          <p:cNvSpPr/>
-          <p:nvPr/>
-        </p:nvSpPr>
-        <p:spPr>
-          <a:xfrm>
-            <a:off x="6496050" y="1962150"/>
-            <a:ext cx="1924050" cy="266700"/>
-          </a:xfrm>
-          <a:prstGeom prst="rect">
-            <a:avLst/>
-          </a:prstGeom>
-          <a:noFill/>
-          <a:ln/>
-        </p:spPr>
-        <p:txBody>
-          <a:bodyPr wrap="none" lIns="0" tIns="0" rIns="0" bIns="0" rtlCol="0" anchor="t"/>
-          <a:lstStyle/>
-          <a:p>
-            <a:pPr algn="ctr" indent="0" marL="0">
-              <a:lnSpc>
-                <a:spcPts val="2088"/>
-              </a:lnSpc>
-              <a:buNone/>
-            </a:pPr>
-            <a:r>
-              <a:rPr lang="zh-CN" altLang="en-US" sz="1800" b="1" dirty="0">
-                <a:solidFill>
-                  <a:srgbClr val="173C70"/>
-                </a:solidFill>
-                <a:latin typeface="Noto Sans CJK SC" pitchFamily="34" charset="0"/>
-                <a:ea typeface="Noto Sans CJK SC" pitchFamily="34" charset="-122"/>
-                <a:cs typeface="Noto Sans CJK SC" pitchFamily="34" charset="-120"/>
-              </a:rPr>
-              <a:t>目标与约束计算</a:t>
-            </a:r>
-            <a:endParaRPr lang="zh-CN" sz="1800" dirty="0"/>
-          </a:p>
-        </p:txBody>
-      </p:sp>
-      <p:sp>
-        <p:nvSpPr>
-          <p:cNvPr id="25" name="T10/node:step-3:detail"/>
-          <p:cNvSpPr/>
-          <p:nvPr/>
-        </p:nvSpPr>
-        <p:spPr>
-          <a:xfrm>
-            <a:off x="6496050" y="2276475"/>
-            <a:ext cx="1924050" cy="609600"/>
-          </a:xfrm>
-          <a:prstGeom prst="rect">
-            <a:avLst/>
-          </a:prstGeom>
-          <a:noFill/>
-          <a:ln/>
-        </p:spPr>
-        <p:txBody>
-          <a:bodyPr wrap="none" lIns="0" tIns="0" rIns="0" bIns="0" rtlCol="0" anchor="t"/>
-          <a:lstStyle/>
-          <a:p>
-            <a:pPr algn="ctr" indent="0" marL="0">
-              <a:lnSpc>
-                <a:spcPts val="1947"/>
-              </a:lnSpc>
-              <a:buNone/>
-            </a:pPr>
-            <a:r>
-              <a:rPr lang="zh-CN" altLang="en-US" sz="1650" dirty="0">
-                <a:solidFill>
-                  <a:srgbClr val="1C2430"/>
-                </a:solidFill>
-                <a:latin typeface="Noto Sans CJK SC" pitchFamily="34" charset="0"/>
-                <a:ea typeface="Noto Sans CJK SC" pitchFamily="34" charset="-122"/>
-                <a:cs typeface="Noto Sans CJK SC" pitchFamily="34" charset="-120"/>
-              </a:rPr>
-              <a:t>填写接口与条件</a:t>
-            </a:r>
-            <a:endParaRPr lang="zh-CN" sz="1650" dirty="0"/>
-          </a:p>
-        </p:txBody>
-      </p:sp>
-      <p:sp>
-        <p:nvSpPr>
-          <p:cNvPr id="26" name="T10/node:step-4:frame"/>
-          <p:cNvSpPr/>
-          <p:nvPr/>
-        </p:nvSpPr>
-        <p:spPr>
-          <a:xfrm>
-            <a:off x="9277350" y="1866900"/>
-            <a:ext cx="2305050" cy="1104900"/>
-          </a:xfrm>
-          <a:prstGeom prst="rect">
-            <a:avLst/>
-          </a:prstGeom>
-          <a:solidFill>
-            <a:srgbClr val="FFFFFF"/>
-          </a:solidFill>
-          <a:ln w="11430">
-            <a:solidFill>
-              <a:srgbClr val="BEC8D4"/>
-            </a:solidFill>
-            <a:prstDash val="solid"/>
-          </a:ln>
-        </p:spPr>
-      </p:sp>
-      <p:sp>
-        <p:nvSpPr>
-          <p:cNvPr id="27" name="T10/node:step-4:heading-rule"/>
-          <p:cNvSpPr/>
-          <p:nvPr/>
-        </p:nvSpPr>
-        <p:spPr>
-          <a:xfrm>
-            <a:off x="9277350" y="1866900"/>
-            <a:ext cx="2305050" cy="0"/>
-          </a:xfrm>
-          <a:prstGeom prst="line">
-            <a:avLst/>
-          </a:prstGeom>
-          <a:noFill/>
-          <a:ln w="19050">
-            <a:solidFill>
-              <a:srgbClr val="173C70"/>
-            </a:solidFill>
-            <a:prstDash val="solid"/>
-          </a:ln>
-        </p:spPr>
-      </p:sp>
-      <p:sp>
-        <p:nvSpPr>
-          <p:cNvPr id="28" name="T10/node:step-4:label"/>
-          <p:cNvSpPr/>
-          <p:nvPr/>
-        </p:nvSpPr>
-        <p:spPr>
-          <a:xfrm>
-            <a:off x="9391650" y="1962150"/>
-            <a:ext cx="2076450" cy="266700"/>
-          </a:xfrm>
-          <a:prstGeom prst="rect">
-            <a:avLst/>
-          </a:prstGeom>
-          <a:noFill/>
-          <a:ln/>
-        </p:spPr>
-        <p:txBody>
-          <a:bodyPr wrap="none" lIns="0" tIns="0" rIns="0" bIns="0" rtlCol="0" anchor="t"/>
-          <a:lstStyle/>
-          <a:p>
-            <a:pPr algn="ctr" indent="0" marL="0">
-              <a:lnSpc>
-                <a:spcPts val="2088"/>
-              </a:lnSpc>
-              <a:buNone/>
-            </a:pPr>
-            <a:r>
-              <a:rPr lang="zh-CN" altLang="en-US" sz="1800" b="1" dirty="0">
-                <a:solidFill>
-                  <a:srgbClr val="173C70"/>
-                </a:solidFill>
-                <a:latin typeface="Noto Sans CJK SC" pitchFamily="34" charset="0"/>
-                <a:ea typeface="Noto Sans CJK SC" pitchFamily="34" charset="-122"/>
-                <a:cs typeface="Noto Sans CJK SC" pitchFamily="34" charset="-120"/>
-              </a:rPr>
-              <a:t>优化或策略更新</a:t>
-            </a:r>
-            <a:endParaRPr lang="zh-CN" sz="1800" dirty="0"/>
-          </a:p>
-        </p:txBody>
-      </p:sp>
-      <p:sp>
-        <p:nvSpPr>
-          <p:cNvPr id="29" name="T10/node:step-4:detail"/>
-          <p:cNvSpPr/>
-          <p:nvPr/>
-        </p:nvSpPr>
-        <p:spPr>
-          <a:xfrm>
-            <a:off x="9391650" y="2276475"/>
-            <a:ext cx="2076450" cy="609600"/>
-          </a:xfrm>
-          <a:prstGeom prst="rect">
-            <a:avLst/>
-          </a:prstGeom>
-          <a:noFill/>
-          <a:ln/>
-        </p:spPr>
-        <p:txBody>
-          <a:bodyPr wrap="none" lIns="0" tIns="0" rIns="0" bIns="0" rtlCol="0" anchor="t"/>
-          <a:lstStyle/>
-          <a:p>
-            <a:pPr algn="ctr" indent="0" marL="0">
-              <a:lnSpc>
-                <a:spcPts val="1947"/>
-              </a:lnSpc>
-              <a:buNone/>
-            </a:pPr>
-            <a:r>
-              <a:rPr lang="zh-CN" altLang="en-US" sz="1650" dirty="0">
-                <a:solidFill>
-                  <a:srgbClr val="1C2430"/>
-                </a:solidFill>
-                <a:latin typeface="Noto Sans CJK SC" pitchFamily="34" charset="0"/>
-                <a:ea typeface="Noto Sans CJK SC" pitchFamily="34" charset="-122"/>
-                <a:cs typeface="Noto Sans CJK SC" pitchFamily="34" charset="-120"/>
-              </a:rPr>
-              <a:t>填写接口与条件</a:t>
-            </a:r>
-            <a:endParaRPr lang="zh-CN" sz="1650" dirty="0"/>
-          </a:p>
-        </p:txBody>
-      </p:sp>
-      <p:sp>
-        <p:nvSpPr>
-          <p:cNvPr id="30" name="T10/card/region-1/base-rule"/>
-          <p:cNvSpPr/>
-          <p:nvPr/>
-        </p:nvSpPr>
-        <p:spPr>
-          <a:xfrm>
-            <a:off x="457200" y="5962650"/>
-            <a:ext cx="3486150" cy="0"/>
-          </a:xfrm>
-          <a:prstGeom prst="line">
-            <a:avLst/>
-          </a:prstGeom>
-          <a:noFill/>
-          <a:ln w="10478">
-            <a:solidFill>
-              <a:srgbClr val="BEC8D4"/>
-            </a:solidFill>
-            <a:prstDash val="solid"/>
-          </a:ln>
-        </p:spPr>
-      </p:sp>
-      <p:sp>
-        <p:nvSpPr>
-          <p:cNvPr id="31" name="T10/card/region-1/side-mark"/>
-          <p:cNvSpPr/>
-          <p:nvPr/>
-        </p:nvSpPr>
-        <p:spPr>
-          <a:xfrm>
-            <a:off x="457200" y="3581400"/>
-            <a:ext cx="47625" cy="295275"/>
-          </a:xfrm>
-          <a:prstGeom prst="rect">
-            <a:avLst/>
-          </a:prstGeom>
-          <a:solidFill>
-            <a:srgbClr val="173C70"/>
+            <a:srgbClr val="F0F3F6"/>
           </a:solidFill>
           <a:ln w="12700">
             <a:solidFill>
@@ -6829,14 +7214,37 @@
       </p:sp>
       <p:sp>
         <p:nvSpPr>
-          <p:cNvPr id="32" name="T10/card/region-1/title"/>
-          <p:cNvSpPr/>
-          <p:nvPr/>
-        </p:nvSpPr>
-        <p:spPr>
-          <a:xfrm>
-            <a:off x="609600" y="3581400"/>
-            <a:ext cx="3333750" cy="304800"/>
+          <p:cNvPr id="32" name="T10/card/region-1/split"/>
+          <p:cNvSpPr/>
+          <p:nvPr/>
+        </p:nvSpPr>
+        <p:spPr>
+          <a:xfrm>
+            <a:off x="1468183" y="3633406"/>
+            <a:ext cx="0" cy="2149697"/>
+          </a:xfrm>
+          <a:prstGeom prst="line">
+            <a:avLst/>
+          </a:prstGeom>
+          <a:noFill/>
+          <a:ln w="13335">
+            <a:solidFill>
+              <a:srgbClr val="536A7A"/>
+            </a:solidFill>
+            <a:prstDash val="solid"/>
+          </a:ln>
+        </p:spPr>
+      </p:sp>
+      <p:sp>
+        <p:nvSpPr>
+          <p:cNvPr id="33" name="T10/card/region-1/title"/>
+          <p:cNvSpPr/>
+          <p:nvPr/>
+        </p:nvSpPr>
+        <p:spPr>
+          <a:xfrm>
+            <a:off x="600075" y="3652457"/>
+            <a:ext cx="725233" cy="2092547"/>
           </a:xfrm>
           <a:prstGeom prst="rect">
             <a:avLst/>
@@ -6850,54 +7258,111 @@
           <a:p>
             <a:pPr algn="l" indent="0" marL="0">
               <a:lnSpc>
-                <a:spcPts val="2070"/>
+                <a:spcPts val="2242"/>
+              </a:lnSpc>
+              <a:buNone/>
+            </a:pPr>
+            <a:r>
+              <a:rPr lang="zh-CN" altLang="en-US" sz="1950" b="1" dirty="0">
+                <a:solidFill>
+                  <a:srgbClr val="536A7A"/>
+                </a:solidFill>
+                <a:latin typeface="Noto Sans CJK SC" pitchFamily="34" charset="0"/>
+                <a:ea typeface="Noto Sans CJK SC" pitchFamily="34" charset="-122"/>
+                <a:cs typeface="Noto Sans CJK SC" pitchFamily="34" charset="-120"/>
+              </a:rPr>
+              <a:t>输入</a:t>
+            </a:r>
+            <a:endParaRPr lang="zh-CN" sz="1950" dirty="0"/>
+          </a:p>
+          <a:p>
+            <a:pPr algn="l" indent="0" marL="0">
+              <a:lnSpc>
+                <a:spcPts val="2242"/>
+              </a:lnSpc>
+              <a:buNone/>
+            </a:pPr>
+            <a:r>
+              <a:rPr lang="zh-CN" altLang="en-US" sz="1950" b="1" dirty="0">
+                <a:solidFill>
+                  <a:srgbClr val="536A7A"/>
+                </a:solidFill>
+                <a:latin typeface="Noto Sans CJK SC" pitchFamily="34" charset="0"/>
+                <a:ea typeface="Noto Sans CJK SC" pitchFamily="34" charset="-122"/>
+                <a:cs typeface="Noto Sans CJK SC" pitchFamily="34" charset="-120"/>
+              </a:rPr>
+              <a:t>单位</a:t>
+            </a:r>
+            <a:endParaRPr lang="zh-CN" sz="1950" dirty="0"/>
+          </a:p>
+        </p:txBody>
+      </p:sp>
+      <p:sp>
+        <p:nvSpPr>
+          <p:cNvPr id="34" name="T10/card/region-1/body"/>
+          <p:cNvSpPr/>
+          <p:nvPr/>
+        </p:nvSpPr>
+        <p:spPr>
+          <a:xfrm>
+            <a:off x="1639633" y="3642932"/>
+            <a:ext cx="2141792" cy="2121122"/>
+          </a:xfrm>
+          <a:prstGeom prst="rect">
+            <a:avLst/>
+          </a:prstGeom>
+          <a:noFill/>
+          <a:ln/>
+        </p:spPr>
+        <p:txBody>
+          <a:bodyPr wrap="none" lIns="0" tIns="0" rIns="0" bIns="0" rtlCol="0" anchor="t"/>
+          <a:lstStyle/>
+          <a:p>
+            <a:pPr algn="l" indent="0" marL="0">
+              <a:lnSpc>
+                <a:spcPts val="2232"/>
+              </a:lnSpc>
+              <a:buNone/>
+            </a:pPr>
+            <a:r>
+              <a:rPr lang="zh-CN" altLang="en-US" sz="1800" dirty="0">
+                <a:solidFill>
+                  <a:srgbClr val="1C2430"/>
+                </a:solidFill>
+                <a:latin typeface="Noto Sans CJK SC" pitchFamily="34" charset="0"/>
+                <a:ea typeface="Noto Sans CJK SC" pitchFamily="34" charset="-122"/>
+                <a:cs typeface="Noto Sans CJK SC" pitchFamily="34" charset="-120"/>
+              </a:rPr>
+              <a:t>列出观测与管理</a:t>
+            </a:r>
+            <a:pPr algn="l" indent="0" marL="0">
+              <a:lnSpc>
+                <a:spcPts val="2232"/>
               </a:lnSpc>
               <a:buNone/>
             </a:pPr>
             <a:r>
               <a:rPr lang="zh-CN" altLang="en-US" sz="1800" b="1" dirty="0">
                 <a:solidFill>
-                  <a:srgbClr val="173C70"/>
-                </a:solidFill>
-                <a:latin typeface="Noto Sans CJK SC" pitchFamily="34" charset="0"/>
-                <a:ea typeface="Noto Sans CJK SC" pitchFamily="34" charset="-122"/>
-                <a:cs typeface="Noto Sans CJK SC" pitchFamily="34" charset="-120"/>
-              </a:rPr>
-              <a:t>输入与单位</a:t>
+                  <a:srgbClr val="536A7A"/>
+                </a:solidFill>
+                <a:latin typeface="Noto Sans CJK SC" pitchFamily="34" charset="0"/>
+                <a:ea typeface="Noto Sans CJK SC" pitchFamily="34" charset="-122"/>
+                <a:cs typeface="Noto Sans CJK SC" pitchFamily="34" charset="-120"/>
+              </a:rPr>
+              <a:t>输入</a:t>
             </a:r>
             <a:endParaRPr lang="zh-CN" sz="1800" dirty="0"/>
           </a:p>
-        </p:txBody>
-      </p:sp>
-      <p:sp>
-        <p:nvSpPr>
-          <p:cNvPr id="33" name="T10/card/region-1/body"/>
-          <p:cNvSpPr/>
-          <p:nvPr/>
-        </p:nvSpPr>
-        <p:spPr>
-          <a:xfrm>
-            <a:off x="609600" y="4000500"/>
-            <a:ext cx="3333750" cy="1866900"/>
-          </a:xfrm>
-          <a:prstGeom prst="rect">
-            <a:avLst/>
-          </a:prstGeom>
-          <a:noFill/>
-          <a:ln/>
-        </p:spPr>
-        <p:txBody>
-          <a:bodyPr wrap="none" lIns="0" tIns="0" rIns="0" bIns="0" rtlCol="0" anchor="t"/>
-          <a:lstStyle/>
-          <a:p>
-            <a:pPr algn="l" indent="0" marL="0">
-              <a:lnSpc>
-                <a:spcPts val="2139"/>
-              </a:lnSpc>
-              <a:buNone/>
-            </a:pPr>
-            <a:r>
-              <a:rPr lang="zh-CN" altLang="en-US" sz="1725" dirty="0">
+          <a:p>
+            <a:pPr algn="l" indent="0" marL="0">
+              <a:lnSpc>
+                <a:spcPts val="2232"/>
+              </a:lnSpc>
+              <a:buNone/>
+            </a:pPr>
+            <a:r>
+              <a:rPr lang="zh-CN" altLang="en-US" sz="1800" dirty="0">
                 <a:solidFill>
                   <a:srgbClr val="1C2430"/>
                 </a:solidFill>
@@ -6905,19 +7370,33 @@
                 <a:ea typeface="Noto Sans CJK SC" pitchFamily="34" charset="-122"/>
                 <a:cs typeface="Noto Sans CJK SC" pitchFamily="34" charset="-120"/>
               </a:rPr>
-              <a:t>同化观测、气象与管理输入</a:t>
-            </a:r>
-            <a:endParaRPr lang="zh-CN" sz="1725" dirty="0"/>
-          </a:p>
-          <a:p>
-            <a:pPr algn="l" indent="0" marL="0">
-              <a:lnSpc>
-                <a:spcPts val="2139"/>
-              </a:lnSpc>
-              <a:buNone/>
-            </a:pPr>
-            <a:r>
-              <a:rPr lang="zh-CN" altLang="en-US" sz="1725" dirty="0">
+              <a:t>核对物理量</a:t>
+            </a:r>
+            <a:pPr algn="l" indent="0" marL="0">
+              <a:lnSpc>
+                <a:spcPts val="2232"/>
+              </a:lnSpc>
+              <a:buNone/>
+            </a:pPr>
+            <a:r>
+              <a:rPr lang="zh-CN" altLang="en-US" sz="1800" b="1" dirty="0">
+                <a:solidFill>
+                  <a:srgbClr val="536A7A"/>
+                </a:solidFill>
+                <a:latin typeface="Noto Sans CJK SC" pitchFamily="34" charset="0"/>
+                <a:ea typeface="Noto Sans CJK SC" pitchFamily="34" charset="-122"/>
+                <a:cs typeface="Noto Sans CJK SC" pitchFamily="34" charset="-120"/>
+              </a:rPr>
+              <a:t>单位</a:t>
+            </a:r>
+            <a:pPr algn="l" indent="0" marL="0">
+              <a:lnSpc>
+                <a:spcPts val="2232"/>
+              </a:lnSpc>
+              <a:buNone/>
+            </a:pPr>
+            <a:r>
+              <a:rPr lang="zh-CN" altLang="en-US" sz="1800" dirty="0">
                 <a:solidFill>
                   <a:srgbClr val="1C2430"/>
                 </a:solidFill>
@@ -6925,19 +7404,19 @@
                 <a:ea typeface="Noto Sans CJK SC" pitchFamily="34" charset="-122"/>
                 <a:cs typeface="Noto Sans CJK SC" pitchFamily="34" charset="-120"/>
               </a:rPr>
-              <a:t>逐项保留物理量单位和时间步</a:t>
-            </a:r>
-            <a:endParaRPr lang="zh-CN" sz="1725" dirty="0"/>
-          </a:p>
-          <a:p>
-            <a:pPr algn="l" indent="0" marL="0">
-              <a:lnSpc>
-                <a:spcPts val="2139"/>
-              </a:lnSpc>
-              <a:buNone/>
-            </a:pPr>
-            <a:r>
-              <a:rPr lang="zh-CN" altLang="en-US" sz="1725" dirty="0">
+              <a:t>与时</a:t>
+            </a:r>
+            <a:endParaRPr lang="zh-CN" sz="1800" dirty="0"/>
+          </a:p>
+          <a:p>
+            <a:pPr algn="l" indent="0" marL="0">
+              <a:lnSpc>
+                <a:spcPts val="2232"/>
+              </a:lnSpc>
+              <a:buNone/>
+            </a:pPr>
+            <a:r>
+              <a:rPr lang="zh-CN" altLang="en-US" sz="1800" dirty="0">
                 <a:solidFill>
                   <a:srgbClr val="1C2430"/>
                 </a:solidFill>
@@ -6945,22 +7424,62 @@
                 <a:ea typeface="Noto Sans CJK SC" pitchFamily="34" charset="-122"/>
                 <a:cs typeface="Noto Sans CJK SC" pitchFamily="34" charset="-120"/>
               </a:rPr>
-              <a:t>说明缺失或预测数据的来源</a:t>
-            </a:r>
-            <a:endParaRPr lang="zh-CN" sz="1725" dirty="0"/>
-          </a:p>
-        </p:txBody>
-      </p:sp>
-      <p:sp>
-        <p:nvSpPr>
-          <p:cNvPr id="34" name="T10/card/region-2/frame"/>
-          <p:cNvSpPr/>
-          <p:nvPr/>
-        </p:nvSpPr>
-        <p:spPr>
-          <a:xfrm>
-            <a:off x="4210050" y="3562350"/>
-            <a:ext cx="3505200" cy="2400300"/>
+              <a:t>间步</a:t>
+            </a:r>
+            <a:endParaRPr lang="zh-CN" sz="1800" dirty="0"/>
+          </a:p>
+          <a:p>
+            <a:pPr algn="l" indent="0" marL="0">
+              <a:lnSpc>
+                <a:spcPts val="2232"/>
+              </a:lnSpc>
+              <a:buNone/>
+            </a:pPr>
+            <a:r>
+              <a:rPr lang="zh-CN" altLang="en-US" sz="1800" dirty="0">
+                <a:solidFill>
+                  <a:srgbClr val="1C2430"/>
+                </a:solidFill>
+                <a:latin typeface="Noto Sans CJK SC" pitchFamily="34" charset="0"/>
+                <a:ea typeface="Noto Sans CJK SC" pitchFamily="34" charset="-122"/>
+                <a:cs typeface="Noto Sans CJK SC" pitchFamily="34" charset="-120"/>
+              </a:rPr>
+              <a:t>保留缺失或预测数据</a:t>
+            </a:r>
+            <a:endParaRPr lang="zh-CN" sz="1800" dirty="0"/>
+          </a:p>
+          <a:p>
+            <a:pPr algn="l" indent="0" marL="0">
+              <a:lnSpc>
+                <a:spcPts val="2232"/>
+              </a:lnSpc>
+              <a:buNone/>
+            </a:pPr>
+            <a:r>
+              <a:rPr lang="zh-CN" altLang="en-US" sz="1800" dirty="0">
+                <a:solidFill>
+                  <a:srgbClr val="1C2430"/>
+                </a:solidFill>
+                <a:latin typeface="Noto Sans CJK SC" pitchFamily="34" charset="0"/>
+                <a:ea typeface="Noto Sans CJK SC" pitchFamily="34" charset="-122"/>
+                <a:cs typeface="Noto Sans CJK SC" pitchFamily="34" charset="-120"/>
+              </a:rPr>
+              <a:t>的来源</a:t>
+            </a:r>
+            <a:endParaRPr lang="zh-CN" sz="1800" dirty="0"/>
+          </a:p>
+        </p:txBody>
+      </p:sp>
+      <p:sp>
+        <p:nvSpPr>
+          <p:cNvPr id="35" name="T10/card/region-2/frame"/>
+          <p:cNvSpPr/>
+          <p:nvPr/>
+        </p:nvSpPr>
+        <p:spPr>
+          <a:xfrm>
+            <a:off x="4210050" y="3461956"/>
+            <a:ext cx="3505200" cy="2492597"/>
           </a:xfrm>
           <a:prstGeom prst="rect">
             <a:avLst/>
@@ -6978,20 +7497,20 @@
       </p:sp>
       <p:sp>
         <p:nvSpPr>
-          <p:cNvPr id="35" name="T10/card/region-2/heading-fill"/>
-          <p:cNvSpPr/>
-          <p:nvPr/>
-        </p:nvSpPr>
-        <p:spPr>
-          <a:xfrm>
-            <a:off x="4219575" y="3571875"/>
+          <p:cNvPr id="36" name="T10/card/region-2/heading-fill"/>
+          <p:cNvSpPr/>
+          <p:nvPr/>
+        </p:nvSpPr>
+        <p:spPr>
+          <a:xfrm>
+            <a:off x="4219575" y="3471482"/>
             <a:ext cx="3486150" cy="371475"/>
           </a:xfrm>
           <a:prstGeom prst="rect">
             <a:avLst/>
           </a:prstGeom>
           <a:solidFill>
-            <a:srgbClr val="EEF3F8"/>
+            <a:srgbClr val="EAF2FA"/>
           </a:solidFill>
           <a:ln w="12700">
             <a:solidFill>
@@ -7005,13 +7524,13 @@
       </p:sp>
       <p:sp>
         <p:nvSpPr>
-          <p:cNvPr id="36" name="T10/card/region-2/heading-rule"/>
-          <p:cNvSpPr/>
-          <p:nvPr/>
-        </p:nvSpPr>
-        <p:spPr>
-          <a:xfrm>
-            <a:off x="4210050" y="3943350"/>
+          <p:cNvPr id="37" name="T10/card/region-2/heading-rule"/>
+          <p:cNvSpPr/>
+          <p:nvPr/>
+        </p:nvSpPr>
+        <p:spPr>
+          <a:xfrm>
+            <a:off x="4210050" y="3842956"/>
             <a:ext cx="3505200" cy="0"/>
           </a:xfrm>
           <a:prstGeom prst="line">
@@ -7028,14 +7547,14 @@
       </p:sp>
       <p:sp>
         <p:nvSpPr>
-          <p:cNvPr id="37" name="T10/card/region-2/title"/>
-          <p:cNvSpPr/>
-          <p:nvPr/>
-        </p:nvSpPr>
-        <p:spPr>
-          <a:xfrm>
-            <a:off x="4333875" y="3619500"/>
-            <a:ext cx="3257550" cy="276225"/>
+          <p:cNvPr id="38" name="T10/card/region-2/title"/>
+          <p:cNvSpPr/>
+          <p:nvPr/>
+        </p:nvSpPr>
+        <p:spPr>
+          <a:xfrm>
+            <a:off x="4333875" y="3509582"/>
+            <a:ext cx="3257550" cy="295275"/>
           </a:xfrm>
           <a:prstGeom prst="rect">
             <a:avLst/>
@@ -7049,54 +7568,91 @@
           <a:p>
             <a:pPr algn="l" indent="0" marL="0">
               <a:lnSpc>
-                <a:spcPts val="2070"/>
+                <a:spcPts val="2242"/>
+              </a:lnSpc>
+              <a:buNone/>
+            </a:pPr>
+            <a:r>
+              <a:rPr lang="zh-CN" altLang="en-US" sz="1950" b="1" dirty="0">
+                <a:solidFill>
+                  <a:srgbClr val="235E96"/>
+                </a:solidFill>
+                <a:latin typeface="Noto Sans CJK SC" pitchFamily="34" charset="0"/>
+                <a:ea typeface="Noto Sans CJK SC" pitchFamily="34" charset="-122"/>
+                <a:cs typeface="Noto Sans CJK SC" pitchFamily="34" charset="-120"/>
+              </a:rPr>
+              <a:t>校准与验证</a:t>
+            </a:r>
+            <a:endParaRPr lang="zh-CN" sz="1950" dirty="0"/>
+          </a:p>
+        </p:txBody>
+      </p:sp>
+      <p:sp>
+        <p:nvSpPr>
+          <p:cNvPr id="39" name="T10/card/region-2/body"/>
+          <p:cNvSpPr/>
+          <p:nvPr/>
+        </p:nvSpPr>
+        <p:spPr>
+          <a:xfrm>
+            <a:off x="4343400" y="3947732"/>
+            <a:ext cx="3238500" cy="1911572"/>
+          </a:xfrm>
+          <a:prstGeom prst="rect">
+            <a:avLst/>
+          </a:prstGeom>
+          <a:noFill/>
+          <a:ln/>
+        </p:spPr>
+        <p:txBody>
+          <a:bodyPr wrap="none" lIns="0" tIns="0" rIns="0" bIns="0" rtlCol="0" anchor="t"/>
+          <a:lstStyle/>
+          <a:p>
+            <a:pPr algn="l" indent="0" marL="0">
+              <a:lnSpc>
+                <a:spcPts val="2232"/>
+              </a:lnSpc>
+              <a:buNone/>
+            </a:pPr>
+            <a:r>
+              <a:rPr lang="zh-CN" altLang="en-US" sz="1800" dirty="0">
+                <a:solidFill>
+                  <a:srgbClr val="1C2430"/>
+                </a:solidFill>
+                <a:latin typeface="Noto Sans CJK SC" pitchFamily="34" charset="0"/>
+                <a:ea typeface="Noto Sans CJK SC" pitchFamily="34" charset="-122"/>
+                <a:cs typeface="Noto Sans CJK SC" pitchFamily="34" charset="-120"/>
+              </a:rPr>
+              <a:t>区分参数校准与</a:t>
+            </a:r>
+            <a:pPr algn="l" indent="0" marL="0">
+              <a:lnSpc>
+                <a:spcPts val="2232"/>
               </a:lnSpc>
               <a:buNone/>
             </a:pPr>
             <a:r>
               <a:rPr lang="zh-CN" altLang="en-US" sz="1800" b="1" dirty="0">
                 <a:solidFill>
-                  <a:srgbClr val="173C70"/>
-                </a:solidFill>
-                <a:latin typeface="Noto Sans CJK SC" pitchFamily="34" charset="0"/>
-                <a:ea typeface="Noto Sans CJK SC" pitchFamily="34" charset="-122"/>
-                <a:cs typeface="Noto Sans CJK SC" pitchFamily="34" charset="-120"/>
-              </a:rPr>
-              <a:t>校准与验证</a:t>
+                  <a:srgbClr val="235E96"/>
+                </a:solidFill>
+                <a:latin typeface="Noto Sans CJK SC" pitchFamily="34" charset="0"/>
+                <a:ea typeface="Noto Sans CJK SC" pitchFamily="34" charset="-122"/>
+                <a:cs typeface="Noto Sans CJK SC" pitchFamily="34" charset="-120"/>
+              </a:rPr>
+              <a:t>独立验证</a:t>
             </a:r>
             <a:endParaRPr lang="zh-CN" sz="1800" dirty="0"/>
           </a:p>
-        </p:txBody>
-      </p:sp>
-      <p:sp>
-        <p:nvSpPr>
-          <p:cNvPr id="38" name="T10/card/region-2/body"/>
-          <p:cNvSpPr/>
-          <p:nvPr/>
-        </p:nvSpPr>
-        <p:spPr>
-          <a:xfrm>
-            <a:off x="4343400" y="4057650"/>
-            <a:ext cx="3238500" cy="1809750"/>
-          </a:xfrm>
-          <a:prstGeom prst="rect">
-            <a:avLst/>
-          </a:prstGeom>
-          <a:noFill/>
-          <a:ln/>
-        </p:spPr>
-        <p:txBody>
-          <a:bodyPr wrap="none" lIns="0" tIns="0" rIns="0" bIns="0" rtlCol="0" anchor="t"/>
-          <a:lstStyle/>
-          <a:p>
-            <a:pPr algn="l" indent="0" marL="0">
-              <a:lnSpc>
-                <a:spcPts val="2139"/>
-              </a:lnSpc>
-              <a:buNone/>
-            </a:pPr>
-            <a:r>
-              <a:rPr lang="zh-CN" altLang="en-US" sz="1725" dirty="0">
+          <a:p>
+            <a:pPr algn="l" indent="0" marL="0">
+              <a:lnSpc>
+                <a:spcPts val="2232"/>
+              </a:lnSpc>
+              <a:buNone/>
+            </a:pPr>
+            <a:r>
+              <a:rPr lang="zh-CN" altLang="en-US" sz="1800" dirty="0">
                 <a:solidFill>
                   <a:srgbClr val="1C2430"/>
                 </a:solidFill>
@@ -7104,19 +7660,19 @@
                 <a:ea typeface="Noto Sans CJK SC" pitchFamily="34" charset="-122"/>
                 <a:cs typeface="Noto Sans CJK SC" pitchFamily="34" charset="-120"/>
               </a:rPr>
-              <a:t>区分参数校准与独立验证</a:t>
-            </a:r>
-            <a:endParaRPr lang="zh-CN" sz="1725" dirty="0"/>
-          </a:p>
-          <a:p>
-            <a:pPr algn="l" indent="0" marL="0">
-              <a:lnSpc>
-                <a:spcPts val="2139"/>
-              </a:lnSpc>
-              <a:buNone/>
-            </a:pPr>
-            <a:r>
-              <a:rPr lang="zh-CN" altLang="en-US" sz="1725" dirty="0">
+              <a:t>报告校准范围与留出环境</a:t>
+            </a:r>
+            <a:endParaRPr lang="zh-CN" sz="1800" dirty="0"/>
+          </a:p>
+          <a:p>
+            <a:pPr algn="l" indent="0" marL="0">
+              <a:lnSpc>
+                <a:spcPts val="2232"/>
+              </a:lnSpc>
+              <a:buNone/>
+            </a:pPr>
+            <a:r>
+              <a:rPr lang="zh-CN" altLang="en-US" sz="1800" dirty="0">
                 <a:solidFill>
                   <a:srgbClr val="1C2430"/>
                 </a:solidFill>
@@ -7124,42 +7680,22 @@
                 <a:ea typeface="Noto Sans CJK SC" pitchFamily="34" charset="-122"/>
                 <a:cs typeface="Noto Sans CJK SC" pitchFamily="34" charset="-120"/>
               </a:rPr>
-              <a:t>报告校准范围与留出环境</a:t>
-            </a:r>
-            <a:endParaRPr lang="zh-CN" sz="1725" dirty="0"/>
-          </a:p>
-          <a:p>
-            <a:pPr algn="l" indent="0" marL="0">
-              <a:lnSpc>
-                <a:spcPts val="2139"/>
-              </a:lnSpc>
-              <a:buNone/>
-            </a:pPr>
-            <a:r>
-              <a:rPr lang="zh-CN" altLang="en-US" sz="1725" dirty="0">
-                <a:solidFill>
-                  <a:srgbClr val="1C2430"/>
-                </a:solidFill>
-                <a:latin typeface="Noto Sans CJK SC" pitchFamily="34" charset="0"/>
-                <a:ea typeface="Noto Sans CJK SC" pitchFamily="34" charset="-122"/>
-                <a:cs typeface="Noto Sans CJK SC" pitchFamily="34" charset="-120"/>
-              </a:rPr>
               <a:t>与观测比较误差而非只看拟合</a:t>
             </a:r>
-            <a:endParaRPr lang="zh-CN" sz="1725" dirty="0"/>
-          </a:p>
-        </p:txBody>
-      </p:sp>
-      <p:sp>
-        <p:nvSpPr>
-          <p:cNvPr id="39" name="T10/card/region-3/frame"/>
-          <p:cNvSpPr/>
-          <p:nvPr/>
-        </p:nvSpPr>
-        <p:spPr>
-          <a:xfrm>
-            <a:off x="7981950" y="3676650"/>
-            <a:ext cx="3752850" cy="2286000"/>
+            <a:endParaRPr lang="zh-CN" sz="1800" dirty="0"/>
+          </a:p>
+        </p:txBody>
+      </p:sp>
+      <p:sp>
+        <p:nvSpPr>
+          <p:cNvPr id="40" name="T10/card/region-3/frame"/>
+          <p:cNvSpPr/>
+          <p:nvPr/>
+        </p:nvSpPr>
+        <p:spPr>
+          <a:xfrm>
+            <a:off x="7981950" y="3576256"/>
+            <a:ext cx="3752850" cy="2378297"/>
           </a:xfrm>
           <a:prstGeom prst="rect">
             <a:avLst/>
@@ -7177,20 +7713,20 @@
       </p:sp>
       <p:sp>
         <p:nvSpPr>
-          <p:cNvPr id="40" name="T10/card/region-3/tab"/>
-          <p:cNvSpPr/>
-          <p:nvPr/>
-        </p:nvSpPr>
-        <p:spPr>
-          <a:xfrm>
-            <a:off x="8096250" y="3562350"/>
-            <a:ext cx="1181100" cy="320040"/>
+          <p:cNvPr id="41" name="T10/card/region-3/tab"/>
+          <p:cNvSpPr/>
+          <p:nvPr/>
+        </p:nvSpPr>
+        <p:spPr>
+          <a:xfrm>
+            <a:off x="8096250" y="3461956"/>
+            <a:ext cx="1257300" cy="342900"/>
           </a:xfrm>
           <a:prstGeom prst="rect">
             <a:avLst/>
           </a:prstGeom>
           <a:solidFill>
-            <a:srgbClr val="173C70"/>
+            <a:srgbClr val="235E96"/>
           </a:solidFill>
           <a:ln w="12700">
             <a:solidFill>
@@ -7204,14 +7740,14 @@
       </p:sp>
       <p:sp>
         <p:nvSpPr>
-          <p:cNvPr id="41" name="T10/card/region-3/title"/>
-          <p:cNvSpPr/>
-          <p:nvPr/>
-        </p:nvSpPr>
-        <p:spPr>
-          <a:xfrm>
-            <a:off x="8201025" y="3590925"/>
-            <a:ext cx="971550" cy="262890"/>
+          <p:cNvPr id="42" name="T10/card/region-3/title"/>
+          <p:cNvSpPr/>
+          <p:nvPr/>
+        </p:nvSpPr>
+        <p:spPr>
+          <a:xfrm>
+            <a:off x="8201025" y="3490531"/>
+            <a:ext cx="1047750" cy="285750"/>
           </a:xfrm>
           <a:prstGeom prst="rect">
             <a:avLst/>
@@ -7225,54 +7761,91 @@
           <a:p>
             <a:pPr algn="l" indent="0" marL="0">
               <a:lnSpc>
-                <a:spcPts val="2070"/>
+                <a:spcPts val="2242"/>
+              </a:lnSpc>
+              <a:buNone/>
+            </a:pPr>
+            <a:r>
+              <a:rPr lang="zh-CN" altLang="en-US" sz="1950" b="1" dirty="0">
+                <a:solidFill>
+                  <a:srgbClr val="FFFFFF"/>
+                </a:solidFill>
+                <a:latin typeface="Noto Sans CJK SC" pitchFamily="34" charset="0"/>
+                <a:ea typeface="Noto Sans CJK SC" pitchFamily="34" charset="-122"/>
+                <a:cs typeface="Noto Sans CJK SC" pitchFamily="34" charset="-120"/>
+              </a:rPr>
+              <a:t>模型失配</a:t>
+            </a:r>
+            <a:endParaRPr lang="zh-CN" sz="1950" dirty="0"/>
+          </a:p>
+        </p:txBody>
+      </p:sp>
+      <p:sp>
+        <p:nvSpPr>
+          <p:cNvPr id="43" name="T10/card/region-3/body"/>
+          <p:cNvSpPr/>
+          <p:nvPr/>
+        </p:nvSpPr>
+        <p:spPr>
+          <a:xfrm>
+            <a:off x="8115300" y="3947732"/>
+            <a:ext cx="3486150" cy="1911572"/>
+          </a:xfrm>
+          <a:prstGeom prst="rect">
+            <a:avLst/>
+          </a:prstGeom>
+          <a:noFill/>
+          <a:ln/>
+        </p:spPr>
+        <p:txBody>
+          <a:bodyPr wrap="none" lIns="0" tIns="0" rIns="0" bIns="0" rtlCol="0" anchor="t"/>
+          <a:lstStyle/>
+          <a:p>
+            <a:pPr algn="l" indent="0" marL="0">
+              <a:lnSpc>
+                <a:spcPts val="2232"/>
+              </a:lnSpc>
+              <a:buNone/>
+            </a:pPr>
+            <a:r>
+              <a:rPr lang="zh-CN" altLang="en-US" sz="1800" dirty="0">
+                <a:solidFill>
+                  <a:srgbClr val="1C2430"/>
+                </a:solidFill>
+                <a:latin typeface="Noto Sans CJK SC" pitchFamily="34" charset="0"/>
+                <a:ea typeface="Noto Sans CJK SC" pitchFamily="34" charset="-122"/>
+                <a:cs typeface="Noto Sans CJK SC" pitchFamily="34" charset="-120"/>
+              </a:rPr>
+              <a:t>列出结构误差与参数</a:t>
+            </a:r>
+            <a:pPr algn="l" indent="0" marL="0">
+              <a:lnSpc>
+                <a:spcPts val="2232"/>
               </a:lnSpc>
               <a:buNone/>
             </a:pPr>
             <a:r>
               <a:rPr lang="zh-CN" altLang="en-US" sz="1800" b="1" dirty="0">
                 <a:solidFill>
-                  <a:srgbClr val="FFFFFF"/>
-                </a:solidFill>
-                <a:latin typeface="Noto Sans CJK SC" pitchFamily="34" charset="0"/>
-                <a:ea typeface="Noto Sans CJK SC" pitchFamily="34" charset="-122"/>
-                <a:cs typeface="Noto Sans CJK SC" pitchFamily="34" charset="-120"/>
-              </a:rPr>
-              <a:t>模型失配</a:t>
+                  <a:srgbClr val="235E96"/>
+                </a:solidFill>
+                <a:latin typeface="Noto Sans CJK SC" pitchFamily="34" charset="0"/>
+                <a:ea typeface="Noto Sans CJK SC" pitchFamily="34" charset="-122"/>
+                <a:cs typeface="Noto Sans CJK SC" pitchFamily="34" charset="-120"/>
+              </a:rPr>
+              <a:t>不确定性</a:t>
             </a:r>
             <a:endParaRPr lang="zh-CN" sz="1800" dirty="0"/>
           </a:p>
-        </p:txBody>
-      </p:sp>
-      <p:sp>
-        <p:nvSpPr>
-          <p:cNvPr id="42" name="T10/card/region-3/body"/>
-          <p:cNvSpPr/>
-          <p:nvPr/>
-        </p:nvSpPr>
-        <p:spPr>
-          <a:xfrm>
-            <a:off x="8115300" y="4025265"/>
-            <a:ext cx="3486150" cy="1842135"/>
-          </a:xfrm>
-          <a:prstGeom prst="rect">
-            <a:avLst/>
-          </a:prstGeom>
-          <a:noFill/>
-          <a:ln/>
-        </p:spPr>
-        <p:txBody>
-          <a:bodyPr wrap="none" lIns="0" tIns="0" rIns="0" bIns="0" rtlCol="0" anchor="t"/>
-          <a:lstStyle/>
-          <a:p>
-            <a:pPr algn="l" indent="0" marL="0">
-              <a:lnSpc>
-                <a:spcPts val="2139"/>
-              </a:lnSpc>
-              <a:buNone/>
-            </a:pPr>
-            <a:r>
-              <a:rPr lang="zh-CN" altLang="en-US" sz="1725" dirty="0">
+          <a:p>
+            <a:pPr algn="l" indent="0" marL="0">
+              <a:lnSpc>
+                <a:spcPts val="2232"/>
+              </a:lnSpc>
+              <a:buNone/>
+            </a:pPr>
+            <a:r>
+              <a:rPr lang="zh-CN" altLang="en-US" sz="1800" dirty="0">
                 <a:solidFill>
                   <a:srgbClr val="1C2430"/>
                 </a:solidFill>
@@ -7280,19 +7853,19 @@
                 <a:ea typeface="Noto Sans CJK SC" pitchFamily="34" charset="-122"/>
                 <a:cs typeface="Noto Sans CJK SC" pitchFamily="34" charset="-120"/>
               </a:rPr>
-              <a:t>列出结构误差与参数不确定性</a:t>
-            </a:r>
-            <a:endParaRPr lang="zh-CN" sz="1725" dirty="0"/>
-          </a:p>
-          <a:p>
-            <a:pPr algn="l" indent="0" marL="0">
-              <a:lnSpc>
-                <a:spcPts val="2139"/>
-              </a:lnSpc>
-              <a:buNone/>
-            </a:pPr>
-            <a:r>
-              <a:rPr lang="zh-CN" altLang="en-US" sz="1725" dirty="0">
+              <a:t>说明误差如何影响优化或策略</a:t>
+            </a:r>
+            <a:endParaRPr lang="zh-CN" sz="1800" dirty="0"/>
+          </a:p>
+          <a:p>
+            <a:pPr algn="l" indent="0" marL="0">
+              <a:lnSpc>
+                <a:spcPts val="2232"/>
+              </a:lnSpc>
+              <a:buNone/>
+            </a:pPr>
+            <a:r>
+              <a:rPr lang="zh-CN" altLang="en-US" sz="1800" dirty="0">
                 <a:solidFill>
                   <a:srgbClr val="1C2430"/>
                 </a:solidFill>
@@ -7300,35 +7873,15 @@
                 <a:ea typeface="Noto Sans CJK SC" pitchFamily="34" charset="-122"/>
                 <a:cs typeface="Noto Sans CJK SC" pitchFamily="34" charset="-120"/>
               </a:rPr>
-              <a:t>说明误差如何影响优化或策略</a:t>
-            </a:r>
-            <a:endParaRPr lang="zh-CN" sz="1725" dirty="0"/>
-          </a:p>
-          <a:p>
-            <a:pPr algn="l" indent="0" marL="0">
-              <a:lnSpc>
-                <a:spcPts val="2139"/>
-              </a:lnSpc>
-              <a:buNone/>
-            </a:pPr>
-            <a:r>
-              <a:rPr lang="zh-CN" altLang="en-US" sz="1725" dirty="0">
-                <a:solidFill>
-                  <a:srgbClr val="1C2430"/>
-                </a:solidFill>
-                <a:latin typeface="Noto Sans CJK SC" pitchFamily="34" charset="0"/>
-                <a:ea typeface="Noto Sans CJK SC" pitchFamily="34" charset="-122"/>
-                <a:cs typeface="Noto Sans CJK SC" pitchFamily="34" charset="-120"/>
-              </a:rPr>
               <a:t>补充越界状态的处理规则</a:t>
             </a:r>
-            <a:endParaRPr lang="zh-CN" sz="1725" dirty="0"/>
-          </a:p>
-        </p:txBody>
-      </p:sp>
-      <p:sp>
-        <p:nvSpPr>
-          <p:cNvPr id="43" name="T10/sources"/>
+            <a:endParaRPr lang="zh-CN" sz="1800" dirty="0"/>
+          </a:p>
+        </p:txBody>
+      </p:sp>
+      <p:sp>
+        <p:nvSpPr>
+          <p:cNvPr id="44" name="T10/sources"/>
           <p:cNvSpPr/>
           <p:nvPr/>
         </p:nvSpPr>
@@ -7362,7 +7915,7 @@
                 <a:ea typeface="Noto Sans CJK SC" pitchFamily="34" charset="-122"/>
                 <a:cs typeface="Noto Sans CJK SC" pitchFamily="34" charset="-120"/>
               </a:rPr>
-              <a:t>T1 · 2026 · 待替换</a:t>
+              <a:t>T1 · 2026 · 书目占位；图表均为合成示例</a:t>
             </a:r>
             <a:endParaRPr lang="zh-CN" sz="1125" dirty="0"/>
           </a:p>
@@ -7471,14 +8024,14 @@
       </p:sp>
       <p:sp>
         <p:nvSpPr>
-          <p:cNvPr id="4" name="T11/kicker"/>
-          <p:cNvSpPr/>
-          <p:nvPr/>
-        </p:nvSpPr>
-        <p:spPr>
-          <a:xfrm>
-            <a:off x="457200" y="152400"/>
-            <a:ext cx="11277600" cy="190500"/>
+          <p:cNvPr id="4" name="T11/title"/>
+          <p:cNvSpPr/>
+          <p:nvPr/>
+        </p:nvSpPr>
+        <p:spPr>
+          <a:xfrm>
+            <a:off x="457200" y="209550"/>
+            <a:ext cx="11277600" cy="438150"/>
           </a:xfrm>
           <a:prstGeom prst="rect">
             <a:avLst/>
@@ -7492,54 +8045,12 @@
           <a:p>
             <a:pPr algn="l" indent="0" marL="0">
               <a:lnSpc>
-                <a:spcPts val="1320"/>
-              </a:lnSpc>
-              <a:buNone/>
-            </a:pPr>
-            <a:r>
-              <a:rPr lang="zh-CN" altLang="en-US" sz="1200" dirty="0">
-                <a:solidFill>
-                  <a:srgbClr val="515B68"/>
-                </a:solidFill>
-                <a:latin typeface="Noto Sans CJK SC" pitchFamily="34" charset="0"/>
-                <a:ea typeface="Noto Sans CJK SC" pitchFamily="34" charset="-122"/>
-                <a:cs typeface="Noto Sans CJK SC" pitchFamily="34" charset="-120"/>
-              </a:rPr>
-              <a:t>结构模板 / 占位说明与合成数据</a:t>
-            </a:r>
-            <a:endParaRPr lang="zh-CN" sz="1200" dirty="0"/>
-          </a:p>
-        </p:txBody>
-      </p:sp>
-      <p:sp>
-        <p:nvSpPr>
-          <p:cNvPr id="5" name="T11/title"/>
-          <p:cNvSpPr/>
-          <p:nvPr/>
-        </p:nvSpPr>
-        <p:spPr>
-          <a:xfrm>
-            <a:off x="457200" y="381000"/>
-            <a:ext cx="11277600" cy="400050"/>
-          </a:xfrm>
-          <a:prstGeom prst="rect">
-            <a:avLst/>
-          </a:prstGeom>
-          <a:noFill/>
-          <a:ln/>
-        </p:spPr>
-        <p:txBody>
-          <a:bodyPr wrap="none" lIns="0" tIns="0" rIns="0" bIns="0" rtlCol="0" anchor="t"/>
-          <a:lstStyle/>
-          <a:p>
-            <a:pPr algn="l" indent="0" marL="0">
-              <a:lnSpc>
-                <a:spcPts val="2856"/>
-              </a:lnSpc>
-              <a:buNone/>
-            </a:pPr>
-            <a:r>
-              <a:rPr lang="zh-CN" altLang="en-US" sz="2550" b="1" dirty="0">
+                <a:spcPts val="3360"/>
+              </a:lnSpc>
+              <a:buNone/>
+            </a:pPr>
+            <a:r>
+              <a:rPr lang="zh-CN" altLang="en-US" sz="3000" b="1" dirty="0">
                 <a:solidFill>
                   <a:srgbClr val="1C2430"/>
                 </a:solidFill>
@@ -7549,26 +8060,49 @@
               </a:rPr>
               <a:t>算法步骤与关键假设</a:t>
             </a:r>
-            <a:endParaRPr lang="zh-CN" sz="2550" dirty="0"/>
-          </a:p>
-        </p:txBody>
-      </p:sp>
-      <p:sp>
-        <p:nvSpPr>
-          <p:cNvPr id="6" name="T11/header-rule"/>
-          <p:cNvSpPr/>
-          <p:nvPr/>
-        </p:nvSpPr>
-        <p:spPr>
-          <a:xfrm>
-            <a:off x="457200" y="876300"/>
+            <a:endParaRPr lang="zh-CN" sz="3000" dirty="0"/>
+          </a:p>
+        </p:txBody>
+      </p:sp>
+      <p:sp>
+        <p:nvSpPr>
+          <p:cNvPr id="5" name="T11/header-rule"/>
+          <p:cNvSpPr/>
+          <p:nvPr/>
+        </p:nvSpPr>
+        <p:spPr>
+          <a:xfrm>
+            <a:off x="457200" y="752475"/>
             <a:ext cx="11277600" cy="0"/>
           </a:xfrm>
           <a:prstGeom prst="line">
             <a:avLst/>
           </a:prstGeom>
           <a:noFill/>
-          <a:ln w="11430">
+          <a:ln w="10478">
+            <a:solidFill>
+              <a:srgbClr val="BEC8D4"/>
+            </a:solidFill>
+            <a:prstDash val="solid"/>
+          </a:ln>
+        </p:spPr>
+      </p:sp>
+      <p:sp>
+        <p:nvSpPr>
+          <p:cNvPr id="6" name="T11/header-accent"/>
+          <p:cNvSpPr/>
+          <p:nvPr/>
+        </p:nvSpPr>
+        <p:spPr>
+          <a:xfrm>
+            <a:off x="457200" y="752475"/>
+            <a:ext cx="704850" cy="0"/>
+          </a:xfrm>
+          <a:prstGeom prst="line">
+            <a:avLst/>
+          </a:prstGeom>
+          <a:noFill/>
+          <a:ln w="28575">
             <a:solidFill>
               <a:srgbClr val="173C70"/>
             </a:solidFill>
@@ -7584,8 +8118,8 @@
         </p:nvSpPr>
         <p:spPr>
           <a:xfrm>
-            <a:off x="2228850" y="2057400"/>
-            <a:ext cx="0" cy="266700"/>
+            <a:off x="2228850" y="1899094"/>
+            <a:ext cx="0" cy="276987"/>
           </a:xfrm>
           <a:prstGeom prst="line">
             <a:avLst/>
@@ -7608,8 +8142,8 @@
         </p:nvSpPr>
         <p:spPr>
           <a:xfrm>
-            <a:off x="2228850" y="3048000"/>
-            <a:ext cx="0" cy="266700"/>
+            <a:off x="2228850" y="2927795"/>
+            <a:ext cx="0" cy="276987"/>
           </a:xfrm>
           <a:prstGeom prst="line">
             <a:avLst/>
@@ -7632,8 +8166,8 @@
         </p:nvSpPr>
         <p:spPr>
           <a:xfrm>
-            <a:off x="2228850" y="4038600"/>
-            <a:ext cx="0" cy="266700"/>
+            <a:off x="2228850" y="3956495"/>
+            <a:ext cx="0" cy="276987"/>
           </a:xfrm>
           <a:prstGeom prst="line">
             <a:avLst/>
@@ -7656,8 +8190,8 @@
         </p:nvSpPr>
         <p:spPr>
           <a:xfrm>
-            <a:off x="2228850" y="5029200"/>
-            <a:ext cx="0" cy="266700"/>
+            <a:off x="2228850" y="4985195"/>
+            <a:ext cx="0" cy="276987"/>
           </a:xfrm>
           <a:prstGeom prst="line">
             <a:avLst/>
@@ -7680,14 +8214,14 @@
         </p:nvSpPr>
         <p:spPr>
           <a:xfrm>
-            <a:off x="590550" y="1333500"/>
-            <a:ext cx="3276600" cy="723900"/>
+            <a:off x="590550" y="1147381"/>
+            <a:ext cx="3276600" cy="751713"/>
           </a:xfrm>
           <a:prstGeom prst="rect">
             <a:avLst/>
           </a:prstGeom>
           <a:solidFill>
-            <a:srgbClr val="FFFFFF"/>
+            <a:srgbClr val="F0F3F6"/>
           </a:solidFill>
           <a:ln w="11430">
             <a:solidFill>
@@ -7705,7 +8239,7 @@
         </p:nvSpPr>
         <p:spPr>
           <a:xfrm>
-            <a:off x="590550" y="1333500"/>
+            <a:off x="590550" y="1147381"/>
             <a:ext cx="3276600" cy="0"/>
           </a:xfrm>
           <a:prstGeom prst="line">
@@ -7714,7 +8248,7 @@
           <a:noFill/>
           <a:ln w="19050">
             <a:solidFill>
-              <a:srgbClr val="173C70"/>
+              <a:srgbClr val="536A7A"/>
             </a:solidFill>
             <a:prstDash val="solid"/>
           </a:ln>
@@ -7728,7 +8262,7 @@
         </p:nvSpPr>
         <p:spPr>
           <a:xfrm>
-            <a:off x="704850" y="1562100"/>
+            <a:off x="704850" y="1389888"/>
             <a:ext cx="3048000" cy="266700"/>
           </a:xfrm>
           <a:prstGeom prst="rect">
@@ -7750,7 +8284,7 @@
             <a:r>
               <a:rPr lang="zh-CN" altLang="en-US" sz="1800" b="1" dirty="0">
                 <a:solidFill>
-                  <a:srgbClr val="173C70"/>
+                  <a:srgbClr val="536A7A"/>
                 </a:solidFill>
                 <a:latin typeface="Noto Sans CJK SC" pitchFamily="34" charset="0"/>
                 <a:ea typeface="Noto Sans CJK SC" pitchFamily="34" charset="-122"/>
@@ -7770,14 +8304,14 @@
         </p:nvSpPr>
         <p:spPr>
           <a:xfrm>
-            <a:off x="590550" y="2324100"/>
-            <a:ext cx="3276600" cy="723900"/>
+            <a:off x="590550" y="2176082"/>
+            <a:ext cx="3276600" cy="751713"/>
           </a:xfrm>
           <a:prstGeom prst="rect">
             <a:avLst/>
           </a:prstGeom>
           <a:solidFill>
-            <a:srgbClr val="FFFFFF"/>
+            <a:srgbClr val="EAF2FA"/>
           </a:solidFill>
           <a:ln w="11430">
             <a:solidFill>
@@ -7795,7 +8329,7 @@
         </p:nvSpPr>
         <p:spPr>
           <a:xfrm>
-            <a:off x="590550" y="2324100"/>
+            <a:off x="590550" y="2176082"/>
             <a:ext cx="3276600" cy="0"/>
           </a:xfrm>
           <a:prstGeom prst="line">
@@ -7804,7 +8338,7 @@
           <a:noFill/>
           <a:ln w="19050">
             <a:solidFill>
-              <a:srgbClr val="173C70"/>
+              <a:srgbClr val="235E96"/>
             </a:solidFill>
             <a:prstDash val="solid"/>
           </a:ln>
@@ -7818,7 +8352,7 @@
         </p:nvSpPr>
         <p:spPr>
           <a:xfrm>
-            <a:off x="704850" y="2552700"/>
+            <a:off x="704850" y="2418588"/>
             <a:ext cx="3048000" cy="266700"/>
           </a:xfrm>
           <a:prstGeom prst="rect">
@@ -7840,7 +8374,7 @@
             <a:r>
               <a:rPr lang="zh-CN" altLang="en-US" sz="1800" b="1" dirty="0">
                 <a:solidFill>
-                  <a:srgbClr val="173C70"/>
+                  <a:srgbClr val="235E96"/>
                 </a:solidFill>
                 <a:latin typeface="Noto Sans CJK SC" pitchFamily="34" charset="0"/>
                 <a:ea typeface="Noto Sans CJK SC" pitchFamily="34" charset="-122"/>
@@ -7860,14 +8394,14 @@
         </p:nvSpPr>
         <p:spPr>
           <a:xfrm>
-            <a:off x="590550" y="3314700"/>
-            <a:ext cx="3276600" cy="723900"/>
+            <a:off x="590550" y="3204781"/>
+            <a:ext cx="3276600" cy="751713"/>
           </a:xfrm>
           <a:prstGeom prst="rect">
             <a:avLst/>
           </a:prstGeom>
           <a:solidFill>
-            <a:srgbClr val="FFFFFF"/>
+            <a:srgbClr val="EAF2FA"/>
           </a:solidFill>
           <a:ln w="11430">
             <a:solidFill>
@@ -7885,7 +8419,7 @@
         </p:nvSpPr>
         <p:spPr>
           <a:xfrm>
-            <a:off x="590550" y="3314700"/>
+            <a:off x="590550" y="3204781"/>
             <a:ext cx="3276600" cy="0"/>
           </a:xfrm>
           <a:prstGeom prst="line">
@@ -7894,7 +8428,7 @@
           <a:noFill/>
           <a:ln w="19050">
             <a:solidFill>
-              <a:srgbClr val="173C70"/>
+              <a:srgbClr val="235E96"/>
             </a:solidFill>
             <a:prstDash val="solid"/>
           </a:ln>
@@ -7908,7 +8442,7 @@
         </p:nvSpPr>
         <p:spPr>
           <a:xfrm>
-            <a:off x="704850" y="3543300"/>
+            <a:off x="704850" y="3447288"/>
             <a:ext cx="3048000" cy="266700"/>
           </a:xfrm>
           <a:prstGeom prst="rect">
@@ -7930,7 +8464,7 @@
             <a:r>
               <a:rPr lang="zh-CN" altLang="en-US" sz="1800" b="1" dirty="0">
                 <a:solidFill>
-                  <a:srgbClr val="173C70"/>
+                  <a:srgbClr val="235E96"/>
                 </a:solidFill>
                 <a:latin typeface="Noto Sans CJK SC" pitchFamily="34" charset="0"/>
                 <a:ea typeface="Noto Sans CJK SC" pitchFamily="34" charset="-122"/>
@@ -7950,14 +8484,14 @@
         </p:nvSpPr>
         <p:spPr>
           <a:xfrm>
-            <a:off x="590550" y="4305300"/>
-            <a:ext cx="3276600" cy="723900"/>
+            <a:off x="590550" y="4233482"/>
+            <a:ext cx="3276600" cy="751713"/>
           </a:xfrm>
           <a:prstGeom prst="rect">
             <a:avLst/>
           </a:prstGeom>
           <a:solidFill>
-            <a:srgbClr val="FFFFFF"/>
+            <a:srgbClr val="EAF2FA"/>
           </a:solidFill>
           <a:ln w="11430">
             <a:solidFill>
@@ -7975,7 +8509,7 @@
         </p:nvSpPr>
         <p:spPr>
           <a:xfrm>
-            <a:off x="590550" y="4305300"/>
+            <a:off x="590550" y="4233482"/>
             <a:ext cx="3276600" cy="0"/>
           </a:xfrm>
           <a:prstGeom prst="line">
@@ -7984,7 +8518,7 @@
           <a:noFill/>
           <a:ln w="19050">
             <a:solidFill>
-              <a:srgbClr val="173C70"/>
+              <a:srgbClr val="235E96"/>
             </a:solidFill>
             <a:prstDash val="solid"/>
           </a:ln>
@@ -7998,7 +8532,7 @@
         </p:nvSpPr>
         <p:spPr>
           <a:xfrm>
-            <a:off x="704850" y="4533900"/>
+            <a:off x="704850" y="4475988"/>
             <a:ext cx="3048000" cy="266700"/>
           </a:xfrm>
           <a:prstGeom prst="rect">
@@ -8020,7 +8554,7 @@
             <a:r>
               <a:rPr lang="zh-CN" altLang="en-US" sz="1800" b="1" dirty="0">
                 <a:solidFill>
-                  <a:srgbClr val="173C70"/>
+                  <a:srgbClr val="235E96"/>
                 </a:solidFill>
                 <a:latin typeface="Noto Sans CJK SC" pitchFamily="34" charset="0"/>
                 <a:ea typeface="Noto Sans CJK SC" pitchFamily="34" charset="-122"/>
@@ -8040,14 +8574,14 @@
         </p:nvSpPr>
         <p:spPr>
           <a:xfrm>
-            <a:off x="590550" y="5295900"/>
-            <a:ext cx="3276600" cy="723900"/>
+            <a:off x="590550" y="5262182"/>
+            <a:ext cx="3276600" cy="751713"/>
           </a:xfrm>
           <a:prstGeom prst="rect">
             <a:avLst/>
           </a:prstGeom>
           <a:solidFill>
-            <a:srgbClr val="FFFFFF"/>
+            <a:srgbClr val="E9F4F0"/>
           </a:solidFill>
           <a:ln w="11430">
             <a:solidFill>
@@ -8065,7 +8599,7 @@
         </p:nvSpPr>
         <p:spPr>
           <a:xfrm>
-            <a:off x="590550" y="5295900"/>
+            <a:off x="590550" y="5262182"/>
             <a:ext cx="3276600" cy="0"/>
           </a:xfrm>
           <a:prstGeom prst="line">
@@ -8074,7 +8608,7 @@
           <a:noFill/>
           <a:ln w="19050">
             <a:solidFill>
-              <a:srgbClr val="173C70"/>
+              <a:srgbClr val="146C63"/>
             </a:solidFill>
             <a:prstDash val="solid"/>
           </a:ln>
@@ -8088,7 +8622,7 @@
         </p:nvSpPr>
         <p:spPr>
           <a:xfrm>
-            <a:off x="704850" y="5524500"/>
+            <a:off x="704850" y="5504688"/>
             <a:ext cx="3048000" cy="266700"/>
           </a:xfrm>
           <a:prstGeom prst="rect">
@@ -8110,7 +8644,7 @@
             <a:r>
               <a:rPr lang="zh-CN" altLang="en-US" sz="1800" b="1" dirty="0">
                 <a:solidFill>
-                  <a:srgbClr val="173C70"/>
+                  <a:srgbClr val="146C63"/>
                 </a:solidFill>
                 <a:latin typeface="Noto Sans CJK SC" pitchFamily="34" charset="0"/>
                 <a:ea typeface="Noto Sans CJK SC" pitchFamily="34" charset="-122"/>
@@ -8130,8 +8664,8 @@
         </p:nvSpPr>
         <p:spPr>
           <a:xfrm>
-            <a:off x="4305300" y="1352550"/>
-            <a:ext cx="7429500" cy="1447800"/>
+            <a:off x="4305300" y="1167194"/>
+            <a:ext cx="7429500" cy="1503521"/>
           </a:xfrm>
           <a:prstGeom prst="rect">
             <a:avLst/>
@@ -8155,14 +8689,14 @@
         </p:nvSpPr>
         <p:spPr>
           <a:xfrm>
-            <a:off x="4314825" y="1362075"/>
+            <a:off x="4314825" y="1176719"/>
             <a:ext cx="7410450" cy="371475"/>
           </a:xfrm>
           <a:prstGeom prst="rect">
             <a:avLst/>
           </a:prstGeom>
           <a:solidFill>
-            <a:srgbClr val="EEF3F8"/>
+            <a:srgbClr val="EAF2FA"/>
           </a:solidFill>
           <a:ln w="12700">
             <a:solidFill>
@@ -8182,7 +8716,7 @@
         </p:nvSpPr>
         <p:spPr>
           <a:xfrm>
-            <a:off x="4305300" y="1733550"/>
+            <a:off x="4305300" y="1548194"/>
             <a:ext cx="7429500" cy="0"/>
           </a:xfrm>
           <a:prstGeom prst="line">
@@ -8205,8 +8739,8 @@
         </p:nvSpPr>
         <p:spPr>
           <a:xfrm>
-            <a:off x="4429125" y="1409700"/>
-            <a:ext cx="7181850" cy="276225"/>
+            <a:off x="4429125" y="1214819"/>
+            <a:ext cx="7181850" cy="295275"/>
           </a:xfrm>
           <a:prstGeom prst="rect">
             <a:avLst/>
@@ -8220,35 +8754,231 @@
           <a:p>
             <a:pPr algn="l" indent="0" marL="0">
               <a:lnSpc>
-                <a:spcPts val="2070"/>
+                <a:spcPts val="2242"/>
+              </a:lnSpc>
+              <a:buNone/>
+            </a:pPr>
+            <a:r>
+              <a:rPr lang="zh-CN" altLang="en-US" sz="1950" b="1" dirty="0">
+                <a:solidFill>
+                  <a:srgbClr val="235E96"/>
+                </a:solidFill>
+                <a:latin typeface="Noto Sans CJK SC" pitchFamily="34" charset="0"/>
+                <a:ea typeface="Noto Sans CJK SC" pitchFamily="34" charset="-122"/>
+                <a:cs typeface="Noto Sans CJK SC" pitchFamily="34" charset="-120"/>
+              </a:rPr>
+              <a:t>关键运算</a:t>
+            </a:r>
+            <a:endParaRPr lang="zh-CN" sz="1950" dirty="0"/>
+          </a:p>
+        </p:txBody>
+      </p:sp>
+      <p:sp>
+        <p:nvSpPr>
+          <p:cNvPr id="30" name="T11/card/region-1/body"/>
+          <p:cNvSpPr/>
+          <p:nvPr/>
+        </p:nvSpPr>
+        <p:spPr>
+          <a:xfrm>
+            <a:off x="4438650" y="1652969"/>
+            <a:ext cx="7162800" cy="922496"/>
+          </a:xfrm>
+          <a:prstGeom prst="rect">
+            <a:avLst/>
+          </a:prstGeom>
+          <a:noFill/>
+          <a:ln/>
+        </p:spPr>
+        <p:txBody>
+          <a:bodyPr wrap="none" lIns="0" tIns="0" rIns="0" bIns="0" rtlCol="0" anchor="t"/>
+          <a:lstStyle/>
+          <a:p>
+            <a:pPr algn="l" indent="0" marL="0">
+              <a:lnSpc>
+                <a:spcPts val="2232"/>
+              </a:lnSpc>
+              <a:buNone/>
+            </a:pPr>
+            <a:r>
+              <a:rPr lang="zh-CN" altLang="en-US" sz="1800" dirty="0">
+                <a:solidFill>
+                  <a:srgbClr val="1C2430"/>
+                </a:solidFill>
+                <a:latin typeface="Noto Sans CJK SC" pitchFamily="34" charset="0"/>
+                <a:ea typeface="Noto Sans CJK SC" pitchFamily="34" charset="-122"/>
+                <a:cs typeface="Noto Sans CJK SC" pitchFamily="34" charset="-120"/>
+              </a:rPr>
+              <a:t>写清关键更新或目标计算</a:t>
+            </a:r>
+            <a:endParaRPr lang="zh-CN" sz="1800" dirty="0"/>
+          </a:p>
+          <a:p>
+            <a:pPr algn="l" indent="0" marL="0">
+              <a:lnSpc>
+                <a:spcPts val="2232"/>
+              </a:lnSpc>
+              <a:buNone/>
+            </a:pPr>
+            <a:r>
+              <a:rPr lang="zh-CN" altLang="en-US" sz="1800" dirty="0">
+                <a:solidFill>
+                  <a:srgbClr val="1C2430"/>
+                </a:solidFill>
+                <a:latin typeface="Noto Sans CJK SC" pitchFamily="34" charset="0"/>
+                <a:ea typeface="Noto Sans CJK SC" pitchFamily="34" charset="-122"/>
+                <a:cs typeface="Noto Sans CJK SC" pitchFamily="34" charset="-120"/>
+              </a:rPr>
+              <a:t>保留</a:t>
+            </a:r>
+            <a:pPr algn="l" indent="0" marL="0">
+              <a:lnSpc>
+                <a:spcPts val="2232"/>
               </a:lnSpc>
               <a:buNone/>
             </a:pPr>
             <a:r>
               <a:rPr lang="zh-CN" altLang="en-US" sz="1800" b="1" dirty="0">
                 <a:solidFill>
-                  <a:srgbClr val="173C70"/>
-                </a:solidFill>
-                <a:latin typeface="Noto Sans CJK SC" pitchFamily="34" charset="0"/>
-                <a:ea typeface="Noto Sans CJK SC" pitchFamily="34" charset="-122"/>
-                <a:cs typeface="Noto Sans CJK SC" pitchFamily="34" charset="-120"/>
-              </a:rPr>
-              <a:t>关键运算</a:t>
+                  <a:srgbClr val="235E96"/>
+                </a:solidFill>
+                <a:latin typeface="Noto Sans CJK SC" pitchFamily="34" charset="0"/>
+                <a:ea typeface="Noto Sans CJK SC" pitchFamily="34" charset="-122"/>
+                <a:cs typeface="Noto Sans CJK SC" pitchFamily="34" charset="-120"/>
+              </a:rPr>
+              <a:t>输入</a:t>
+            </a:r>
+            <a:pPr algn="l" indent="0" marL="0">
+              <a:lnSpc>
+                <a:spcPts val="2232"/>
+              </a:lnSpc>
+              <a:buNone/>
+            </a:pPr>
+            <a:r>
+              <a:rPr lang="zh-CN" altLang="en-US" sz="1800" dirty="0">
+                <a:solidFill>
+                  <a:srgbClr val="1C2430"/>
+                </a:solidFill>
+                <a:latin typeface="Noto Sans CJK SC" pitchFamily="34" charset="0"/>
+                <a:ea typeface="Noto Sans CJK SC" pitchFamily="34" charset="-122"/>
+                <a:cs typeface="Noto Sans CJK SC" pitchFamily="34" charset="-120"/>
+              </a:rPr>
+              <a:t>维度、</a:t>
+            </a:r>
+            <a:pPr algn="l" indent="0" marL="0">
+              <a:lnSpc>
+                <a:spcPts val="2232"/>
+              </a:lnSpc>
+              <a:buNone/>
+            </a:pPr>
+            <a:r>
+              <a:rPr lang="zh-CN" altLang="en-US" sz="1800" b="1" dirty="0">
+                <a:solidFill>
+                  <a:srgbClr val="235E96"/>
+                </a:solidFill>
+                <a:latin typeface="Noto Sans CJK SC" pitchFamily="34" charset="0"/>
+                <a:ea typeface="Noto Sans CJK SC" pitchFamily="34" charset="-122"/>
+                <a:cs typeface="Noto Sans CJK SC" pitchFamily="34" charset="-120"/>
+              </a:rPr>
+              <a:t>输出</a:t>
+            </a:r>
+            <a:pPr algn="l" indent="0" marL="0">
+              <a:lnSpc>
+                <a:spcPts val="2232"/>
+              </a:lnSpc>
+              <a:buNone/>
+            </a:pPr>
+            <a:r>
+              <a:rPr lang="zh-CN" altLang="en-US" sz="1800" dirty="0">
+                <a:solidFill>
+                  <a:srgbClr val="1C2430"/>
+                </a:solidFill>
+                <a:latin typeface="Noto Sans CJK SC" pitchFamily="34" charset="0"/>
+                <a:ea typeface="Noto Sans CJK SC" pitchFamily="34" charset="-122"/>
+                <a:cs typeface="Noto Sans CJK SC" pitchFamily="34" charset="-120"/>
+              </a:rPr>
+              <a:t>与复杂度</a:t>
             </a:r>
             <a:endParaRPr lang="zh-CN" sz="1800" dirty="0"/>
           </a:p>
-        </p:txBody>
-      </p:sp>
-      <p:sp>
-        <p:nvSpPr>
-          <p:cNvPr id="30" name="T11/card/region-1/body"/>
-          <p:cNvSpPr/>
-          <p:nvPr/>
-        </p:nvSpPr>
-        <p:spPr>
-          <a:xfrm>
-            <a:off x="4438650" y="1847850"/>
-            <a:ext cx="7162800" cy="857250"/>
+          <a:p>
+            <a:pPr algn="l" indent="0" marL="0">
+              <a:lnSpc>
+                <a:spcPts val="2232"/>
+              </a:lnSpc>
+              <a:buNone/>
+            </a:pPr>
+            <a:r>
+              <a:rPr lang="zh-CN" altLang="en-US" sz="1800" dirty="0">
+                <a:solidFill>
+                  <a:srgbClr val="1C2430"/>
+                </a:solidFill>
+                <a:latin typeface="Noto Sans CJK SC" pitchFamily="34" charset="0"/>
+                <a:ea typeface="Noto Sans CJK SC" pitchFamily="34" charset="-122"/>
+                <a:cs typeface="Noto Sans CJK SC" pitchFamily="34" charset="-120"/>
+              </a:rPr>
+              <a:t>避免只写算法名而省略机制</a:t>
+            </a:r>
+            <a:endParaRPr lang="zh-CN" sz="1800" dirty="0"/>
+          </a:p>
+        </p:txBody>
+      </p:sp>
+      <p:sp>
+        <p:nvSpPr>
+          <p:cNvPr id="31" name="T11/card/region-2/heading-rule"/>
+          <p:cNvSpPr/>
+          <p:nvPr/>
+        </p:nvSpPr>
+        <p:spPr>
+          <a:xfrm>
+            <a:off x="4305300" y="3230404"/>
+            <a:ext cx="7429500" cy="0"/>
+          </a:xfrm>
+          <a:prstGeom prst="line">
+            <a:avLst/>
+          </a:prstGeom>
+          <a:noFill/>
+          <a:ln w="9525">
+            <a:solidFill>
+              <a:srgbClr val="BEC8D4"/>
+            </a:solidFill>
+            <a:prstDash val="solid"/>
+          </a:ln>
+        </p:spPr>
+      </p:sp>
+      <p:sp>
+        <p:nvSpPr>
+          <p:cNvPr id="32" name="T11/card/region-2/heading-mark"/>
+          <p:cNvSpPr/>
+          <p:nvPr/>
+        </p:nvSpPr>
+        <p:spPr>
+          <a:xfrm>
+            <a:off x="4305300" y="3230404"/>
+            <a:ext cx="342900" cy="0"/>
+          </a:xfrm>
+          <a:prstGeom prst="line">
+            <a:avLst/>
+          </a:prstGeom>
+          <a:noFill/>
+          <a:ln w="17145">
+            <a:solidFill>
+              <a:srgbClr val="235E96"/>
+            </a:solidFill>
+            <a:prstDash val="solid"/>
+          </a:ln>
+        </p:spPr>
+      </p:sp>
+      <p:sp>
+        <p:nvSpPr>
+          <p:cNvPr id="33" name="T11/card/region-2/title"/>
+          <p:cNvSpPr/>
+          <p:nvPr/>
+        </p:nvSpPr>
+        <p:spPr>
+          <a:xfrm>
+            <a:off x="4305300" y="2887504"/>
+            <a:ext cx="7429500" cy="323850"/>
           </a:xfrm>
           <a:prstGeom prst="rect">
             <a:avLst/>
@@ -8262,12 +8992,54 @@
           <a:p>
             <a:pPr algn="l" indent="0" marL="0">
               <a:lnSpc>
-                <a:spcPts val="2139"/>
-              </a:lnSpc>
-              <a:buNone/>
-            </a:pPr>
-            <a:r>
-              <a:rPr lang="zh-CN" altLang="en-US" sz="1725" dirty="0">
+                <a:spcPts val="2242"/>
+              </a:lnSpc>
+              <a:buNone/>
+            </a:pPr>
+            <a:r>
+              <a:rPr lang="zh-CN" altLang="en-US" sz="1950" b="1" dirty="0">
+                <a:solidFill>
+                  <a:srgbClr val="235E96"/>
+                </a:solidFill>
+                <a:latin typeface="Noto Sans CJK SC" pitchFamily="34" charset="0"/>
+                <a:ea typeface="Noto Sans CJK SC" pitchFamily="34" charset="-122"/>
+                <a:cs typeface="Noto Sans CJK SC" pitchFamily="34" charset="-120"/>
+              </a:rPr>
+              <a:t>更新规则</a:t>
+            </a:r>
+            <a:endParaRPr lang="zh-CN" sz="1950" dirty="0"/>
+          </a:p>
+        </p:txBody>
+      </p:sp>
+      <p:sp>
+        <p:nvSpPr>
+          <p:cNvPr id="34" name="T11/card/region-2/body"/>
+          <p:cNvSpPr/>
+          <p:nvPr/>
+        </p:nvSpPr>
+        <p:spPr>
+          <a:xfrm>
+            <a:off x="4305300" y="3363754"/>
+            <a:ext cx="7429500" cy="930497"/>
+          </a:xfrm>
+          <a:prstGeom prst="rect">
+            <a:avLst/>
+          </a:prstGeom>
+          <a:noFill/>
+          <a:ln/>
+        </p:spPr>
+        <p:txBody>
+          <a:bodyPr wrap="none" lIns="0" tIns="0" rIns="0" bIns="0" rtlCol="0" anchor="t"/>
+          <a:lstStyle/>
+          <a:p>
+            <a:pPr algn="l" indent="0" marL="0">
+              <a:lnSpc>
+                <a:spcPts val="2232"/>
+              </a:lnSpc>
+              <a:buNone/>
+            </a:pPr>
+            <a:r>
+              <a:rPr lang="zh-CN" altLang="en-US" sz="1800" dirty="0">
                 <a:solidFill>
                   <a:srgbClr val="1C2430"/>
                 </a:solidFill>
@@ -8275,19 +9047,19 @@
                 <a:ea typeface="Noto Sans CJK SC" pitchFamily="34" charset="-122"/>
                 <a:cs typeface="Noto Sans CJK SC" pitchFamily="34" charset="-120"/>
               </a:rPr>
-              <a:t>写清关键更新或目标计算</a:t>
-            </a:r>
-            <a:endParaRPr lang="zh-CN" sz="1725" dirty="0"/>
-          </a:p>
-          <a:p>
-            <a:pPr algn="l" indent="0" marL="0">
-              <a:lnSpc>
-                <a:spcPts val="2139"/>
-              </a:lnSpc>
-              <a:buNone/>
-            </a:pPr>
-            <a:r>
-              <a:rPr lang="zh-CN" altLang="en-US" sz="1725" dirty="0">
+              <a:t>说明批次、频率与停止条件</a:t>
+            </a:r>
+            <a:endParaRPr lang="zh-CN" sz="1800" dirty="0"/>
+          </a:p>
+          <a:p>
+            <a:pPr algn="l" indent="0" marL="0">
+              <a:lnSpc>
+                <a:spcPts val="2232"/>
+              </a:lnSpc>
+              <a:buNone/>
+            </a:pPr>
+            <a:r>
+              <a:rPr lang="zh-CN" altLang="en-US" sz="1800" dirty="0">
                 <a:solidFill>
                   <a:srgbClr val="1C2430"/>
                 </a:solidFill>
@@ -8295,180 +9067,10 @@
                 <a:ea typeface="Noto Sans CJK SC" pitchFamily="34" charset="-122"/>
                 <a:cs typeface="Noto Sans CJK SC" pitchFamily="34" charset="-120"/>
               </a:rPr>
-              <a:t>保留输入维度、输出与复杂度</a:t>
-            </a:r>
-            <a:endParaRPr lang="zh-CN" sz="1725" dirty="0"/>
-          </a:p>
-          <a:p>
-            <a:pPr algn="l" indent="0" marL="0">
-              <a:lnSpc>
-                <a:spcPts val="2139"/>
-              </a:lnSpc>
-              <a:buNone/>
-            </a:pPr>
-            <a:r>
-              <a:rPr lang="zh-CN" altLang="en-US" sz="1725" dirty="0">
-                <a:solidFill>
-                  <a:srgbClr val="1C2430"/>
-                </a:solidFill>
-                <a:latin typeface="Noto Sans CJK SC" pitchFamily="34" charset="0"/>
-                <a:ea typeface="Noto Sans CJK SC" pitchFamily="34" charset="-122"/>
-                <a:cs typeface="Noto Sans CJK SC" pitchFamily="34" charset="-120"/>
-              </a:rPr>
-              <a:t>避免只写算法名而省略机制</a:t>
-            </a:r>
-            <a:endParaRPr lang="zh-CN" sz="1725" dirty="0"/>
-          </a:p>
-        </p:txBody>
-      </p:sp>
-      <p:sp>
-        <p:nvSpPr>
-          <p:cNvPr id="31" name="T11/card/region-2/heading-rule"/>
-          <p:cNvSpPr/>
-          <p:nvPr/>
-        </p:nvSpPr>
-        <p:spPr>
-          <a:xfrm>
-            <a:off x="4305300" y="3352800"/>
-            <a:ext cx="7429500" cy="0"/>
-          </a:xfrm>
-          <a:prstGeom prst="line">
-            <a:avLst/>
-          </a:prstGeom>
-          <a:noFill/>
-          <a:ln w="9525">
-            <a:solidFill>
-              <a:srgbClr val="BEC8D4"/>
-            </a:solidFill>
-            <a:prstDash val="solid"/>
-          </a:ln>
-        </p:spPr>
-      </p:sp>
-      <p:sp>
-        <p:nvSpPr>
-          <p:cNvPr id="32" name="T11/card/region-2/heading-mark"/>
-          <p:cNvSpPr/>
-          <p:nvPr/>
-        </p:nvSpPr>
-        <p:spPr>
-          <a:xfrm>
-            <a:off x="4305300" y="3352800"/>
-            <a:ext cx="342900" cy="0"/>
-          </a:xfrm>
-          <a:prstGeom prst="line">
-            <a:avLst/>
-          </a:prstGeom>
-          <a:noFill/>
-          <a:ln w="17145">
-            <a:solidFill>
-              <a:srgbClr val="173C70"/>
-            </a:solidFill>
-            <a:prstDash val="solid"/>
-          </a:ln>
-        </p:spPr>
-      </p:sp>
-      <p:sp>
-        <p:nvSpPr>
-          <p:cNvPr id="33" name="T11/card/region-2/title"/>
-          <p:cNvSpPr/>
-          <p:nvPr/>
-        </p:nvSpPr>
-        <p:spPr>
-          <a:xfrm>
-            <a:off x="4305300" y="3009900"/>
-            <a:ext cx="7429500" cy="323850"/>
-          </a:xfrm>
-          <a:prstGeom prst="rect">
-            <a:avLst/>
-          </a:prstGeom>
-          <a:noFill/>
-          <a:ln/>
-        </p:spPr>
-        <p:txBody>
-          <a:bodyPr wrap="none" lIns="0" tIns="0" rIns="0" bIns="0" rtlCol="0" anchor="t"/>
-          <a:lstStyle/>
-          <a:p>
-            <a:pPr algn="l" indent="0" marL="0">
-              <a:lnSpc>
-                <a:spcPts val="2156"/>
-              </a:lnSpc>
-              <a:buNone/>
-            </a:pPr>
-            <a:r>
-              <a:rPr lang="zh-CN" altLang="en-US" sz="1875" b="1" dirty="0">
-                <a:solidFill>
-                  <a:srgbClr val="173C70"/>
-                </a:solidFill>
-                <a:latin typeface="Noto Sans CJK SC" pitchFamily="34" charset="0"/>
-                <a:ea typeface="Noto Sans CJK SC" pitchFamily="34" charset="-122"/>
-                <a:cs typeface="Noto Sans CJK SC" pitchFamily="34" charset="-120"/>
-              </a:rPr>
-              <a:t>更新规则</a:t>
-            </a:r>
-            <a:endParaRPr lang="zh-CN" sz="1875" dirty="0"/>
-          </a:p>
-        </p:txBody>
-      </p:sp>
-      <p:sp>
-        <p:nvSpPr>
-          <p:cNvPr id="34" name="T11/card/region-2/body"/>
-          <p:cNvSpPr/>
-          <p:nvPr/>
-        </p:nvSpPr>
-        <p:spPr>
-          <a:xfrm>
-            <a:off x="4305300" y="3486150"/>
-            <a:ext cx="7429500" cy="876300"/>
-          </a:xfrm>
-          <a:prstGeom prst="rect">
-            <a:avLst/>
-          </a:prstGeom>
-          <a:noFill/>
-          <a:ln/>
-        </p:spPr>
-        <p:txBody>
-          <a:bodyPr wrap="none" lIns="0" tIns="0" rIns="0" bIns="0" rtlCol="0" anchor="t"/>
-          <a:lstStyle/>
-          <a:p>
-            <a:pPr algn="l" indent="0" marL="0">
-              <a:lnSpc>
-                <a:spcPts val="2232"/>
-              </a:lnSpc>
-              <a:buNone/>
-            </a:pPr>
-            <a:r>
-              <a:rPr lang="zh-CN" altLang="en-US" sz="1800" dirty="0">
-                <a:solidFill>
-                  <a:srgbClr val="1C2430"/>
-                </a:solidFill>
-                <a:latin typeface="Noto Sans CJK SC" pitchFamily="34" charset="0"/>
-                <a:ea typeface="Noto Sans CJK SC" pitchFamily="34" charset="-122"/>
-                <a:cs typeface="Noto Sans CJK SC" pitchFamily="34" charset="-120"/>
-              </a:rPr>
-              <a:t>说明批次、频率与停止条件</a:t>
+              <a:t>区分训练更新和测试时的行为</a:t>
             </a:r>
             <a:endParaRPr lang="zh-CN" sz="1800" dirty="0"/>
           </a:p>
-          <a:p>
-            <a:pPr algn="l" indent="0" marL="0">
-              <a:lnSpc>
-                <a:spcPts val="2232"/>
-              </a:lnSpc>
-              <a:buNone/>
-            </a:pPr>
-            <a:r>
-              <a:rPr lang="zh-CN" altLang="en-US" sz="1800" dirty="0">
-                <a:solidFill>
-                  <a:srgbClr val="1C2430"/>
-                </a:solidFill>
-                <a:latin typeface="Noto Sans CJK SC" pitchFamily="34" charset="0"/>
-                <a:ea typeface="Noto Sans CJK SC" pitchFamily="34" charset="-122"/>
-                <a:cs typeface="Noto Sans CJK SC" pitchFamily="34" charset="-120"/>
-              </a:rPr>
-              <a:t>区分训练更新和测试时的行为</a:t>
-            </a:r>
-            <a:endParaRPr lang="zh-CN" sz="1800" dirty="0"/>
-          </a:p>
         </p:txBody>
       </p:sp>
       <p:sp>
@@ -8479,8 +9081,8 @@
         </p:nvSpPr>
         <p:spPr>
           <a:xfrm>
-            <a:off x="4305300" y="4724400"/>
-            <a:ext cx="7429500" cy="1295400"/>
+            <a:off x="4305300" y="4664297"/>
+            <a:ext cx="7429500" cy="1349597"/>
           </a:xfrm>
           <a:prstGeom prst="rect">
             <a:avLst/>
@@ -8504,14 +9106,14 @@
         </p:nvSpPr>
         <p:spPr>
           <a:xfrm>
-            <a:off x="4419600" y="4610100"/>
-            <a:ext cx="1866900" cy="320040"/>
+            <a:off x="4419600" y="4549997"/>
+            <a:ext cx="1257300" cy="342900"/>
           </a:xfrm>
           <a:prstGeom prst="rect">
             <a:avLst/>
           </a:prstGeom>
           <a:solidFill>
-            <a:srgbClr val="355D88"/>
+            <a:srgbClr val="6C528E"/>
           </a:solidFill>
           <a:ln w="12700">
             <a:solidFill>
@@ -8531,8 +9133,8 @@
         </p:nvSpPr>
         <p:spPr>
           <a:xfrm>
-            <a:off x="4524375" y="4638675"/>
-            <a:ext cx="1657350" cy="262890"/>
+            <a:off x="4524375" y="4578572"/>
+            <a:ext cx="1047750" cy="285750"/>
           </a:xfrm>
           <a:prstGeom prst="rect">
             <a:avLst/>
@@ -8546,12 +9148,12 @@
           <a:p>
             <a:pPr algn="l" indent="0" marL="0">
               <a:lnSpc>
-                <a:spcPts val="2070"/>
-              </a:lnSpc>
-              <a:buNone/>
-            </a:pPr>
-            <a:r>
-              <a:rPr lang="zh-CN" altLang="en-US" sz="1800" b="1" dirty="0">
+                <a:spcPts val="2242"/>
+              </a:lnSpc>
+              <a:buNone/>
+            </a:pPr>
+            <a:r>
+              <a:rPr lang="zh-CN" altLang="en-US" sz="1950" b="1" dirty="0">
                 <a:solidFill>
                   <a:srgbClr val="FFFFFF"/>
                 </a:solidFill>
@@ -8559,41 +9161,61 @@
                 <a:ea typeface="Noto Sans CJK SC" pitchFamily="34" charset="-122"/>
                 <a:cs typeface="Noto Sans CJK SC" pitchFamily="34" charset="-120"/>
               </a:rPr>
-              <a:t>假设与计算条件</a:t>
+              <a:t>计算假设</a:t>
+            </a:r>
+            <a:endParaRPr lang="zh-CN" sz="1950" dirty="0"/>
+          </a:p>
+        </p:txBody>
+      </p:sp>
+      <p:sp>
+        <p:nvSpPr>
+          <p:cNvPr id="38" name="T11/card/region-3/body"/>
+          <p:cNvSpPr/>
+          <p:nvPr/>
+        </p:nvSpPr>
+        <p:spPr>
+          <a:xfrm>
+            <a:off x="4438650" y="5035772"/>
+            <a:ext cx="7162800" cy="882872"/>
+          </a:xfrm>
+          <a:prstGeom prst="rect">
+            <a:avLst/>
+          </a:prstGeom>
+          <a:noFill/>
+          <a:ln/>
+        </p:spPr>
+        <p:txBody>
+          <a:bodyPr wrap="none" lIns="0" tIns="0" rIns="0" bIns="0" rtlCol="0" anchor="t"/>
+          <a:lstStyle/>
+          <a:p>
+            <a:pPr algn="l" indent="0" marL="0">
+              <a:lnSpc>
+                <a:spcPts val="2232"/>
+              </a:lnSpc>
+              <a:buNone/>
+            </a:pPr>
+            <a:r>
+              <a:rPr lang="zh-CN" altLang="en-US" sz="1800" dirty="0">
+                <a:solidFill>
+                  <a:srgbClr val="1C2430"/>
+                </a:solidFill>
+                <a:latin typeface="Noto Sans CJK SC" pitchFamily="34" charset="0"/>
+                <a:ea typeface="Noto Sans CJK SC" pitchFamily="34" charset="-122"/>
+                <a:cs typeface="Noto Sans CJK SC" pitchFamily="34" charset="-120"/>
+              </a:rPr>
+              <a:t>列出独立性、可观测性与稳定性假设</a:t>
             </a:r>
             <a:endParaRPr lang="zh-CN" sz="1800" dirty="0"/>
           </a:p>
-        </p:txBody>
-      </p:sp>
-      <p:sp>
-        <p:nvSpPr>
-          <p:cNvPr id="38" name="T11/card/region-3/body"/>
-          <p:cNvSpPr/>
-          <p:nvPr/>
-        </p:nvSpPr>
-        <p:spPr>
-          <a:xfrm>
-            <a:off x="4438650" y="5073015"/>
-            <a:ext cx="7162800" cy="851535"/>
-          </a:xfrm>
-          <a:prstGeom prst="rect">
-            <a:avLst/>
-          </a:prstGeom>
-          <a:noFill/>
-          <a:ln/>
-        </p:spPr>
-        <p:txBody>
-          <a:bodyPr wrap="none" lIns="0" tIns="0" rIns="0" bIns="0" rtlCol="0" anchor="t"/>
-          <a:lstStyle/>
-          <a:p>
-            <a:pPr algn="l" indent="0" marL="0">
-              <a:lnSpc>
-                <a:spcPts val="2139"/>
-              </a:lnSpc>
-              <a:buNone/>
-            </a:pPr>
-            <a:r>
-              <a:rPr lang="zh-CN" altLang="en-US" sz="1725" dirty="0">
+          <a:p>
+            <a:pPr algn="l" indent="0" marL="0">
+              <a:lnSpc>
+                <a:spcPts val="2232"/>
+              </a:lnSpc>
+              <a:buNone/>
+            </a:pPr>
+            <a:r>
+              <a:rPr lang="zh-CN" altLang="en-US" sz="1800" dirty="0">
                 <a:solidFill>
                   <a:srgbClr val="1C2430"/>
                 </a:solidFill>
@@ -8601,29 +9223,9 @@
                 <a:ea typeface="Noto Sans CJK SC" pitchFamily="34" charset="-122"/>
                 <a:cs typeface="Noto Sans CJK SC" pitchFamily="34" charset="-120"/>
               </a:rPr>
-              <a:t>列出独立性、可观测性与稳定性假设</a:t>
-            </a:r>
-            <a:endParaRPr lang="zh-CN" sz="1725" dirty="0"/>
-          </a:p>
-          <a:p>
-            <a:pPr algn="l" indent="0" marL="0">
-              <a:lnSpc>
-                <a:spcPts val="2139"/>
-              </a:lnSpc>
-              <a:buNone/>
-            </a:pPr>
-            <a:r>
-              <a:rPr lang="zh-CN" altLang="en-US" sz="1725" dirty="0">
-                <a:solidFill>
-                  <a:srgbClr val="1C2430"/>
-                </a:solidFill>
-                <a:latin typeface="Noto Sans CJK SC" pitchFamily="34" charset="0"/>
-                <a:ea typeface="Noto Sans CJK SC" pitchFamily="34" charset="-122"/>
-                <a:cs typeface="Noto Sans CJK SC" pitchFamily="34" charset="-120"/>
-              </a:rPr>
               <a:t>报告超参数、随机种子和预算</a:t>
             </a:r>
-            <a:endParaRPr lang="zh-CN" sz="1725" dirty="0"/>
+            <a:endParaRPr lang="zh-CN" sz="1800" dirty="0"/>
           </a:p>
         </p:txBody>
       </p:sp>
@@ -8663,7 +9265,7 @@
                 <a:ea typeface="Noto Sans CJK SC" pitchFamily="34" charset="-122"/>
                 <a:cs typeface="Noto Sans CJK SC" pitchFamily="34" charset="-120"/>
               </a:rPr>
-              <a:t>T1 · 2026 · 待替换</a:t>
+              <a:t>T1 · 2026 · 书目占位；图表均为合成示例</a:t>
             </a:r>
             <a:endParaRPr lang="zh-CN" sz="1125" dirty="0"/>
           </a:p>
@@ -8772,14 +9374,14 @@
       </p:sp>
       <p:sp>
         <p:nvSpPr>
-          <p:cNvPr id="4" name="T12/kicker"/>
-          <p:cNvSpPr/>
-          <p:nvPr/>
-        </p:nvSpPr>
-        <p:spPr>
-          <a:xfrm>
-            <a:off x="457200" y="152400"/>
-            <a:ext cx="11277600" cy="190500"/>
+          <p:cNvPr id="4" name="T12/title"/>
+          <p:cNvSpPr/>
+          <p:nvPr/>
+        </p:nvSpPr>
+        <p:spPr>
+          <a:xfrm>
+            <a:off x="457200" y="209550"/>
+            <a:ext cx="11277600" cy="438150"/>
           </a:xfrm>
           <a:prstGeom prst="rect">
             <a:avLst/>
@@ -8793,54 +9395,12 @@
           <a:p>
             <a:pPr algn="l" indent="0" marL="0">
               <a:lnSpc>
-                <a:spcPts val="1320"/>
-              </a:lnSpc>
-              <a:buNone/>
-            </a:pPr>
-            <a:r>
-              <a:rPr lang="zh-CN" altLang="en-US" sz="1200" dirty="0">
-                <a:solidFill>
-                  <a:srgbClr val="515B68"/>
-                </a:solidFill>
-                <a:latin typeface="Noto Sans CJK SC" pitchFamily="34" charset="0"/>
-                <a:ea typeface="Noto Sans CJK SC" pitchFamily="34" charset="-122"/>
-                <a:cs typeface="Noto Sans CJK SC" pitchFamily="34" charset="-120"/>
-              </a:rPr>
-              <a:t>结构模板 / 占位说明与合成数据</a:t>
-            </a:r>
-            <a:endParaRPr lang="zh-CN" sz="1200" dirty="0"/>
-          </a:p>
-        </p:txBody>
-      </p:sp>
-      <p:sp>
-        <p:nvSpPr>
-          <p:cNvPr id="5" name="T12/title"/>
-          <p:cNvSpPr/>
-          <p:nvPr/>
-        </p:nvSpPr>
-        <p:spPr>
-          <a:xfrm>
-            <a:off x="457200" y="381000"/>
-            <a:ext cx="11277600" cy="400050"/>
-          </a:xfrm>
-          <a:prstGeom prst="rect">
-            <a:avLst/>
-          </a:prstGeom>
-          <a:noFill/>
-          <a:ln/>
-        </p:spPr>
-        <p:txBody>
-          <a:bodyPr wrap="none" lIns="0" tIns="0" rIns="0" bIns="0" rtlCol="0" anchor="t"/>
-          <a:lstStyle/>
-          <a:p>
-            <a:pPr algn="l" indent="0" marL="0">
-              <a:lnSpc>
-                <a:spcPts val="2856"/>
-              </a:lnSpc>
-              <a:buNone/>
-            </a:pPr>
-            <a:r>
-              <a:rPr lang="zh-CN" altLang="en-US" sz="2550" b="1" dirty="0">
+                <a:spcPts val="3360"/>
+              </a:lnSpc>
+              <a:buNone/>
+            </a:pPr>
+            <a:r>
+              <a:rPr lang="zh-CN" altLang="en-US" sz="3000" b="1" dirty="0">
                 <a:solidFill>
                   <a:srgbClr val="1C2430"/>
                 </a:solidFill>
@@ -8850,26 +9410,49 @@
               </a:rPr>
               <a:t>目标函数与约束分解</a:t>
             </a:r>
-            <a:endParaRPr lang="zh-CN" sz="2550" dirty="0"/>
-          </a:p>
-        </p:txBody>
-      </p:sp>
-      <p:sp>
-        <p:nvSpPr>
-          <p:cNvPr id="6" name="T12/header-rule"/>
-          <p:cNvSpPr/>
-          <p:nvPr/>
-        </p:nvSpPr>
-        <p:spPr>
-          <a:xfrm>
-            <a:off x="457200" y="876300"/>
+            <a:endParaRPr lang="zh-CN" sz="3000" dirty="0"/>
+          </a:p>
+        </p:txBody>
+      </p:sp>
+      <p:sp>
+        <p:nvSpPr>
+          <p:cNvPr id="5" name="T12/header-rule"/>
+          <p:cNvSpPr/>
+          <p:nvPr/>
+        </p:nvSpPr>
+        <p:spPr>
+          <a:xfrm>
+            <a:off x="457200" y="752475"/>
             <a:ext cx="11277600" cy="0"/>
           </a:xfrm>
           <a:prstGeom prst="line">
             <a:avLst/>
           </a:prstGeom>
           <a:noFill/>
-          <a:ln w="11430">
+          <a:ln w="10478">
+            <a:solidFill>
+              <a:srgbClr val="BEC8D4"/>
+            </a:solidFill>
+            <a:prstDash val="solid"/>
+          </a:ln>
+        </p:spPr>
+      </p:sp>
+      <p:sp>
+        <p:nvSpPr>
+          <p:cNvPr id="6" name="T12/header-accent"/>
+          <p:cNvSpPr/>
+          <p:nvPr/>
+        </p:nvSpPr>
+        <p:spPr>
+          <a:xfrm>
+            <a:off x="457200" y="752475"/>
+            <a:ext cx="704850" cy="0"/>
+          </a:xfrm>
+          <a:prstGeom prst="line">
+            <a:avLst/>
+          </a:prstGeom>
+          <a:noFill/>
+          <a:ln w="28575">
             <a:solidFill>
               <a:srgbClr val="173C70"/>
             </a:solidFill>
@@ -8885,8 +9468,8 @@
         </p:nvSpPr>
         <p:spPr>
           <a:xfrm>
-            <a:off x="457200" y="1352550"/>
-            <a:ext cx="7296150" cy="1466850"/>
+            <a:off x="457200" y="1167194"/>
+            <a:ext cx="7296150" cy="1523238"/>
           </a:xfrm>
           <a:prstGeom prst="rect">
             <a:avLst/>
@@ -8910,14 +9493,14 @@
         </p:nvSpPr>
         <p:spPr>
           <a:xfrm>
-            <a:off x="466725" y="1362075"/>
+            <a:off x="466725" y="1176719"/>
             <a:ext cx="7277100" cy="371475"/>
           </a:xfrm>
           <a:prstGeom prst="rect">
             <a:avLst/>
           </a:prstGeom>
           <a:solidFill>
-            <a:srgbClr val="EEF3F8"/>
+            <a:srgbClr val="EAF2FA"/>
           </a:solidFill>
           <a:ln w="12700">
             <a:solidFill>
@@ -8937,7 +9520,7 @@
         </p:nvSpPr>
         <p:spPr>
           <a:xfrm>
-            <a:off x="457200" y="1733550"/>
+            <a:off x="457200" y="1548194"/>
             <a:ext cx="7296150" cy="0"/>
           </a:xfrm>
           <a:prstGeom prst="line">
@@ -8960,8 +9543,8 @@
         </p:nvSpPr>
         <p:spPr>
           <a:xfrm>
-            <a:off x="581025" y="1409700"/>
-            <a:ext cx="7048500" cy="276225"/>
+            <a:off x="581025" y="1214819"/>
+            <a:ext cx="7048500" cy="295275"/>
           </a:xfrm>
           <a:prstGeom prst="rect">
             <a:avLst/>
@@ -8975,14 +9558,14 @@
           <a:p>
             <a:pPr algn="l" indent="0" marL="0">
               <a:lnSpc>
-                <a:spcPts val="2070"/>
-              </a:lnSpc>
-              <a:buNone/>
-            </a:pPr>
-            <a:r>
-              <a:rPr lang="zh-CN" altLang="en-US" sz="1800" b="1" dirty="0">
-                <a:solidFill>
-                  <a:srgbClr val="173C70"/>
+                <a:spcPts val="2242"/>
+              </a:lnSpc>
+              <a:buNone/>
+            </a:pPr>
+            <a:r>
+              <a:rPr lang="zh-CN" altLang="en-US" sz="1950" b="1" dirty="0">
+                <a:solidFill>
+                  <a:srgbClr val="235E96"/>
                 </a:solidFill>
                 <a:latin typeface="Noto Sans CJK SC" pitchFamily="34" charset="0"/>
                 <a:ea typeface="Noto Sans CJK SC" pitchFamily="34" charset="-122"/>
@@ -8990,20 +9573,148 @@
               </a:rPr>
               <a:t>优化目标</a:t>
             </a:r>
+            <a:endParaRPr lang="zh-CN" sz="1950" dirty="0"/>
+          </a:p>
+        </p:txBody>
+      </p:sp>
+      <p:sp>
+        <p:nvSpPr>
+          <p:cNvPr id="11" name="T12/card/region-1/body"/>
+          <p:cNvSpPr/>
+          <p:nvPr/>
+        </p:nvSpPr>
+        <p:spPr>
+          <a:xfrm>
+            <a:off x="590550" y="1652969"/>
+            <a:ext cx="7029450" cy="942213"/>
+          </a:xfrm>
+          <a:prstGeom prst="rect">
+            <a:avLst/>
+          </a:prstGeom>
+          <a:noFill/>
+          <a:ln/>
+        </p:spPr>
+        <p:txBody>
+          <a:bodyPr wrap="none" lIns="0" tIns="0" rIns="0" bIns="0" rtlCol="0" anchor="t"/>
+          <a:lstStyle/>
+          <a:p>
+            <a:pPr algn="l" indent="0" marL="0">
+              <a:lnSpc>
+                <a:spcPts val="2232"/>
+              </a:lnSpc>
+              <a:buNone/>
+            </a:pPr>
+            <a:r>
+              <a:rPr lang="zh-CN" altLang="en-US" sz="1800" dirty="0">
+                <a:solidFill>
+                  <a:srgbClr val="1C2430"/>
+                </a:solidFill>
+                <a:latin typeface="Noto Sans CJK SC" pitchFamily="34" charset="0"/>
+                <a:ea typeface="Noto Sans CJK SC" pitchFamily="34" charset="-122"/>
+                <a:cs typeface="Noto Sans CJK SC" pitchFamily="34" charset="-120"/>
+              </a:rPr>
+              <a:t>示例：min L = Ldata + λ Lregularizer</a:t>
+            </a:r>
             <a:endParaRPr lang="zh-CN" sz="1800" dirty="0"/>
           </a:p>
-        </p:txBody>
-      </p:sp>
-      <p:sp>
-        <p:nvSpPr>
-          <p:cNvPr id="11" name="T12/card/region-1/body"/>
-          <p:cNvSpPr/>
-          <p:nvPr/>
-        </p:nvSpPr>
-        <p:spPr>
-          <a:xfrm>
-            <a:off x="590550" y="1847850"/>
-            <a:ext cx="7029450" cy="876300"/>
+          <a:p>
+            <a:pPr algn="l" indent="0" marL="0">
+              <a:lnSpc>
+                <a:spcPts val="2232"/>
+              </a:lnSpc>
+              <a:buNone/>
+            </a:pPr>
+            <a:r>
+              <a:rPr lang="zh-CN" altLang="en-US" sz="1800" dirty="0">
+                <a:solidFill>
+                  <a:srgbClr val="1C2430"/>
+                </a:solidFill>
+                <a:latin typeface="Noto Sans CJK SC" pitchFamily="34" charset="0"/>
+                <a:ea typeface="Noto Sans CJK SC" pitchFamily="34" charset="-122"/>
+                <a:cs typeface="Noto Sans CJK SC" pitchFamily="34" charset="-120"/>
+              </a:rPr>
+              <a:t>替换为原论文公式并解释每一项</a:t>
+            </a:r>
+            <a:endParaRPr lang="zh-CN" sz="1800" dirty="0"/>
+          </a:p>
+          <a:p>
+            <a:pPr algn="l" indent="0" marL="0">
+              <a:lnSpc>
+                <a:spcPts val="2232"/>
+              </a:lnSpc>
+              <a:buNone/>
+            </a:pPr>
+            <a:r>
+              <a:rPr lang="zh-CN" altLang="en-US" sz="1800" dirty="0">
+                <a:solidFill>
+                  <a:srgbClr val="1C2430"/>
+                </a:solidFill>
+                <a:latin typeface="Noto Sans CJK SC" pitchFamily="34" charset="0"/>
+                <a:ea typeface="Noto Sans CJK SC" pitchFamily="34" charset="-122"/>
+                <a:cs typeface="Noto Sans CJK SC" pitchFamily="34" charset="-120"/>
+              </a:rPr>
+              <a:t>确认优化目标与评价指标的关系</a:t>
+            </a:r>
+            <a:endParaRPr lang="zh-CN" sz="1800" dirty="0"/>
+          </a:p>
+        </p:txBody>
+      </p:sp>
+      <p:sp>
+        <p:nvSpPr>
+          <p:cNvPr id="12" name="T12/card/region-2/heading-rule"/>
+          <p:cNvSpPr/>
+          <p:nvPr/>
+        </p:nvSpPr>
+        <p:spPr>
+          <a:xfrm>
+            <a:off x="457200" y="3270028"/>
+            <a:ext cx="7296150" cy="0"/>
+          </a:xfrm>
+          <a:prstGeom prst="line">
+            <a:avLst/>
+          </a:prstGeom>
+          <a:noFill/>
+          <a:ln w="9525">
+            <a:solidFill>
+              <a:srgbClr val="BEC8D4"/>
+            </a:solidFill>
+            <a:prstDash val="solid"/>
+          </a:ln>
+        </p:spPr>
+      </p:sp>
+      <p:sp>
+        <p:nvSpPr>
+          <p:cNvPr id="13" name="T12/card/region-2/heading-mark"/>
+          <p:cNvSpPr/>
+          <p:nvPr/>
+        </p:nvSpPr>
+        <p:spPr>
+          <a:xfrm>
+            <a:off x="457200" y="3270028"/>
+            <a:ext cx="342900" cy="0"/>
+          </a:xfrm>
+          <a:prstGeom prst="line">
+            <a:avLst/>
+          </a:prstGeom>
+          <a:noFill/>
+          <a:ln w="17145">
+            <a:solidFill>
+              <a:srgbClr val="A24736"/>
+            </a:solidFill>
+            <a:prstDash val="solid"/>
+          </a:ln>
+        </p:spPr>
+      </p:sp>
+      <p:sp>
+        <p:nvSpPr>
+          <p:cNvPr id="14" name="T12/card/region-2/title"/>
+          <p:cNvSpPr/>
+          <p:nvPr/>
+        </p:nvSpPr>
+        <p:spPr>
+          <a:xfrm>
+            <a:off x="457200" y="2927128"/>
+            <a:ext cx="7296150" cy="323850"/>
           </a:xfrm>
           <a:prstGeom prst="rect">
             <a:avLst/>
@@ -9017,12 +9728,54 @@
           <a:p>
             <a:pPr algn="l" indent="0" marL="0">
               <a:lnSpc>
-                <a:spcPts val="2139"/>
-              </a:lnSpc>
-              <a:buNone/>
-            </a:pPr>
-            <a:r>
-              <a:rPr lang="zh-CN" altLang="en-US" sz="1725" dirty="0">
+                <a:spcPts val="2242"/>
+              </a:lnSpc>
+              <a:buNone/>
+            </a:pPr>
+            <a:r>
+              <a:rPr lang="zh-CN" altLang="en-US" sz="1950" b="1" dirty="0">
+                <a:solidFill>
+                  <a:srgbClr val="A24736"/>
+                </a:solidFill>
+                <a:latin typeface="Noto Sans CJK SC" pitchFamily="34" charset="0"/>
+                <a:ea typeface="Noto Sans CJK SC" pitchFamily="34" charset="-122"/>
+                <a:cs typeface="Noto Sans CJK SC" pitchFamily="34" charset="-120"/>
+              </a:rPr>
+              <a:t>约束集合</a:t>
+            </a:r>
+            <a:endParaRPr lang="zh-CN" sz="1950" dirty="0"/>
+          </a:p>
+        </p:txBody>
+      </p:sp>
+      <p:sp>
+        <p:nvSpPr>
+          <p:cNvPr id="15" name="T12/card/region-2/body"/>
+          <p:cNvSpPr/>
+          <p:nvPr/>
+        </p:nvSpPr>
+        <p:spPr>
+          <a:xfrm>
+            <a:off x="457200" y="3403378"/>
+            <a:ext cx="7296150" cy="811816"/>
+          </a:xfrm>
+          <a:prstGeom prst="rect">
+            <a:avLst/>
+          </a:prstGeom>
+          <a:noFill/>
+          <a:ln/>
+        </p:spPr>
+        <p:txBody>
+          <a:bodyPr wrap="none" lIns="0" tIns="0" rIns="0" bIns="0" rtlCol="0" anchor="t"/>
+          <a:lstStyle/>
+          <a:p>
+            <a:pPr algn="l" indent="0" marL="0">
+              <a:lnSpc>
+                <a:spcPts val="2232"/>
+              </a:lnSpc>
+              <a:buNone/>
+            </a:pPr>
+            <a:r>
+              <a:rPr lang="zh-CN" altLang="en-US" sz="1800" dirty="0">
                 <a:solidFill>
                   <a:srgbClr val="1C2430"/>
                 </a:solidFill>
@@ -9030,19 +9783,19 @@
                 <a:ea typeface="Noto Sans CJK SC" pitchFamily="34" charset="-122"/>
                 <a:cs typeface="Noto Sans CJK SC" pitchFamily="34" charset="-120"/>
               </a:rPr>
-              <a:t>示例：min L = Ldata + λ Lregularizer</a:t>
-            </a:r>
-            <a:endParaRPr lang="zh-CN" sz="1725" dirty="0"/>
-          </a:p>
-          <a:p>
-            <a:pPr algn="l" indent="0" marL="0">
-              <a:lnSpc>
-                <a:spcPts val="2139"/>
-              </a:lnSpc>
-              <a:buNone/>
-            </a:pPr>
-            <a:r>
-              <a:rPr lang="zh-CN" altLang="en-US" sz="1725" dirty="0">
+              <a:t>示例：g(x) ≤ 0，a_t ∈ A</a:t>
+            </a:r>
+            <a:endParaRPr lang="zh-CN" sz="1800" dirty="0"/>
+          </a:p>
+          <a:p>
+            <a:pPr algn="l" indent="0" marL="0">
+              <a:lnSpc>
+                <a:spcPts val="2232"/>
+              </a:lnSpc>
+              <a:buNone/>
+            </a:pPr>
+            <a:r>
+              <a:rPr lang="zh-CN" altLang="en-US" sz="1800" dirty="0">
                 <a:solidFill>
                   <a:srgbClr val="1C2430"/>
                 </a:solidFill>
@@ -9050,48 +9803,28 @@
                 <a:ea typeface="Noto Sans CJK SC" pitchFamily="34" charset="-122"/>
                 <a:cs typeface="Noto Sans CJK SC" pitchFamily="34" charset="-120"/>
               </a:rPr>
-              <a:t>替换为原论文公式并解释每一项</a:t>
-            </a:r>
-            <a:endParaRPr lang="zh-CN" sz="1725" dirty="0"/>
-          </a:p>
-          <a:p>
-            <a:pPr algn="l" indent="0" marL="0">
-              <a:lnSpc>
-                <a:spcPts val="2139"/>
-              </a:lnSpc>
-              <a:buNone/>
-            </a:pPr>
-            <a:r>
-              <a:rPr lang="zh-CN" altLang="en-US" sz="1725" dirty="0">
-                <a:solidFill>
-                  <a:srgbClr val="1C2430"/>
-                </a:solidFill>
-                <a:latin typeface="Noto Sans CJK SC" pitchFamily="34" charset="0"/>
-                <a:ea typeface="Noto Sans CJK SC" pitchFamily="34" charset="-122"/>
-                <a:cs typeface="Noto Sans CJK SC" pitchFamily="34" charset="-120"/>
-              </a:rPr>
-              <a:t>确认优化目标与评价指标的关系</a:t>
-            </a:r>
-            <a:endParaRPr lang="zh-CN" sz="1725" dirty="0"/>
-          </a:p>
-        </p:txBody>
-      </p:sp>
-      <p:sp>
-        <p:nvSpPr>
-          <p:cNvPr id="12" name="T12/card/region-2/heading-rule"/>
-          <p:cNvSpPr/>
-          <p:nvPr/>
-        </p:nvSpPr>
-        <p:spPr>
-          <a:xfrm>
-            <a:off x="457200" y="3390900"/>
+              <a:t>说明约束作用对象与违反代价</a:t>
+            </a:r>
+            <a:endParaRPr lang="zh-CN" sz="1800" dirty="0"/>
+          </a:p>
+        </p:txBody>
+      </p:sp>
+      <p:sp>
+        <p:nvSpPr>
+          <p:cNvPr id="16" name="T12/card/region-3/base-rule"/>
+          <p:cNvSpPr/>
+          <p:nvPr/>
+        </p:nvSpPr>
+        <p:spPr>
+          <a:xfrm>
+            <a:off x="457200" y="6053423"/>
             <a:ext cx="7296150" cy="0"/>
           </a:xfrm>
           <a:prstGeom prst="line">
             <a:avLst/>
           </a:prstGeom>
           <a:noFill/>
-          <a:ln w="9525">
+          <a:ln w="10478">
             <a:solidFill>
               <a:srgbClr val="BEC8D4"/>
             </a:solidFill>
@@ -9101,274 +9834,20 @@
       </p:sp>
       <p:sp>
         <p:nvSpPr>
-          <p:cNvPr id="13" name="T12/card/region-2/heading-mark"/>
-          <p:cNvSpPr/>
-          <p:nvPr/>
-        </p:nvSpPr>
-        <p:spPr>
-          <a:xfrm>
-            <a:off x="457200" y="3390900"/>
-            <a:ext cx="342900" cy="0"/>
-          </a:xfrm>
-          <a:prstGeom prst="line">
-            <a:avLst/>
-          </a:prstGeom>
-          <a:noFill/>
-          <a:ln w="17145">
-            <a:solidFill>
-              <a:srgbClr val="173C70"/>
-            </a:solidFill>
-            <a:prstDash val="solid"/>
-          </a:ln>
-        </p:spPr>
-      </p:sp>
-      <p:sp>
-        <p:nvSpPr>
-          <p:cNvPr id="14" name="T12/card/region-2/title"/>
-          <p:cNvSpPr/>
-          <p:nvPr/>
-        </p:nvSpPr>
-        <p:spPr>
-          <a:xfrm>
-            <a:off x="457200" y="3048000"/>
-            <a:ext cx="7296150" cy="323850"/>
-          </a:xfrm>
-          <a:prstGeom prst="rect">
-            <a:avLst/>
-          </a:prstGeom>
-          <a:noFill/>
-          <a:ln/>
-        </p:spPr>
-        <p:txBody>
-          <a:bodyPr wrap="none" lIns="0" tIns="0" rIns="0" bIns="0" rtlCol="0" anchor="t"/>
-          <a:lstStyle/>
-          <a:p>
-            <a:pPr algn="l" indent="0" marL="0">
-              <a:lnSpc>
-                <a:spcPts val="2156"/>
-              </a:lnSpc>
-              <a:buNone/>
-            </a:pPr>
-            <a:r>
-              <a:rPr lang="zh-CN" altLang="en-US" sz="1875" b="1" dirty="0">
-                <a:solidFill>
-                  <a:srgbClr val="173C70"/>
-                </a:solidFill>
-                <a:latin typeface="Noto Sans CJK SC" pitchFamily="34" charset="0"/>
-                <a:ea typeface="Noto Sans CJK SC" pitchFamily="34" charset="-122"/>
-                <a:cs typeface="Noto Sans CJK SC" pitchFamily="34" charset="-120"/>
-              </a:rPr>
-              <a:t>约束集合</a:t>
-            </a:r>
-            <a:endParaRPr lang="zh-CN" sz="1875" dirty="0"/>
-          </a:p>
-        </p:txBody>
-      </p:sp>
-      <p:sp>
-        <p:nvSpPr>
-          <p:cNvPr id="15" name="T12/card/region-2/body"/>
-          <p:cNvSpPr/>
-          <p:nvPr/>
-        </p:nvSpPr>
-        <p:spPr>
-          <a:xfrm>
-            <a:off x="457200" y="3524250"/>
-            <a:ext cx="7296150" cy="762000"/>
-          </a:xfrm>
-          <a:prstGeom prst="rect">
-            <a:avLst/>
-          </a:prstGeom>
-          <a:noFill/>
-          <a:ln/>
-        </p:spPr>
-        <p:txBody>
-          <a:bodyPr wrap="none" lIns="0" tIns="0" rIns="0" bIns="0" rtlCol="0" anchor="t"/>
-          <a:lstStyle/>
-          <a:p>
-            <a:pPr algn="l" indent="0" marL="0">
-              <a:lnSpc>
-                <a:spcPts val="2232"/>
-              </a:lnSpc>
-              <a:buNone/>
-            </a:pPr>
-            <a:r>
-              <a:rPr lang="zh-CN" altLang="en-US" sz="1800" dirty="0">
-                <a:solidFill>
-                  <a:srgbClr val="1C2430"/>
-                </a:solidFill>
-                <a:latin typeface="Noto Sans CJK SC" pitchFamily="34" charset="0"/>
-                <a:ea typeface="Noto Sans CJK SC" pitchFamily="34" charset="-122"/>
-                <a:cs typeface="Noto Sans CJK SC" pitchFamily="34" charset="-120"/>
-              </a:rPr>
-              <a:t>示例：g(x) ≤ 0，a_t ∈ A</a:t>
-            </a:r>
-            <a:endParaRPr lang="zh-CN" sz="1800" dirty="0"/>
-          </a:p>
-          <a:p>
-            <a:pPr algn="l" indent="0" marL="0">
-              <a:lnSpc>
-                <a:spcPts val="2232"/>
-              </a:lnSpc>
-              <a:buNone/>
-            </a:pPr>
-            <a:r>
-              <a:rPr lang="zh-CN" altLang="en-US" sz="1800" dirty="0">
-                <a:solidFill>
-                  <a:srgbClr val="1C2430"/>
-                </a:solidFill>
-                <a:latin typeface="Noto Sans CJK SC" pitchFamily="34" charset="0"/>
-                <a:ea typeface="Noto Sans CJK SC" pitchFamily="34" charset="-122"/>
-                <a:cs typeface="Noto Sans CJK SC" pitchFamily="34" charset="-120"/>
-              </a:rPr>
-              <a:t>说明约束作用对象与违反代价</a:t>
-            </a:r>
-            <a:endParaRPr lang="zh-CN" sz="1800" dirty="0"/>
-          </a:p>
-        </p:txBody>
-      </p:sp>
-      <p:sp>
-        <p:nvSpPr>
-          <p:cNvPr id="16" name="T12/card/region-3/title"/>
-          <p:cNvSpPr/>
-          <p:nvPr/>
-        </p:nvSpPr>
-        <p:spPr>
-          <a:xfrm>
-            <a:off x="457200" y="4552950"/>
-            <a:ext cx="7296150" cy="323850"/>
-          </a:xfrm>
-          <a:prstGeom prst="rect">
-            <a:avLst/>
-          </a:prstGeom>
-          <a:noFill/>
-          <a:ln/>
-        </p:spPr>
-        <p:txBody>
-          <a:bodyPr wrap="none" lIns="0" tIns="0" rIns="0" bIns="0" rtlCol="0" anchor="t"/>
-          <a:lstStyle/>
-          <a:p>
-            <a:pPr algn="l" indent="0" marL="0">
-              <a:lnSpc>
-                <a:spcPts val="2156"/>
-              </a:lnSpc>
-              <a:buNone/>
-            </a:pPr>
-            <a:r>
-              <a:rPr lang="zh-CN" altLang="en-US" sz="1875" b="1" dirty="0">
-                <a:solidFill>
-                  <a:srgbClr val="173C70"/>
-                </a:solidFill>
-                <a:latin typeface="Noto Sans CJK SC" pitchFamily="34" charset="0"/>
-                <a:ea typeface="Noto Sans CJK SC" pitchFamily="34" charset="-122"/>
-                <a:cs typeface="Noto Sans CJK SC" pitchFamily="34" charset="-120"/>
-              </a:rPr>
-              <a:t>求解与评价</a:t>
-            </a:r>
-            <a:endParaRPr lang="zh-CN" sz="1875" dirty="0"/>
-          </a:p>
-        </p:txBody>
-      </p:sp>
-      <p:sp>
-        <p:nvSpPr>
-          <p:cNvPr id="17" name="T12/card/region-3/body"/>
-          <p:cNvSpPr/>
-          <p:nvPr/>
-        </p:nvSpPr>
-        <p:spPr>
-          <a:xfrm>
-            <a:off x="457200" y="5000625"/>
-            <a:ext cx="7296150" cy="1019175"/>
-          </a:xfrm>
-          <a:prstGeom prst="rect">
-            <a:avLst/>
-          </a:prstGeom>
-          <a:noFill/>
-          <a:ln/>
-        </p:spPr>
-        <p:txBody>
-          <a:bodyPr wrap="none" lIns="0" tIns="0" rIns="0" bIns="0" rtlCol="0" anchor="t"/>
-          <a:lstStyle/>
-          <a:p>
-            <a:pPr algn="l" indent="0" marL="0">
-              <a:lnSpc>
-                <a:spcPts val="2232"/>
-              </a:lnSpc>
-              <a:buNone/>
-            </a:pPr>
-            <a:r>
-              <a:rPr lang="zh-CN" altLang="en-US" sz="1800" dirty="0">
-                <a:solidFill>
-                  <a:srgbClr val="1C2430"/>
-                </a:solidFill>
-                <a:latin typeface="Noto Sans CJK SC" pitchFamily="34" charset="0"/>
-                <a:ea typeface="Noto Sans CJK SC" pitchFamily="34" charset="-122"/>
-                <a:cs typeface="Noto Sans CJK SC" pitchFamily="34" charset="-120"/>
-              </a:rPr>
-              <a:t>求解器负责怎样的搜索或更新</a:t>
-            </a:r>
-            <a:endParaRPr lang="zh-CN" sz="1800" dirty="0"/>
-          </a:p>
-          <a:p>
-            <a:pPr algn="l" indent="0" marL="0">
-              <a:lnSpc>
-                <a:spcPts val="2232"/>
-              </a:lnSpc>
-              <a:buNone/>
-            </a:pPr>
-            <a:r>
-              <a:rPr lang="zh-CN" altLang="en-US" sz="1800" dirty="0">
-                <a:solidFill>
-                  <a:srgbClr val="1C2430"/>
-                </a:solidFill>
-                <a:latin typeface="Noto Sans CJK SC" pitchFamily="34" charset="0"/>
-                <a:ea typeface="Noto Sans CJK SC" pitchFamily="34" charset="-122"/>
-                <a:cs typeface="Noto Sans CJK SC" pitchFamily="34" charset="-120"/>
-              </a:rPr>
-              <a:t>独立测试怎样估计结果与不确定性</a:t>
-            </a:r>
-            <a:endParaRPr lang="zh-CN" sz="1800" dirty="0"/>
-          </a:p>
-        </p:txBody>
-      </p:sp>
-      <p:sp>
-        <p:nvSpPr>
-          <p:cNvPr id="18" name="T12/card/region-4/base-rule"/>
-          <p:cNvSpPr/>
-          <p:nvPr/>
-        </p:nvSpPr>
-        <p:spPr>
-          <a:xfrm>
-            <a:off x="8096250" y="3600450"/>
-            <a:ext cx="3638550" cy="0"/>
-          </a:xfrm>
-          <a:prstGeom prst="line">
-            <a:avLst/>
-          </a:prstGeom>
-          <a:noFill/>
-          <a:ln w="10478">
-            <a:solidFill>
-              <a:srgbClr val="BEC8D4"/>
-            </a:solidFill>
-            <a:prstDash val="solid"/>
-          </a:ln>
-        </p:spPr>
-      </p:sp>
-      <p:sp>
-        <p:nvSpPr>
-          <p:cNvPr id="19" name="T12/card/region-4/side-mark"/>
-          <p:cNvSpPr/>
-          <p:nvPr/>
-        </p:nvSpPr>
-        <p:spPr>
-          <a:xfrm>
-            <a:off x="8096250" y="1371600"/>
+          <p:cNvPr id="17" name="T12/card/region-3/side-mark"/>
+          <p:cNvSpPr/>
+          <p:nvPr/>
+        </p:nvSpPr>
+        <p:spPr>
+          <a:xfrm>
+            <a:off x="457200" y="4489895"/>
             <a:ext cx="47625" cy="295275"/>
           </a:xfrm>
           <a:prstGeom prst="rect">
             <a:avLst/>
           </a:prstGeom>
           <a:solidFill>
-            <a:srgbClr val="173C70"/>
+            <a:srgbClr val="235E96"/>
           </a:solidFill>
           <a:ln w="12700">
             <a:solidFill>
@@ -9382,14 +9861,14 @@
       </p:sp>
       <p:sp>
         <p:nvSpPr>
-          <p:cNvPr id="20" name="T12/card/region-4/title"/>
-          <p:cNvSpPr/>
-          <p:nvPr/>
-        </p:nvSpPr>
-        <p:spPr>
-          <a:xfrm>
-            <a:off x="8248650" y="1371600"/>
-            <a:ext cx="3486150" cy="304800"/>
+          <p:cNvPr id="18" name="T12/card/region-3/title"/>
+          <p:cNvSpPr/>
+          <p:nvPr/>
+        </p:nvSpPr>
+        <p:spPr>
+          <a:xfrm>
+            <a:off x="609600" y="4489895"/>
+            <a:ext cx="7143750" cy="304800"/>
           </a:xfrm>
           <a:prstGeom prst="rect">
             <a:avLst/>
@@ -9403,14 +9882,210 @@
           <a:p>
             <a:pPr algn="l" indent="0" marL="0">
               <a:lnSpc>
-                <a:spcPts val="2070"/>
+                <a:spcPts val="2242"/>
+              </a:lnSpc>
+              <a:buNone/>
+            </a:pPr>
+            <a:r>
+              <a:rPr lang="zh-CN" altLang="en-US" sz="1950" b="1" dirty="0">
+                <a:solidFill>
+                  <a:srgbClr val="235E96"/>
+                </a:solidFill>
+                <a:latin typeface="Noto Sans CJK SC" pitchFamily="34" charset="0"/>
+                <a:ea typeface="Noto Sans CJK SC" pitchFamily="34" charset="-122"/>
+                <a:cs typeface="Noto Sans CJK SC" pitchFamily="34" charset="-120"/>
+              </a:rPr>
+              <a:t>求解与评价</a:t>
+            </a:r>
+            <a:endParaRPr lang="zh-CN" sz="1950" dirty="0"/>
+          </a:p>
+        </p:txBody>
+      </p:sp>
+      <p:sp>
+        <p:nvSpPr>
+          <p:cNvPr id="19" name="T12/card/region-3/body"/>
+          <p:cNvSpPr/>
+          <p:nvPr/>
+        </p:nvSpPr>
+        <p:spPr>
+          <a:xfrm>
+            <a:off x="609600" y="4908995"/>
+            <a:ext cx="7143750" cy="1049179"/>
+          </a:xfrm>
+          <a:prstGeom prst="rect">
+            <a:avLst/>
+          </a:prstGeom>
+          <a:noFill/>
+          <a:ln/>
+        </p:spPr>
+        <p:txBody>
+          <a:bodyPr wrap="none" lIns="0" tIns="0" rIns="0" bIns="0" rtlCol="0" anchor="t"/>
+          <a:lstStyle/>
+          <a:p>
+            <a:pPr algn="l" indent="0" marL="0">
+              <a:lnSpc>
+                <a:spcPts val="2232"/>
+              </a:lnSpc>
+              <a:buNone/>
+            </a:pPr>
+            <a:r>
+              <a:rPr lang="zh-CN" altLang="en-US" sz="1800" dirty="0">
+                <a:solidFill>
+                  <a:srgbClr val="1C2430"/>
+                </a:solidFill>
+                <a:latin typeface="Noto Sans CJK SC" pitchFamily="34" charset="0"/>
+                <a:ea typeface="Noto Sans CJK SC" pitchFamily="34" charset="-122"/>
+                <a:cs typeface="Noto Sans CJK SC" pitchFamily="34" charset="-120"/>
+              </a:rPr>
+              <a:t>求解器负责怎样的搜索或更新</a:t>
+            </a:r>
+            <a:endParaRPr lang="zh-CN" sz="1800" dirty="0"/>
+          </a:p>
+          <a:p>
+            <a:pPr algn="l" indent="0" marL="0">
+              <a:lnSpc>
+                <a:spcPts val="2232"/>
+              </a:lnSpc>
+              <a:buNone/>
+            </a:pPr>
+            <a:r>
+              <a:rPr lang="zh-CN" altLang="en-US" sz="1800" dirty="0">
+                <a:solidFill>
+                  <a:srgbClr val="1C2430"/>
+                </a:solidFill>
+                <a:latin typeface="Noto Sans CJK SC" pitchFamily="34" charset="0"/>
+                <a:ea typeface="Noto Sans CJK SC" pitchFamily="34" charset="-122"/>
+                <a:cs typeface="Noto Sans CJK SC" pitchFamily="34" charset="-120"/>
+              </a:rPr>
+              <a:t>独立测试怎样估计结果与</a:t>
+            </a:r>
+            <a:pPr algn="l" indent="0" marL="0">
+              <a:lnSpc>
+                <a:spcPts val="2232"/>
               </a:lnSpc>
               <a:buNone/>
             </a:pPr>
             <a:r>
               <a:rPr lang="zh-CN" altLang="en-US" sz="1800" b="1" dirty="0">
                 <a:solidFill>
-                  <a:srgbClr val="173C70"/>
+                  <a:srgbClr val="235E96"/>
+                </a:solidFill>
+                <a:latin typeface="Noto Sans CJK SC" pitchFamily="34" charset="0"/>
+                <a:ea typeface="Noto Sans CJK SC" pitchFamily="34" charset="-122"/>
+                <a:cs typeface="Noto Sans CJK SC" pitchFamily="34" charset="-120"/>
+              </a:rPr>
+              <a:t>不确定性</a:t>
+            </a:r>
+            <a:endParaRPr lang="zh-CN" sz="1800" dirty="0"/>
+          </a:p>
+        </p:txBody>
+      </p:sp>
+      <p:sp>
+        <p:nvSpPr>
+          <p:cNvPr id="20" name="T12/card/region-4/frame"/>
+          <p:cNvSpPr/>
+          <p:nvPr/>
+        </p:nvSpPr>
+        <p:spPr>
+          <a:xfrm>
+            <a:off x="8096250" y="1167194"/>
+            <a:ext cx="3638550" cy="2334387"/>
+          </a:xfrm>
+          <a:prstGeom prst="rect">
+            <a:avLst/>
+          </a:prstGeom>
+          <a:solidFill>
+            <a:srgbClr val="FFFFFF"/>
+          </a:solidFill>
+          <a:ln w="9525">
+            <a:solidFill>
+              <a:srgbClr val="BEC8D4"/>
+            </a:solidFill>
+            <a:prstDash val="solid"/>
+          </a:ln>
+        </p:spPr>
+      </p:sp>
+      <p:sp>
+        <p:nvSpPr>
+          <p:cNvPr id="21" name="T12/card/region-4/ledger-accent"/>
+          <p:cNvSpPr/>
+          <p:nvPr/>
+        </p:nvSpPr>
+        <p:spPr>
+          <a:xfrm>
+            <a:off x="8096250" y="1167194"/>
+            <a:ext cx="57150" cy="2334387"/>
+          </a:xfrm>
+          <a:prstGeom prst="rect">
+            <a:avLst/>
+          </a:prstGeom>
+          <a:solidFill>
+            <a:srgbClr val="536A7A"/>
+          </a:solidFill>
+          <a:ln w="12700">
+            <a:solidFill>
+              <a:srgbClr val="FFFFFF">
+                <a:alpha val="0"/>
+              </a:srgbClr>
+            </a:solidFill>
+            <a:prstDash val="solid"/>
+          </a:ln>
+        </p:spPr>
+      </p:sp>
+      <p:sp>
+        <p:nvSpPr>
+          <p:cNvPr id="22" name="T12/card/region-4/ledger-rule"/>
+          <p:cNvSpPr/>
+          <p:nvPr/>
+        </p:nvSpPr>
+        <p:spPr>
+          <a:xfrm>
+            <a:off x="8286750" y="1710119"/>
+            <a:ext cx="3257550" cy="0"/>
+          </a:xfrm>
+          <a:prstGeom prst="line">
+            <a:avLst/>
+          </a:prstGeom>
+          <a:noFill/>
+          <a:ln w="13335">
+            <a:solidFill>
+              <a:srgbClr val="BEC8D4"/>
+            </a:solidFill>
+            <a:prstDash val="solid"/>
+          </a:ln>
+        </p:spPr>
+      </p:sp>
+      <p:sp>
+        <p:nvSpPr>
+          <p:cNvPr id="23" name="T12/card/region-4/title"/>
+          <p:cNvSpPr/>
+          <p:nvPr/>
+        </p:nvSpPr>
+        <p:spPr>
+          <a:xfrm>
+            <a:off x="8286750" y="1329119"/>
+            <a:ext cx="3257550" cy="361950"/>
+          </a:xfrm>
+          <a:prstGeom prst="rect">
+            <a:avLst/>
+          </a:prstGeom>
+          <a:noFill/>
+          <a:ln/>
+        </p:spPr>
+        <p:txBody>
+          <a:bodyPr wrap="none" lIns="0" tIns="0" rIns="0" bIns="0" rtlCol="0" anchor="t"/>
+          <a:lstStyle/>
+          <a:p>
+            <a:pPr algn="l" indent="0" marL="0">
+              <a:lnSpc>
+                <a:spcPts val="2242"/>
+              </a:lnSpc>
+              <a:buNone/>
+            </a:pPr>
+            <a:r>
+              <a:rPr lang="zh-CN" altLang="en-US" sz="1950" b="1" dirty="0">
+                <a:solidFill>
+                  <a:srgbClr val="536A7A"/>
                 </a:solidFill>
                 <a:latin typeface="Noto Sans CJK SC" pitchFamily="34" charset="0"/>
                 <a:ea typeface="Noto Sans CJK SC" pitchFamily="34" charset="-122"/>
@@ -9418,39 +10093,59 @@
               </a:rPr>
               <a:t>符号与单位</a:t>
             </a:r>
+            <a:endParaRPr lang="zh-CN" sz="1950" dirty="0"/>
+          </a:p>
+        </p:txBody>
+      </p:sp>
+      <p:sp>
+        <p:nvSpPr>
+          <p:cNvPr id="24" name="T12/card/region-4/body"/>
+          <p:cNvSpPr/>
+          <p:nvPr/>
+        </p:nvSpPr>
+        <p:spPr>
+          <a:xfrm>
+            <a:off x="8286750" y="1852994"/>
+            <a:ext cx="3257550" cy="1458087"/>
+          </a:xfrm>
+          <a:prstGeom prst="rect">
+            <a:avLst/>
+          </a:prstGeom>
+          <a:noFill/>
+          <a:ln/>
+        </p:spPr>
+        <p:txBody>
+          <a:bodyPr wrap="none" lIns="0" tIns="0" rIns="0" bIns="0" rtlCol="0" anchor="t"/>
+          <a:lstStyle/>
+          <a:p>
+            <a:pPr algn="l" indent="0" marL="0">
+              <a:lnSpc>
+                <a:spcPts val="2232"/>
+              </a:lnSpc>
+              <a:buNone/>
+            </a:pPr>
+            <a:r>
+              <a:rPr lang="zh-CN" altLang="en-US" sz="1800" dirty="0">
+                <a:solidFill>
+                  <a:srgbClr val="1C2430"/>
+                </a:solidFill>
+                <a:latin typeface="Noto Sans CJK SC" pitchFamily="34" charset="0"/>
+                <a:ea typeface="Noto Sans CJK SC" pitchFamily="34" charset="-122"/>
+                <a:cs typeface="Noto Sans CJK SC" pitchFamily="34" charset="-120"/>
+              </a:rPr>
+              <a:t>统一状态、动作、参数与损失符</a:t>
+            </a:r>
             <a:endParaRPr lang="zh-CN" sz="1800" dirty="0"/>
           </a:p>
-        </p:txBody>
-      </p:sp>
-      <p:sp>
-        <p:nvSpPr>
-          <p:cNvPr id="21" name="T12/card/region-4/body"/>
-          <p:cNvSpPr/>
-          <p:nvPr/>
-        </p:nvSpPr>
-        <p:spPr>
-          <a:xfrm>
-            <a:off x="8248650" y="1790700"/>
-            <a:ext cx="3486150" cy="1714500"/>
-          </a:xfrm>
-          <a:prstGeom prst="rect">
-            <a:avLst/>
-          </a:prstGeom>
-          <a:noFill/>
-          <a:ln/>
-        </p:spPr>
-        <p:txBody>
-          <a:bodyPr wrap="none" lIns="0" tIns="0" rIns="0" bIns="0" rtlCol="0" anchor="t"/>
-          <a:lstStyle/>
-          <a:p>
-            <a:pPr algn="l" indent="0" marL="0">
-              <a:lnSpc>
-                <a:spcPts val="2139"/>
-              </a:lnSpc>
-              <a:buNone/>
-            </a:pPr>
-            <a:r>
-              <a:rPr lang="zh-CN" altLang="en-US" sz="1725" dirty="0">
+          <a:p>
+            <a:pPr algn="l" indent="0" marL="0">
+              <a:lnSpc>
+                <a:spcPts val="2232"/>
+              </a:lnSpc>
+              <a:buNone/>
+            </a:pPr>
+            <a:r>
+              <a:rPr lang="zh-CN" altLang="en-US" sz="1800" dirty="0">
                 <a:solidFill>
                   <a:srgbClr val="1C2430"/>
                 </a:solidFill>
@@ -9458,19 +10153,19 @@
                 <a:ea typeface="Noto Sans CJK SC" pitchFamily="34" charset="-122"/>
                 <a:cs typeface="Noto Sans CJK SC" pitchFamily="34" charset="-120"/>
               </a:rPr>
-              <a:t>统一状态、动作、参数与损失符号</a:t>
-            </a:r>
-            <a:endParaRPr lang="zh-CN" sz="1725" dirty="0"/>
-          </a:p>
-          <a:p>
-            <a:pPr algn="l" indent="0" marL="0">
-              <a:lnSpc>
-                <a:spcPts val="2139"/>
-              </a:lnSpc>
-              <a:buNone/>
-            </a:pPr>
-            <a:r>
-              <a:rPr lang="zh-CN" altLang="en-US" sz="1725" dirty="0">
+              <a:t>号</a:t>
+            </a:r>
+            <a:endParaRPr lang="zh-CN" sz="1800" dirty="0"/>
+          </a:p>
+          <a:p>
+            <a:pPr algn="l" indent="0" marL="0">
+              <a:lnSpc>
+                <a:spcPts val="2232"/>
+              </a:lnSpc>
+              <a:buNone/>
+            </a:pPr>
+            <a:r>
+              <a:rPr lang="zh-CN" altLang="en-US" sz="1800" dirty="0">
                 <a:solidFill>
                   <a:srgbClr val="1C2430"/>
                 </a:solidFill>
@@ -9480,17 +10175,17 @@
               </a:rPr>
               <a:t>所有数值项保留量纲与归一化</a:t>
             </a:r>
-            <a:endParaRPr lang="zh-CN" sz="1725" dirty="0"/>
-          </a:p>
-          <a:p>
-            <a:pPr algn="l" indent="0" marL="0">
-              <a:lnSpc>
-                <a:spcPts val="2139"/>
-              </a:lnSpc>
-              <a:buNone/>
-            </a:pPr>
-            <a:r>
-              <a:rPr lang="zh-CN" altLang="en-US" sz="1725" dirty="0">
+            <a:endParaRPr lang="zh-CN" sz="1800" dirty="0"/>
+          </a:p>
+          <a:p>
+            <a:pPr algn="l" indent="0" marL="0">
+              <a:lnSpc>
+                <a:spcPts val="2232"/>
+              </a:lnSpc>
+              <a:buNone/>
+            </a:pPr>
+            <a:r>
+              <a:rPr lang="zh-CN" altLang="en-US" sz="1800" dirty="0">
                 <a:solidFill>
                   <a:srgbClr val="1C2430"/>
                 </a:solidFill>
@@ -9500,20 +10195,20 @@
               </a:rPr>
               <a:t>避免同一符号代表不同物理量</a:t>
             </a:r>
-            <a:endParaRPr lang="zh-CN" sz="1725" dirty="0"/>
-          </a:p>
-        </p:txBody>
-      </p:sp>
-      <p:sp>
-        <p:nvSpPr>
-          <p:cNvPr id="22" name="T12/card/region-5/frame"/>
-          <p:cNvSpPr/>
-          <p:nvPr/>
-        </p:nvSpPr>
-        <p:spPr>
-          <a:xfrm>
-            <a:off x="8096250" y="3943350"/>
-            <a:ext cx="3638550" cy="2114550"/>
+            <a:endParaRPr lang="zh-CN" sz="1800" dirty="0"/>
+          </a:p>
+        </p:txBody>
+      </p:sp>
+      <p:sp>
+        <p:nvSpPr>
+          <p:cNvPr id="25" name="T12/card/region-5/frame"/>
+          <p:cNvSpPr/>
+          <p:nvPr/>
+        </p:nvSpPr>
+        <p:spPr>
+          <a:xfrm>
+            <a:off x="8096250" y="3853244"/>
+            <a:ext cx="3638550" cy="2200275"/>
           </a:xfrm>
           <a:prstGeom prst="rect">
             <a:avLst/>
@@ -9531,20 +10226,20 @@
       </p:sp>
       <p:sp>
         <p:nvSpPr>
-          <p:cNvPr id="23" name="T12/card/region-5/tab"/>
-          <p:cNvSpPr/>
-          <p:nvPr/>
-        </p:nvSpPr>
-        <p:spPr>
-          <a:xfrm>
-            <a:off x="8210550" y="3829050"/>
-            <a:ext cx="1638300" cy="320040"/>
+          <p:cNvPr id="26" name="T12/card/region-5/tab"/>
+          <p:cNvSpPr/>
+          <p:nvPr/>
+        </p:nvSpPr>
+        <p:spPr>
+          <a:xfrm>
+            <a:off x="8210550" y="3738944"/>
+            <a:ext cx="1752600" cy="342900"/>
           </a:xfrm>
           <a:prstGeom prst="rect">
             <a:avLst/>
           </a:prstGeom>
           <a:solidFill>
-            <a:srgbClr val="355D88"/>
+            <a:srgbClr val="6C528E"/>
           </a:solidFill>
           <a:ln w="12700">
             <a:solidFill>
@@ -9558,14 +10253,14 @@
       </p:sp>
       <p:sp>
         <p:nvSpPr>
-          <p:cNvPr id="24" name="T12/card/region-5/title"/>
-          <p:cNvSpPr/>
-          <p:nvPr/>
-        </p:nvSpPr>
-        <p:spPr>
-          <a:xfrm>
-            <a:off x="8315325" y="3857625"/>
-            <a:ext cx="1428750" cy="262890"/>
+          <p:cNvPr id="27" name="T12/card/region-5/title"/>
+          <p:cNvSpPr/>
+          <p:nvPr/>
+        </p:nvSpPr>
+        <p:spPr>
+          <a:xfrm>
+            <a:off x="8315325" y="3767519"/>
+            <a:ext cx="1543050" cy="285750"/>
           </a:xfrm>
           <a:prstGeom prst="rect">
             <a:avLst/>
@@ -9579,12 +10274,12 @@
           <a:p>
             <a:pPr algn="l" indent="0" marL="0">
               <a:lnSpc>
-                <a:spcPts val="2070"/>
-              </a:lnSpc>
-              <a:buNone/>
-            </a:pPr>
-            <a:r>
-              <a:rPr lang="zh-CN" altLang="en-US" sz="1800" b="1" dirty="0">
+                <a:spcPts val="2242"/>
+              </a:lnSpc>
+              <a:buNone/>
+            </a:pPr>
+            <a:r>
+              <a:rPr lang="zh-CN" altLang="en-US" sz="1950" b="1" dirty="0">
                 <a:solidFill>
                   <a:srgbClr val="FFFFFF"/>
                 </a:solidFill>
@@ -9594,39 +10289,59 @@
               </a:rPr>
               <a:t>可识别性假设</a:t>
             </a:r>
+            <a:endParaRPr lang="zh-CN" sz="1950" dirty="0"/>
+          </a:p>
+        </p:txBody>
+      </p:sp>
+      <p:sp>
+        <p:nvSpPr>
+          <p:cNvPr id="28" name="T12/card/region-5/body"/>
+          <p:cNvSpPr/>
+          <p:nvPr/>
+        </p:nvSpPr>
+        <p:spPr>
+          <a:xfrm>
+            <a:off x="8229600" y="4224719"/>
+            <a:ext cx="3371850" cy="1733550"/>
+          </a:xfrm>
+          <a:prstGeom prst="rect">
+            <a:avLst/>
+          </a:prstGeom>
+          <a:noFill/>
+          <a:ln/>
+        </p:spPr>
+        <p:txBody>
+          <a:bodyPr wrap="none" lIns="0" tIns="0" rIns="0" bIns="0" rtlCol="0" anchor="t"/>
+          <a:lstStyle/>
+          <a:p>
+            <a:pPr algn="l" indent="0" marL="0">
+              <a:lnSpc>
+                <a:spcPts val="2232"/>
+              </a:lnSpc>
+              <a:buNone/>
+            </a:pPr>
+            <a:r>
+              <a:rPr lang="zh-CN" altLang="en-US" sz="1800" dirty="0">
+                <a:solidFill>
+                  <a:srgbClr val="1C2430"/>
+                </a:solidFill>
+                <a:latin typeface="Noto Sans CJK SC" pitchFamily="34" charset="0"/>
+                <a:ea typeface="Noto Sans CJK SC" pitchFamily="34" charset="-122"/>
+                <a:cs typeface="Noto Sans CJK SC" pitchFamily="34" charset="-120"/>
+              </a:rPr>
+              <a:t>解释哪些参数能由观测识别</a:t>
+            </a:r>
             <a:endParaRPr lang="zh-CN" sz="1800" dirty="0"/>
           </a:p>
-        </p:txBody>
-      </p:sp>
-      <p:sp>
-        <p:nvSpPr>
-          <p:cNvPr id="25" name="T12/card/region-5/body"/>
-          <p:cNvSpPr/>
-          <p:nvPr/>
-        </p:nvSpPr>
-        <p:spPr>
-          <a:xfrm>
-            <a:off x="8229600" y="4291965"/>
-            <a:ext cx="3371850" cy="1670685"/>
-          </a:xfrm>
-          <a:prstGeom prst="rect">
-            <a:avLst/>
-          </a:prstGeom>
-          <a:noFill/>
-          <a:ln/>
-        </p:spPr>
-        <p:txBody>
-          <a:bodyPr wrap="none" lIns="0" tIns="0" rIns="0" bIns="0" rtlCol="0" anchor="t"/>
-          <a:lstStyle/>
-          <a:p>
-            <a:pPr algn="l" indent="0" marL="0">
-              <a:lnSpc>
-                <a:spcPts val="2139"/>
-              </a:lnSpc>
-              <a:buNone/>
-            </a:pPr>
-            <a:r>
-              <a:rPr lang="zh-CN" altLang="en-US" sz="1725" dirty="0">
+          <a:p>
+            <a:pPr algn="l" indent="0" marL="0">
+              <a:lnSpc>
+                <a:spcPts val="2232"/>
+              </a:lnSpc>
+              <a:buNone/>
+            </a:pPr>
+            <a:r>
+              <a:rPr lang="zh-CN" altLang="en-US" sz="1800" dirty="0">
                 <a:solidFill>
                   <a:srgbClr val="1C2430"/>
                 </a:solidFill>
@@ -9634,19 +10349,19 @@
                 <a:ea typeface="Noto Sans CJK SC" pitchFamily="34" charset="-122"/>
                 <a:cs typeface="Noto Sans CJK SC" pitchFamily="34" charset="-120"/>
               </a:rPr>
-              <a:t>解释哪些参数能由观测识别</a:t>
-            </a:r>
-            <a:endParaRPr lang="zh-CN" sz="1725" dirty="0"/>
-          </a:p>
-          <a:p>
-            <a:pPr algn="l" indent="0" marL="0">
-              <a:lnSpc>
-                <a:spcPts val="2139"/>
-              </a:lnSpc>
-              <a:buNone/>
-            </a:pPr>
-            <a:r>
-              <a:rPr lang="zh-CN" altLang="en-US" sz="1725" dirty="0">
+              <a:t>列出需要固定或外部提供的条件</a:t>
+            </a:r>
+            <a:endParaRPr lang="zh-CN" sz="1800" dirty="0"/>
+          </a:p>
+          <a:p>
+            <a:pPr algn="l" indent="0" marL="0">
+              <a:lnSpc>
+                <a:spcPts val="2232"/>
+              </a:lnSpc>
+              <a:buNone/>
+            </a:pPr>
+            <a:r>
+              <a:rPr lang="zh-CN" altLang="en-US" sz="1800" dirty="0">
                 <a:solidFill>
                   <a:srgbClr val="1C2430"/>
                 </a:solidFill>
@@ -9654,35 +10369,15 @@
                 <a:ea typeface="Noto Sans CJK SC" pitchFamily="34" charset="-122"/>
                 <a:cs typeface="Noto Sans CJK SC" pitchFamily="34" charset="-120"/>
               </a:rPr>
-              <a:t>列出需要固定或外部提供的条件</a:t>
-            </a:r>
-            <a:endParaRPr lang="zh-CN" sz="1725" dirty="0"/>
-          </a:p>
-          <a:p>
-            <a:pPr algn="l" indent="0" marL="0">
-              <a:lnSpc>
-                <a:spcPts val="2139"/>
-              </a:lnSpc>
-              <a:buNone/>
-            </a:pPr>
-            <a:r>
-              <a:rPr lang="zh-CN" altLang="en-US" sz="1725" dirty="0">
-                <a:solidFill>
-                  <a:srgbClr val="1C2430"/>
-                </a:solidFill>
-                <a:latin typeface="Noto Sans CJK SC" pitchFamily="34" charset="0"/>
-                <a:ea typeface="Noto Sans CJK SC" pitchFamily="34" charset="-122"/>
-                <a:cs typeface="Noto Sans CJK SC" pitchFamily="34" charset="-120"/>
-              </a:rPr>
               <a:t>用消融或敏感性分析检查解释</a:t>
             </a:r>
-            <a:endParaRPr lang="zh-CN" sz="1725" dirty="0"/>
-          </a:p>
-        </p:txBody>
-      </p:sp>
-      <p:sp>
-        <p:nvSpPr>
-          <p:cNvPr id="26" name="T12/sources"/>
+            <a:endParaRPr lang="zh-CN" sz="1800" dirty="0"/>
+          </a:p>
+        </p:txBody>
+      </p:sp>
+      <p:sp>
+        <p:nvSpPr>
+          <p:cNvPr id="29" name="T12/sources"/>
           <p:cNvSpPr/>
           <p:nvPr/>
         </p:nvSpPr>
@@ -9716,7 +10411,7 @@
                 <a:ea typeface="Noto Sans CJK SC" pitchFamily="34" charset="-122"/>
                 <a:cs typeface="Noto Sans CJK SC" pitchFamily="34" charset="-120"/>
               </a:rPr>
-              <a:t>T1 · 2026 · 待替换</a:t>
+              <a:t>T1 · 2026 · 书目占位；图表均为合成示例</a:t>
             </a:r>
             <a:endParaRPr lang="zh-CN" sz="1125" dirty="0"/>
           </a:p>
